--- a/docs/tema5/diapositivas/monitorizacion-operacion.pptx
+++ b/docs/tema5/diapositivas/monitorizacion-operacion.pptx
@@ -5,7 +5,7 @@
     <p:sldMasterId id="2147483648" r:id="rId1"/>
   </p:sldMasterIdLst>
   <p:notesMasterIdLst>
-    <p:notesMasterId r:id="rId13"/>
+    <p:notesMasterId r:id="rId11"/>
   </p:notesMasterIdLst>
   <p:sldIdLst>
     <p:sldId id="256" r:id="rId2"/>
@@ -17,8 +17,6 @@
     <p:sldId id="262" r:id="rId8"/>
     <p:sldId id="263" r:id="rId9"/>
     <p:sldId id="264" r:id="rId10"/>
-    <p:sldId id="265" r:id="rId11"/>
-    <p:sldId id="266" r:id="rId12"/>
   </p:sldIdLst>
   <p:sldSz cx="12192000" cy="6858000"/>
   <p:notesSz cx="6858000" cy="12192000"/>
@@ -147,7 +145,7 @@
     </p:spTree>
     <p:extLst>
       <p:ext uri="{BB962C8B-B14F-4D97-AF65-F5344CB8AC3E}">
-        <p14:creationId xmlns:p14="http://schemas.microsoft.com/office/powerpoint/2010/main" val="19580771"/>
+        <p14:creationId xmlns:p14="http://schemas.microsoft.com/office/powerpoint/2010/main" val="306601144"/>
       </p:ext>
     </p:extLst>
   </p:cSld>
@@ -313,174 +311,6 @@
             <a:fld id="{F7021451-1387-4CA6-816F-3879F97B5CBC}" type="slidenum">
               <a:rPr lang="en-US"/>
               <a:t>1</a:t>
-            </a:fld>
-            <a:endParaRPr lang="en-US"/>
-          </a:p>
-        </p:txBody>
-      </p:sp>
-    </p:spTree>
-    <p:extLst>
-      <p:ext uri="{BB962C8B-B14F-4D97-AF65-F5344CB8AC3E}">
-        <p14:creationId xmlns:p14="http://schemas.microsoft.com/office/powerpoint/2010/main" val="1024086991"/>
-      </p:ext>
-    </p:extLst>
-  </p:cSld>
-  <p:clrMapOvr>
-    <a:masterClrMapping/>
-  </p:clrMapOvr>
-</p:notes>
-</file>
-
-<file path=ppt/notesSlides/notesSlide10.xml><?xml version="1.0" encoding="utf-8"?>
-<p:notes xmlns:a="http://schemas.openxmlformats.org/drawingml/2006/main" xmlns:r="http://schemas.openxmlformats.org/officeDocument/2006/relationships" xmlns:p="http://schemas.openxmlformats.org/presentationml/2006/main">
-  <p:cSld>
-    <p:spTree>
-      <p:nvGrpSpPr>
-        <p:cNvPr id="1" name=""/>
-        <p:cNvGrpSpPr/>
-        <p:nvPr/>
-      </p:nvGrpSpPr>
-      <p:grpSpPr>
-        <a:xfrm>
-          <a:off x="0" y="0"/>
-          <a:ext cx="0" cy="0"/>
-          <a:chOff x="0" y="0"/>
-          <a:chExt cx="0" cy="0"/>
-        </a:xfrm>
-      </p:grpSpPr>
-      <p:sp>
-        <p:nvSpPr>
-          <p:cNvPr id="2" name="Slide Image Placeholder 1"/>
-          <p:cNvSpPr>
-            <a:spLocks noGrp="1" noRot="1" noChangeAspect="1"/>
-          </p:cNvSpPr>
-          <p:nvPr>
-            <p:ph type="sldImg"/>
-          </p:nvPr>
-        </p:nvSpPr>
-        <p:spPr/>
-      </p:sp>
-      <p:sp>
-        <p:nvSpPr>
-          <p:cNvPr id="3" name="Notes Placeholder 2"/>
-          <p:cNvSpPr>
-            <a:spLocks noGrp="1"/>
-          </p:cNvSpPr>
-          <p:nvPr>
-            <p:ph type="body" idx="1"/>
-          </p:nvPr>
-        </p:nvSpPr>
-        <p:spPr/>
-        <p:txBody>
-          <a:bodyPr/>
-          <a:lstStyle/>
-          <a:p>
-            <a:endParaRPr lang="en-US" dirty="0"/>
-          </a:p>
-        </p:txBody>
-      </p:sp>
-      <p:sp>
-        <p:nvSpPr>
-          <p:cNvPr id="4" name="Slide Number Placeholder 3"/>
-          <p:cNvSpPr>
-            <a:spLocks noGrp="1"/>
-          </p:cNvSpPr>
-          <p:nvPr>
-            <p:ph type="sldNum" sz="quarter" idx="10"/>
-          </p:nvPr>
-        </p:nvSpPr>
-        <p:spPr/>
-        <p:txBody>
-          <a:bodyPr/>
-          <a:lstStyle/>
-          <a:p>
-            <a:fld id="{F7021451-1387-4CA6-816F-3879F97B5CBC}" type="slidenum">
-              <a:rPr lang="en-US"/>
-              <a:t>10</a:t>
-            </a:fld>
-            <a:endParaRPr lang="en-US"/>
-          </a:p>
-        </p:txBody>
-      </p:sp>
-    </p:spTree>
-    <p:extLst>
-      <p:ext uri="{BB962C8B-B14F-4D97-AF65-F5344CB8AC3E}">
-        <p14:creationId xmlns:p14="http://schemas.microsoft.com/office/powerpoint/2010/main" val="1024086991"/>
-      </p:ext>
-    </p:extLst>
-  </p:cSld>
-  <p:clrMapOvr>
-    <a:masterClrMapping/>
-  </p:clrMapOvr>
-</p:notes>
-</file>
-
-<file path=ppt/notesSlides/notesSlide11.xml><?xml version="1.0" encoding="utf-8"?>
-<p:notes xmlns:a="http://schemas.openxmlformats.org/drawingml/2006/main" xmlns:r="http://schemas.openxmlformats.org/officeDocument/2006/relationships" xmlns:p="http://schemas.openxmlformats.org/presentationml/2006/main">
-  <p:cSld>
-    <p:spTree>
-      <p:nvGrpSpPr>
-        <p:cNvPr id="1" name=""/>
-        <p:cNvGrpSpPr/>
-        <p:nvPr/>
-      </p:nvGrpSpPr>
-      <p:grpSpPr>
-        <a:xfrm>
-          <a:off x="0" y="0"/>
-          <a:ext cx="0" cy="0"/>
-          <a:chOff x="0" y="0"/>
-          <a:chExt cx="0" cy="0"/>
-        </a:xfrm>
-      </p:grpSpPr>
-      <p:sp>
-        <p:nvSpPr>
-          <p:cNvPr id="2" name="Slide Image Placeholder 1"/>
-          <p:cNvSpPr>
-            <a:spLocks noGrp="1" noRot="1" noChangeAspect="1"/>
-          </p:cNvSpPr>
-          <p:nvPr>
-            <p:ph type="sldImg"/>
-          </p:nvPr>
-        </p:nvSpPr>
-        <p:spPr/>
-      </p:sp>
-      <p:sp>
-        <p:nvSpPr>
-          <p:cNvPr id="3" name="Notes Placeholder 2"/>
-          <p:cNvSpPr>
-            <a:spLocks noGrp="1"/>
-          </p:cNvSpPr>
-          <p:nvPr>
-            <p:ph type="body" idx="1"/>
-          </p:nvPr>
-        </p:nvSpPr>
-        <p:spPr/>
-        <p:txBody>
-          <a:bodyPr/>
-          <a:lstStyle/>
-          <a:p>
-            <a:endParaRPr lang="en-US" dirty="0"/>
-          </a:p>
-        </p:txBody>
-      </p:sp>
-      <p:sp>
-        <p:nvSpPr>
-          <p:cNvPr id="4" name="Slide Number Placeholder 3"/>
-          <p:cNvSpPr>
-            <a:spLocks noGrp="1"/>
-          </p:cNvSpPr>
-          <p:nvPr>
-            <p:ph type="sldNum" sz="quarter" idx="10"/>
-          </p:nvPr>
-        </p:nvSpPr>
-        <p:spPr/>
-        <p:txBody>
-          <a:bodyPr/>
-          <a:lstStyle/>
-          <a:p>
-            <a:fld id="{F7021451-1387-4CA6-816F-3879F97B5CBC}" type="slidenum">
-              <a:rPr lang="en-US"/>
-              <a:t>11</a:t>
             </a:fld>
             <a:endParaRPr lang="en-US"/>
           </a:p>
@@ -1643,7 +1473,7 @@
               <a:buNone/>
             </a:pPr>
             <a:r>
-              <a:rPr lang="en-US" sz="1900" i="1" dirty="0">
+              <a:rPr lang="en-US" sz="2000" i="1" dirty="0">
                 <a:solidFill>
                   <a:srgbClr val="FFFFFF"/>
                 </a:solidFill>
@@ -1653,585 +1483,7 @@
               </a:rPr>
               <a:t>Tema 5 — Gobierno de la nube</a:t>
             </a:r>
-            <a:endParaRPr lang="en-US" sz="1900" dirty="0"/>
-          </a:p>
-        </p:txBody>
-      </p:sp>
-    </p:spTree>
-  </p:cSld>
-  <p:clrMapOvr>
-    <a:masterClrMapping/>
-  </p:clrMapOvr>
-</p:sld>
-</file>
-
-<file path=ppt/slides/slide10.xml><?xml version="1.0" encoding="utf-8"?>
-<p:sld xmlns:a="http://schemas.openxmlformats.org/drawingml/2006/main" xmlns:r="http://schemas.openxmlformats.org/officeDocument/2006/relationships" xmlns:p="http://schemas.openxmlformats.org/presentationml/2006/main">
-  <p:cSld name="Slide 10">
-    <p:spTree>
-      <p:nvGrpSpPr>
-        <p:cNvPr id="1" name=""/>
-        <p:cNvGrpSpPr/>
-        <p:nvPr/>
-      </p:nvGrpSpPr>
-      <p:grpSpPr>
-        <a:xfrm>
-          <a:off x="0" y="0"/>
-          <a:ext cx="0" cy="0"/>
-          <a:chOff x="0" y="0"/>
-          <a:chExt cx="0" cy="0"/>
-        </a:xfrm>
-      </p:grpSpPr>
-      <p:sp>
-        <p:nvSpPr>
-          <p:cNvPr id="2" name="Shape 0"/>
-          <p:cNvSpPr/>
-          <p:nvPr/>
-        </p:nvSpPr>
-        <p:spPr>
-          <a:xfrm>
-            <a:off x="0" y="0"/>
-            <a:ext cx="12188952" cy="777240"/>
-          </a:xfrm>
-          <a:prstGeom prst="rect">
-            <a:avLst/>
-          </a:prstGeom>
-          <a:solidFill>
-            <a:srgbClr val="1A237E"/>
-          </a:solidFill>
-          <a:ln w="12700">
-            <a:solidFill>
-              <a:srgbClr val="1A237E"/>
-            </a:solidFill>
-            <a:prstDash val="solid"/>
-          </a:ln>
-        </p:spPr>
-        <p:txBody>
-          <a:bodyPr/>
-          <a:lstStyle/>
-          <a:p>
-            <a:endParaRPr lang="es-ES"/>
-          </a:p>
-        </p:txBody>
-      </p:sp>
-      <p:sp>
-        <p:nvSpPr>
-          <p:cNvPr id="3" name="Text 1"/>
-          <p:cNvSpPr/>
-          <p:nvPr/>
-        </p:nvSpPr>
-        <p:spPr>
-          <a:xfrm>
-            <a:off x="365760" y="0"/>
-            <a:ext cx="11457432" cy="777240"/>
-          </a:xfrm>
-          <a:prstGeom prst="rect">
-            <a:avLst/>
-          </a:prstGeom>
-          <a:noFill/>
-          <a:ln/>
-        </p:spPr>
-        <p:txBody>
-          <a:bodyPr wrap="square" rtlCol="0" anchor="ctr"/>
-          <a:lstStyle/>
-          <a:p>
-            <a:pPr marL="0" indent="0">
-              <a:buNone/>
-            </a:pPr>
-            <a:r>
-              <a:rPr lang="en-US" sz="2400" b="1" dirty="0">
-                <a:solidFill>
-                  <a:srgbClr val="FFFFFF"/>
-                </a:solidFill>
-                <a:latin typeface="Arial" pitchFamily="34" charset="0"/>
-                <a:ea typeface="Arial" pitchFamily="34" charset="-122"/>
-                <a:cs typeface="Arial" pitchFamily="34" charset="-120"/>
-              </a:rPr>
-              <a:t>Empieza siempre por cuándo, no por qué</a:t>
-            </a:r>
-            <a:endParaRPr lang="en-US" sz="2400" dirty="0"/>
-          </a:p>
-        </p:txBody>
-      </p:sp>
-      <p:sp>
-        <p:nvSpPr>
-          <p:cNvPr id="4" name="Text 2"/>
-          <p:cNvSpPr/>
-          <p:nvPr/>
-        </p:nvSpPr>
-        <p:spPr>
-          <a:xfrm>
-            <a:off x="548640" y="6473952"/>
-            <a:ext cx="11091672" cy="292608"/>
-          </a:xfrm>
-          <a:prstGeom prst="rect">
-            <a:avLst/>
-          </a:prstGeom>
-          <a:noFill/>
-          <a:ln/>
-        </p:spPr>
-        <p:txBody>
-          <a:bodyPr wrap="square" rtlCol="0" anchor="ctr"/>
-          <a:lstStyle/>
-          <a:p>
-            <a:pPr marL="0" indent="0" algn="r">
-              <a:buNone/>
-            </a:pPr>
-            <a:r>
-              <a:rPr lang="en-US" sz="1100" dirty="0">
-                <a:solidFill>
-                  <a:srgbClr val="757575"/>
-                </a:solidFill>
-                <a:latin typeface="Arial" pitchFamily="34" charset="0"/>
-                <a:ea typeface="Arial" pitchFamily="34" charset="-122"/>
-                <a:cs typeface="Arial" pitchFamily="34" charset="-120"/>
-              </a:rPr>
-              <a:t>Introducción a la Nube Pública — Tema 5: Monitorización y operación</a:t>
-            </a:r>
-            <a:endParaRPr lang="en-US" sz="1100" dirty="0"/>
-          </a:p>
-        </p:txBody>
-      </p:sp>
-      <p:sp>
-        <p:nvSpPr>
-          <p:cNvPr id="5" name="Shape 3"/>
-          <p:cNvSpPr/>
-          <p:nvPr/>
-        </p:nvSpPr>
-        <p:spPr>
-          <a:xfrm>
-            <a:off x="548640" y="1280160"/>
-            <a:ext cx="11091672" cy="1737360"/>
-          </a:xfrm>
-          <a:prstGeom prst="roundRect">
-            <a:avLst/>
-          </a:prstGeom>
-          <a:solidFill>
-            <a:srgbClr val="FFF8E1"/>
-          </a:solidFill>
-          <a:ln w="28575">
-            <a:solidFill>
-              <a:srgbClr val="FFA000"/>
-            </a:solidFill>
-            <a:prstDash val="solid"/>
-          </a:ln>
-        </p:spPr>
-        <p:txBody>
-          <a:bodyPr/>
-          <a:lstStyle/>
-          <a:p>
-            <a:endParaRPr lang="es-ES"/>
-          </a:p>
-        </p:txBody>
-      </p:sp>
-      <p:sp>
-        <p:nvSpPr>
-          <p:cNvPr id="6" name="Text 4"/>
-          <p:cNvSpPr/>
-          <p:nvPr/>
-        </p:nvSpPr>
-        <p:spPr>
-          <a:xfrm>
-            <a:off x="822960" y="1389888"/>
-            <a:ext cx="10543032" cy="1517904"/>
-          </a:xfrm>
-          <a:prstGeom prst="rect">
-            <a:avLst/>
-          </a:prstGeom>
-          <a:noFill/>
-          <a:ln/>
-        </p:spPr>
-        <p:txBody>
-          <a:bodyPr wrap="square" rtlCol="0" anchor="t"/>
-          <a:lstStyle/>
-          <a:p>
-            <a:pPr marL="0" indent="0">
-              <a:buNone/>
-            </a:pPr>
-            <a:r>
-              <a:rPr lang="en-US" sz="2000" b="1" dirty="0">
-                <a:solidFill>
-                  <a:srgbClr val="1A237E"/>
-                </a:solidFill>
-                <a:latin typeface="Arial" pitchFamily="34" charset="0"/>
-                <a:ea typeface="Arial" pitchFamily="34" charset="-122"/>
-                <a:cs typeface="Arial" pitchFamily="34" charset="-120"/>
-              </a:rPr>
-              <a:t>⚠️ Sin acotar la ventana de tiempo, buscas una aguja en un pajar entero
-</a:t>
-            </a:r>
             <a:endParaRPr lang="en-US" sz="2000" dirty="0"/>
-          </a:p>
-          <a:p>
-            <a:pPr marL="0" indent="0">
-              <a:buNone/>
-            </a:pPr>
-            <a:r>
-              <a:rPr lang="en-US" sz="1900" dirty="0">
-                <a:solidFill>
-                  <a:srgbClr val="212121"/>
-                </a:solidFill>
-                <a:latin typeface="Arial" pitchFamily="34" charset="0"/>
-                <a:ea typeface="Arial" pitchFamily="34" charset="-122"/>
-                <a:cs typeface="Arial" pitchFamily="34" charset="-120"/>
-              </a:rPr>
-              <a:t>Ir directamente a leer registros sin haber acotado antes la ventana de tiempo con las métricas es buscar en todo el pajar en vez de en el rincón donde de verdad cayó. Vas a diagnosticar una incidencia real siguiendo este orden en la Actividad 5.1.</a:t>
-            </a:r>
-            <a:endParaRPr lang="en-US" sz="2000" dirty="0"/>
-          </a:p>
-        </p:txBody>
-      </p:sp>
-      <p:sp>
-        <p:nvSpPr>
-          <p:cNvPr id="7" name="Shape 5"/>
-          <p:cNvSpPr/>
-          <p:nvPr/>
-        </p:nvSpPr>
-        <p:spPr>
-          <a:xfrm>
-            <a:off x="548640" y="3291840"/>
-            <a:ext cx="11091672" cy="1188720"/>
-          </a:xfrm>
-          <a:prstGeom prst="roundRect">
-            <a:avLst/>
-          </a:prstGeom>
-          <a:solidFill>
-            <a:srgbClr val="FFF8E1"/>
-          </a:solidFill>
-          <a:ln w="19050">
-            <a:solidFill>
-              <a:srgbClr val="FFA000"/>
-            </a:solidFill>
-            <a:prstDash val="solid"/>
-          </a:ln>
-        </p:spPr>
-        <p:txBody>
-          <a:bodyPr/>
-          <a:lstStyle/>
-          <a:p>
-            <a:endParaRPr lang="es-ES"/>
-          </a:p>
-        </p:txBody>
-      </p:sp>
-      <p:sp>
-        <p:nvSpPr>
-          <p:cNvPr id="8" name="Text 6"/>
-          <p:cNvSpPr/>
-          <p:nvPr/>
-        </p:nvSpPr>
-        <p:spPr>
-          <a:xfrm>
-            <a:off x="822960" y="3383280"/>
-            <a:ext cx="10543032" cy="1005840"/>
-          </a:xfrm>
-          <a:prstGeom prst="rect">
-            <a:avLst/>
-          </a:prstGeom>
-          <a:noFill/>
-          <a:ln/>
-        </p:spPr>
-        <p:txBody>
-          <a:bodyPr wrap="square" rtlCol="0" anchor="ctr"/>
-          <a:lstStyle/>
-          <a:p>
-            <a:pPr marL="0" indent="0">
-              <a:buNone/>
-            </a:pPr>
-            <a:r>
-              <a:rPr lang="en-US" sz="1800" dirty="0">
-                <a:solidFill>
-                  <a:srgbClr val="212121"/>
-                </a:solidFill>
-                <a:latin typeface="Arial" pitchFamily="34" charset="0"/>
-                <a:ea typeface="Arial" pitchFamily="34" charset="-122"/>
-                <a:cs typeface="Arial" pitchFamily="34" charset="-120"/>
-              </a:rPr>
-              <a:t>Los registros no se guardan gratis: cada uno ocupa espacio, y ese espacio cuesta dinero mientras lo conservas. Fijar cuánto tiempo de verdad necesitas conservarlos evita un gasto silencioso.</a:t>
-            </a:r>
-            <a:endParaRPr lang="en-US" sz="1800" dirty="0"/>
-          </a:p>
-        </p:txBody>
-      </p:sp>
-    </p:spTree>
-  </p:cSld>
-  <p:clrMapOvr>
-    <a:masterClrMapping/>
-  </p:clrMapOvr>
-</p:sld>
-</file>
-
-<file path=ppt/slides/slide11.xml><?xml version="1.0" encoding="utf-8"?>
-<p:sld xmlns:a="http://schemas.openxmlformats.org/drawingml/2006/main" xmlns:r="http://schemas.openxmlformats.org/officeDocument/2006/relationships" xmlns:p="http://schemas.openxmlformats.org/presentationml/2006/main">
-  <p:cSld name="Slide 11">
-    <p:spTree>
-      <p:nvGrpSpPr>
-        <p:cNvPr id="1" name=""/>
-        <p:cNvGrpSpPr/>
-        <p:nvPr/>
-      </p:nvGrpSpPr>
-      <p:grpSpPr>
-        <a:xfrm>
-          <a:off x="0" y="0"/>
-          <a:ext cx="0" cy="0"/>
-          <a:chOff x="0" y="0"/>
-          <a:chExt cx="0" cy="0"/>
-        </a:xfrm>
-      </p:grpSpPr>
-      <p:sp>
-        <p:nvSpPr>
-          <p:cNvPr id="2" name="Shape 0"/>
-          <p:cNvSpPr/>
-          <p:nvPr/>
-        </p:nvSpPr>
-        <p:spPr>
-          <a:xfrm>
-            <a:off x="0" y="0"/>
-            <a:ext cx="12188952" cy="777240"/>
-          </a:xfrm>
-          <a:prstGeom prst="rect">
-            <a:avLst/>
-          </a:prstGeom>
-          <a:solidFill>
-            <a:srgbClr val="1A237E"/>
-          </a:solidFill>
-          <a:ln w="12700">
-            <a:solidFill>
-              <a:srgbClr val="1A237E"/>
-            </a:solidFill>
-            <a:prstDash val="solid"/>
-          </a:ln>
-        </p:spPr>
-        <p:txBody>
-          <a:bodyPr/>
-          <a:lstStyle/>
-          <a:p>
-            <a:endParaRPr lang="es-ES"/>
-          </a:p>
-        </p:txBody>
-      </p:sp>
-      <p:sp>
-        <p:nvSpPr>
-          <p:cNvPr id="3" name="Text 1"/>
-          <p:cNvSpPr/>
-          <p:nvPr/>
-        </p:nvSpPr>
-        <p:spPr>
-          <a:xfrm>
-            <a:off x="365760" y="0"/>
-            <a:ext cx="11457432" cy="777240"/>
-          </a:xfrm>
-          <a:prstGeom prst="rect">
-            <a:avLst/>
-          </a:prstGeom>
-          <a:noFill/>
-          <a:ln/>
-        </p:spPr>
-        <p:txBody>
-          <a:bodyPr wrap="square" rtlCol="0" anchor="ctr"/>
-          <a:lstStyle/>
-          <a:p>
-            <a:pPr marL="0" indent="0">
-              <a:buNone/>
-            </a:pPr>
-            <a:r>
-              <a:rPr lang="en-US" sz="2400" b="1" dirty="0">
-                <a:solidFill>
-                  <a:srgbClr val="FFFFFF"/>
-                </a:solidFill>
-                <a:latin typeface="Arial" pitchFamily="34" charset="0"/>
-                <a:ea typeface="Arial" pitchFamily="34" charset="-122"/>
-                <a:cs typeface="Arial" pitchFamily="34" charset="-120"/>
-              </a:rPr>
-              <a:t>Ideas clave</a:t>
-            </a:r>
-            <a:endParaRPr lang="en-US" sz="2400" dirty="0"/>
-          </a:p>
-        </p:txBody>
-      </p:sp>
-      <p:sp>
-        <p:nvSpPr>
-          <p:cNvPr id="4" name="Text 2"/>
-          <p:cNvSpPr/>
-          <p:nvPr/>
-        </p:nvSpPr>
-        <p:spPr>
-          <a:xfrm>
-            <a:off x="548640" y="6473952"/>
-            <a:ext cx="11091672" cy="292608"/>
-          </a:xfrm>
-          <a:prstGeom prst="rect">
-            <a:avLst/>
-          </a:prstGeom>
-          <a:noFill/>
-          <a:ln/>
-        </p:spPr>
-        <p:txBody>
-          <a:bodyPr wrap="square" rtlCol="0" anchor="ctr"/>
-          <a:lstStyle/>
-          <a:p>
-            <a:pPr marL="0" indent="0" algn="r">
-              <a:buNone/>
-            </a:pPr>
-            <a:r>
-              <a:rPr lang="en-US" sz="1100" dirty="0">
-                <a:solidFill>
-                  <a:srgbClr val="757575"/>
-                </a:solidFill>
-                <a:latin typeface="Arial" pitchFamily="34" charset="0"/>
-                <a:ea typeface="Arial" pitchFamily="34" charset="-122"/>
-                <a:cs typeface="Arial" pitchFamily="34" charset="-120"/>
-              </a:rPr>
-              <a:t>Introducción a la Nube Pública — Tema 5: Monitorización y operación</a:t>
-            </a:r>
-            <a:endParaRPr lang="en-US" sz="1100" dirty="0"/>
-          </a:p>
-        </p:txBody>
-      </p:sp>
-      <p:sp>
-        <p:nvSpPr>
-          <p:cNvPr id="5" name="Text 3"/>
-          <p:cNvSpPr/>
-          <p:nvPr/>
-        </p:nvSpPr>
-        <p:spPr>
-          <a:xfrm>
-            <a:off x="548640" y="1371600"/>
-            <a:ext cx="11091672" cy="4114800"/>
-          </a:xfrm>
-          <a:prstGeom prst="rect">
-            <a:avLst/>
-          </a:prstGeom>
-          <a:noFill/>
-          <a:ln/>
-        </p:spPr>
-        <p:txBody>
-          <a:bodyPr wrap="square" rtlCol="0" anchor="t"/>
-          <a:lstStyle/>
-          <a:p>
-            <a:pPr marL="190500" indent="-190500">
-              <a:spcAft>
-                <a:spcPts val="1800"/>
-              </a:spcAft>
-              <a:buSzPct val="100000"/>
-              <a:buChar char="•"/>
-            </a:pPr>
-            <a:r>
-              <a:rPr lang="en-US" sz="1700" dirty="0">
-                <a:solidFill>
-                  <a:srgbClr val="212121"/>
-                </a:solidFill>
-                <a:latin typeface="Arial" pitchFamily="34" charset="0"/>
-                <a:ea typeface="Arial" pitchFamily="34" charset="-122"/>
-                <a:cs typeface="Arial" pitchFamily="34" charset="-120"/>
-              </a:rPr>
-              <a:t>Cinco señales, cada una con su servicio: métricas y alarmas (CloudWatch), registros (CloudWatch Logs), eventos (EventBridge), auditoría (CloudTrail).</a:t>
-            </a:r>
-            <a:endParaRPr lang="en-US" sz="1700" dirty="0"/>
-          </a:p>
-          <a:p>
-            <a:pPr marL="190500" indent="-190500">
-              <a:spcAft>
-                <a:spcPts val="1800"/>
-              </a:spcAft>
-              <a:buSzPct val="100000"/>
-              <a:buChar char="•"/>
-            </a:pPr>
-            <a:r>
-              <a:rPr lang="en-US" sz="1700" dirty="0">
-                <a:solidFill>
-                  <a:srgbClr val="212121"/>
-                </a:solidFill>
-                <a:latin typeface="Arial" pitchFamily="34" charset="0"/>
-                <a:ea typeface="Arial" pitchFamily="34" charset="-122"/>
-                <a:cs typeface="Arial" pitchFamily="34" charset="-120"/>
-              </a:rPr>
-              <a:t>Un dashboard de CloudWatch agrupa las métricas que consultas a menudo en una sola pantalla.</a:t>
-            </a:r>
-            <a:endParaRPr lang="en-US" sz="1700" dirty="0"/>
-          </a:p>
-          <a:p>
-            <a:pPr marL="190500" indent="-190500">
-              <a:spcAft>
-                <a:spcPts val="1800"/>
-              </a:spcAft>
-              <a:buSzPct val="100000"/>
-              <a:buChar char="•"/>
-            </a:pPr>
-            <a:r>
-              <a:rPr lang="en-US" sz="1700" dirty="0">
-                <a:solidFill>
-                  <a:srgbClr val="212121"/>
-                </a:solidFill>
-                <a:latin typeface="Arial" pitchFamily="34" charset="0"/>
-                <a:ea typeface="Arial" pitchFamily="34" charset="-122"/>
-                <a:cs typeface="Arial" pitchFamily="34" charset="-120"/>
-              </a:rPr>
-              <a:t>Monitorizar todo sin criterio genera ruido y hace que dejes de prestar atención a las alarmas que sí importan.</a:t>
-            </a:r>
-            <a:endParaRPr lang="en-US" sz="1700" dirty="0"/>
-          </a:p>
-          <a:p>
-            <a:pPr marL="190500" indent="-190500">
-              <a:spcAft>
-                <a:spcPts val="1800"/>
-              </a:spcAft>
-              <a:buSzPct val="100000"/>
-              <a:buChar char="•"/>
-            </a:pPr>
-            <a:r>
-              <a:rPr lang="en-US" sz="1700" dirty="0">
-                <a:solidFill>
-                  <a:srgbClr val="212121"/>
-                </a:solidFill>
-                <a:latin typeface="Arial" pitchFamily="34" charset="0"/>
-                <a:ea typeface="Arial" pitchFamily="34" charset="-122"/>
-                <a:cs typeface="Arial" pitchFamily="34" charset="-120"/>
-              </a:rPr>
-              <a:t>Cada capa falla de forma distinta y necesita su propia señal: borde, aplicación, datos.</a:t>
-            </a:r>
-            <a:endParaRPr lang="en-US" sz="1700" dirty="0"/>
-          </a:p>
-          <a:p>
-            <a:pPr marL="190500" indent="-190500">
-              <a:spcAft>
-                <a:spcPts val="1800"/>
-              </a:spcAft>
-              <a:buSzPct val="100000"/>
-              <a:buChar char="•"/>
-            </a:pPr>
-            <a:r>
-              <a:rPr lang="en-US" sz="1700" dirty="0">
-                <a:solidFill>
-                  <a:srgbClr val="212121"/>
-                </a:solidFill>
-                <a:latin typeface="Arial" pitchFamily="34" charset="0"/>
-                <a:ea typeface="Arial" pitchFamily="34" charset="-122"/>
-                <a:cs typeface="Arial" pitchFamily="34" charset="-120"/>
-              </a:rPr>
-              <a:t>Sin acceso al servidor, el diagnóstico se apoya en lo ya registrado: primero cuándo (métricas), luego qué (registros), y confirma con auditoría.</a:t>
-            </a:r>
-            <a:endParaRPr lang="en-US" sz="1700" dirty="0"/>
-          </a:p>
-          <a:p>
-            <a:pPr marL="190500" indent="-190500">
-              <a:spcAft>
-                <a:spcPts val="1800"/>
-              </a:spcAft>
-              <a:buSzPct val="100000"/>
-              <a:buChar char="•"/>
-            </a:pPr>
-            <a:r>
-              <a:rPr lang="en-US" sz="1700" dirty="0">
-                <a:solidFill>
-                  <a:srgbClr val="212121"/>
-                </a:solidFill>
-                <a:latin typeface="Arial" pitchFamily="34" charset="0"/>
-                <a:ea typeface="Arial" pitchFamily="34" charset="-122"/>
-                <a:cs typeface="Arial" pitchFamily="34" charset="-120"/>
-              </a:rPr>
-              <a:t>Los registros tienen coste mientras se conservan — fijar una retención razonable evita un gasto silencioso.</a:t>
-            </a:r>
-            <a:endParaRPr lang="en-US" sz="1700" dirty="0"/>
           </a:p>
         </p:txBody>
       </p:sp>
@@ -2325,7 +1577,7 @@
                 <a:ea typeface="Arial" pitchFamily="34" charset="-122"/>
                 <a:cs typeface="Arial" pitchFamily="34" charset="-120"/>
               </a:rPr>
-              <a:t>Nadie va a estar mirando la pantalla a las 3 AM</a:t>
+              <a:t>Monitorización y operación</a:t>
             </a:r>
             <a:endParaRPr lang="en-US" sz="2400" dirty="0"/>
           </a:p>
@@ -2372,14 +1624,46 @@
       </p:sp>
       <p:sp>
         <p:nvSpPr>
-          <p:cNvPr id="5" name="Text 3"/>
-          <p:cNvSpPr/>
-          <p:nvPr/>
-        </p:nvSpPr>
-        <p:spPr>
-          <a:xfrm>
-            <a:off x="548640" y="1645920"/>
+          <p:cNvPr id="5" name="Shape 3"/>
+          <p:cNvSpPr/>
+          <p:nvPr/>
+        </p:nvSpPr>
+        <p:spPr>
+          <a:xfrm>
+            <a:off x="548640" y="1188720"/>
             <a:ext cx="11091672" cy="1463040"/>
+          </a:xfrm>
+          <a:prstGeom prst="roundRect">
+            <a:avLst/>
+          </a:prstGeom>
+          <a:solidFill>
+            <a:srgbClr val="E8EAF6"/>
+          </a:solidFill>
+          <a:ln w="15875">
+            <a:solidFill>
+              <a:srgbClr val="3949AB"/>
+            </a:solidFill>
+            <a:prstDash val="solid"/>
+          </a:ln>
+        </p:spPr>
+        <p:txBody>
+          <a:bodyPr/>
+          <a:lstStyle/>
+          <a:p>
+            <a:endParaRPr lang="es-ES"/>
+          </a:p>
+        </p:txBody>
+      </p:sp>
+      <p:sp>
+        <p:nvSpPr>
+          <p:cNvPr id="6" name="Text 4"/>
+          <p:cNvSpPr/>
+          <p:nvPr/>
+        </p:nvSpPr>
+        <p:spPr>
+          <a:xfrm>
+            <a:off x="731520" y="1261872"/>
+            <a:ext cx="10725912" cy="548640"/>
           </a:xfrm>
           <a:prstGeom prst="rect">
             <a:avLst/>
@@ -2388,14 +1672,53 @@
           <a:ln/>
         </p:spPr>
         <p:txBody>
-          <a:bodyPr wrap="square" rtlCol="0" anchor="t"/>
+          <a:bodyPr wrap="square" rtlCol="0" anchor="ctr"/>
           <a:lstStyle/>
           <a:p>
             <a:pPr marL="0" indent="0">
               <a:buNone/>
             </a:pPr>
             <a:r>
-              <a:rPr lang="en-US" sz="2100" dirty="0">
+              <a:rPr lang="en-US" sz="2000" b="1" dirty="0">
+                <a:solidFill>
+                  <a:srgbClr val="1A237E"/>
+                </a:solidFill>
+                <a:latin typeface="Arial" pitchFamily="34" charset="0"/>
+                <a:ea typeface="Arial" pitchFamily="34" charset="-122"/>
+                <a:cs typeface="Arial" pitchFamily="34" charset="-120"/>
+              </a:rPr>
+              <a:t>Nadie lo va a estar mirando constantemente</a:t>
+            </a:r>
+            <a:endParaRPr lang="en-US" sz="2000" dirty="0"/>
+          </a:p>
+        </p:txBody>
+      </p:sp>
+      <p:sp>
+        <p:nvSpPr>
+          <p:cNvPr id="7" name="Text 5"/>
+          <p:cNvSpPr/>
+          <p:nvPr/>
+        </p:nvSpPr>
+        <p:spPr>
+          <a:xfrm>
+            <a:off x="731520" y="1810512"/>
+            <a:ext cx="10725912" cy="768096"/>
+          </a:xfrm>
+          <a:prstGeom prst="rect">
+            <a:avLst/>
+          </a:prstGeom>
+          <a:noFill/>
+          <a:ln/>
+        </p:spPr>
+        <p:txBody>
+          <a:bodyPr wrap="square" rtlCol="0" anchor="t"/>
+          <a:lstStyle/>
+          <a:p>
+            <a:pPr marL="0" indent="0">
+              <a:buNone/>
+            </a:pPr>
+            <a:r>
+              <a:rPr lang="en-US" sz="1600" dirty="0">
                 <a:solidFill>
                   <a:srgbClr val="212121"/>
                 </a:solidFill>
@@ -2403,32 +1726,32 @@
                 <a:ea typeface="Arial" pitchFamily="34" charset="-122"/>
                 <a:cs typeface="Arial" pitchFamily="34" charset="-120"/>
               </a:rPr>
-              <a:t>Cualquier servidor en producción tiene el mismo problema de fondo: nadie lo va a estar mirando constantemente. Si algo falla a las tres de la madrugada, nadie está delante de una pantalla viéndolo en directo.</a:t>
+              <a:t>Si algo falla a las tres de la madrugada, nadie está delante de una pantalla viéndolo en directo. Necesitas que el propio sistema te avise, y diagnosticar sin la comodidad de conectarte por SSH.</a:t>
             </a:r>
-            <a:endParaRPr lang="en-US" sz="2100" dirty="0"/>
-          </a:p>
-        </p:txBody>
-      </p:sp>
-      <p:sp>
-        <p:nvSpPr>
-          <p:cNvPr id="6" name="Shape 4"/>
-          <p:cNvSpPr/>
-          <p:nvPr/>
-        </p:nvSpPr>
-        <p:spPr>
-          <a:xfrm>
-            <a:off x="548640" y="3429000"/>
-            <a:ext cx="11091672" cy="1188720"/>
+            <a:endParaRPr lang="en-US" sz="1600" dirty="0"/>
+          </a:p>
+        </p:txBody>
+      </p:sp>
+      <p:sp>
+        <p:nvSpPr>
+          <p:cNvPr id="8" name="Shape 6"/>
+          <p:cNvSpPr/>
+          <p:nvPr/>
+        </p:nvSpPr>
+        <p:spPr>
+          <a:xfrm>
+            <a:off x="548640" y="3017520"/>
+            <a:ext cx="5362956" cy="1645920"/>
           </a:xfrm>
           <a:prstGeom prst="roundRect">
             <a:avLst/>
           </a:prstGeom>
           <a:solidFill>
-            <a:srgbClr val="FFF8E1"/>
+            <a:srgbClr val="E8EAF6"/>
           </a:solidFill>
-          <a:ln w="19050">
+          <a:ln w="15875">
             <a:solidFill>
-              <a:srgbClr val="FFA000"/>
+              <a:srgbClr val="3949AB"/>
             </a:solidFill>
             <a:prstDash val="solid"/>
           </a:ln>
@@ -2443,14 +1766,14 @@
       </p:sp>
       <p:sp>
         <p:nvSpPr>
-          <p:cNvPr id="7" name="Text 5"/>
-          <p:cNvSpPr/>
-          <p:nvPr/>
-        </p:nvSpPr>
-        <p:spPr>
-          <a:xfrm>
-            <a:off x="822960" y="3520440"/>
-            <a:ext cx="10543032" cy="1005840"/>
+          <p:cNvPr id="9" name="Text 7"/>
+          <p:cNvSpPr/>
+          <p:nvPr/>
+        </p:nvSpPr>
+        <p:spPr>
+          <a:xfrm>
+            <a:off x="685800" y="3108960"/>
+            <a:ext cx="5088636" cy="594360"/>
           </a:xfrm>
           <a:prstGeom prst="rect">
             <a:avLst/>
@@ -2462,11 +1785,50 @@
           <a:bodyPr wrap="square" rtlCol="0" anchor="ctr"/>
           <a:lstStyle/>
           <a:p>
-            <a:pPr marL="0" indent="0">
+            <a:pPr marL="0" indent="0" algn="ctr">
               <a:buNone/>
             </a:pPr>
             <a:r>
-              <a:rPr lang="en-US" sz="1900" dirty="0">
+              <a:rPr lang="en-US" sz="1800" b="1" dirty="0">
+                <a:solidFill>
+                  <a:srgbClr val="1A237E"/>
+                </a:solidFill>
+                <a:latin typeface="Arial" pitchFamily="34" charset="0"/>
+                <a:ea typeface="Arial" pitchFamily="34" charset="-122"/>
+                <a:cs typeface="Arial" pitchFamily="34" charset="-120"/>
+              </a:rPr>
+              <a:t>El sistema avisa solo</a:t>
+            </a:r>
+            <a:endParaRPr lang="en-US" sz="1800" dirty="0"/>
+          </a:p>
+        </p:txBody>
+      </p:sp>
+      <p:sp>
+        <p:nvSpPr>
+          <p:cNvPr id="10" name="Text 8"/>
+          <p:cNvSpPr/>
+          <p:nvPr/>
+        </p:nvSpPr>
+        <p:spPr>
+          <a:xfrm>
+            <a:off x="731520" y="3749040"/>
+            <a:ext cx="4997196" cy="822960"/>
+          </a:xfrm>
+          <a:prstGeom prst="rect">
+            <a:avLst/>
+          </a:prstGeom>
+          <a:noFill/>
+          <a:ln/>
+        </p:spPr>
+        <p:txBody>
+          <a:bodyPr wrap="square" rtlCol="0" anchor="t"/>
+          <a:lstStyle/>
+          <a:p>
+            <a:pPr marL="0" indent="0" algn="ctr">
+              <a:buNone/>
+            </a:pPr>
+            <a:r>
+              <a:rPr lang="en-US" sz="1500" dirty="0">
                 <a:solidFill>
                   <a:srgbClr val="212121"/>
                 </a:solidFill>
@@ -2474,9 +1836,158 @@
                 <a:ea typeface="Arial" pitchFamily="34" charset="-122"/>
                 <a:cs typeface="Arial" pitchFamily="34" charset="-120"/>
               </a:rPr>
-              <a:t>Necesitas que el propio sistema te avise, y necesitas saber diagnosticar una incidencia sin la comodidad de conectarte por SSH a mirar qué pasa por dentro.</a:t>
+              <a:t>Antes de que lo notes tú</a:t>
             </a:r>
-            <a:endParaRPr lang="en-US" sz="1900" dirty="0"/>
+            <a:endParaRPr lang="en-US" sz="1500" dirty="0"/>
+          </a:p>
+        </p:txBody>
+      </p:sp>
+      <p:sp>
+        <p:nvSpPr>
+          <p:cNvPr id="11" name="Shape 9"/>
+          <p:cNvSpPr/>
+          <p:nvPr/>
+        </p:nvSpPr>
+        <p:spPr>
+          <a:xfrm>
+            <a:off x="6277356" y="3017520"/>
+            <a:ext cx="5362956" cy="1645920"/>
+          </a:xfrm>
+          <a:prstGeom prst="roundRect">
+            <a:avLst/>
+          </a:prstGeom>
+          <a:solidFill>
+            <a:srgbClr val="FFF8E1"/>
+          </a:solidFill>
+          <a:ln w="25400">
+            <a:solidFill>
+              <a:srgbClr val="FFA000"/>
+            </a:solidFill>
+            <a:prstDash val="solid"/>
+          </a:ln>
+        </p:spPr>
+        <p:txBody>
+          <a:bodyPr/>
+          <a:lstStyle/>
+          <a:p>
+            <a:endParaRPr lang="es-ES"/>
+          </a:p>
+        </p:txBody>
+      </p:sp>
+      <p:sp>
+        <p:nvSpPr>
+          <p:cNvPr id="12" name="Text 10"/>
+          <p:cNvSpPr/>
+          <p:nvPr/>
+        </p:nvSpPr>
+        <p:spPr>
+          <a:xfrm>
+            <a:off x="6414516" y="3108960"/>
+            <a:ext cx="5088636" cy="594360"/>
+          </a:xfrm>
+          <a:prstGeom prst="rect">
+            <a:avLst/>
+          </a:prstGeom>
+          <a:noFill/>
+          <a:ln/>
+        </p:spPr>
+        <p:txBody>
+          <a:bodyPr wrap="square" rtlCol="0" anchor="ctr"/>
+          <a:lstStyle/>
+          <a:p>
+            <a:pPr marL="0" indent="0" algn="ctr">
+              <a:buNone/>
+            </a:pPr>
+            <a:r>
+              <a:rPr lang="en-US" sz="1800" b="1" dirty="0">
+                <a:solidFill>
+                  <a:srgbClr val="1A237E"/>
+                </a:solidFill>
+                <a:latin typeface="Arial" pitchFamily="34" charset="0"/>
+                <a:ea typeface="Arial" pitchFamily="34" charset="-122"/>
+                <a:cs typeface="Arial" pitchFamily="34" charset="-120"/>
+              </a:rPr>
+              <a:t>Diagnóstico sin SSH</a:t>
+            </a:r>
+            <a:endParaRPr lang="en-US" sz="1800" dirty="0"/>
+          </a:p>
+        </p:txBody>
+      </p:sp>
+      <p:sp>
+        <p:nvSpPr>
+          <p:cNvPr id="13" name="Text 11"/>
+          <p:cNvSpPr/>
+          <p:nvPr/>
+        </p:nvSpPr>
+        <p:spPr>
+          <a:xfrm>
+            <a:off x="6460236" y="3749040"/>
+            <a:ext cx="4997196" cy="822960"/>
+          </a:xfrm>
+          <a:prstGeom prst="rect">
+            <a:avLst/>
+          </a:prstGeom>
+          <a:noFill/>
+          <a:ln/>
+        </p:spPr>
+        <p:txBody>
+          <a:bodyPr wrap="square" rtlCol="0" anchor="t"/>
+          <a:lstStyle/>
+          <a:p>
+            <a:pPr marL="0" indent="0" algn="ctr">
+              <a:buNone/>
+            </a:pPr>
+            <a:r>
+              <a:rPr lang="en-US" sz="1500" dirty="0">
+                <a:solidFill>
+                  <a:srgbClr val="212121"/>
+                </a:solidFill>
+                <a:latin typeface="Arial" pitchFamily="34" charset="0"/>
+                <a:ea typeface="Arial" pitchFamily="34" charset="-122"/>
+                <a:cs typeface="Arial" pitchFamily="34" charset="-120"/>
+              </a:rPr>
+              <a:t>Con lo que ya quedó registrado</a:t>
+            </a:r>
+            <a:endParaRPr lang="en-US" sz="1500" dirty="0"/>
+          </a:p>
+        </p:txBody>
+      </p:sp>
+      <p:sp>
+        <p:nvSpPr>
+          <p:cNvPr id="14" name="Text 12"/>
+          <p:cNvSpPr/>
+          <p:nvPr/>
+        </p:nvSpPr>
+        <p:spPr>
+          <a:xfrm>
+            <a:off x="548640" y="4892040"/>
+            <a:ext cx="11091672" cy="548640"/>
+          </a:xfrm>
+          <a:prstGeom prst="rect">
+            <a:avLst/>
+          </a:prstGeom>
+          <a:noFill/>
+          <a:ln/>
+        </p:spPr>
+        <p:txBody>
+          <a:bodyPr wrap="square" rtlCol="0" anchor="t"/>
+          <a:lstStyle/>
+          <a:p>
+            <a:pPr marL="0" indent="0" algn="ctr">
+              <a:buNone/>
+            </a:pPr>
+            <a:r>
+              <a:rPr lang="en-US" sz="1500" i="1" dirty="0">
+                <a:solidFill>
+                  <a:srgbClr val="757575"/>
+                </a:solidFill>
+                <a:latin typeface="Arial" pitchFamily="34" charset="0"/>
+                <a:ea typeface="Arial" pitchFamily="34" charset="-122"/>
+                <a:cs typeface="Arial" pitchFamily="34" charset="-120"/>
+              </a:rPr>
+              <a:t>En una arquitectura gestionada, la comodidad de mirar «por dentro» cada vez existe menos.</a:t>
+            </a:r>
+            <a:endParaRPr lang="en-US" sz="1500" dirty="0"/>
           </a:p>
         </p:txBody>
       </p:sp>
@@ -2615,44 +2126,83 @@
           </a:p>
         </p:txBody>
       </p:sp>
+      <p:sp>
+        <p:nvSpPr>
+          <p:cNvPr id="5" name="Text 3"/>
+          <p:cNvSpPr/>
+          <p:nvPr/>
+        </p:nvSpPr>
+        <p:spPr>
+          <a:xfrm>
+            <a:off x="548640" y="1143000"/>
+            <a:ext cx="11091672" cy="365760"/>
+          </a:xfrm>
+          <a:prstGeom prst="rect">
+            <a:avLst/>
+          </a:prstGeom>
+          <a:noFill/>
+          <a:ln/>
+        </p:spPr>
+        <p:txBody>
+          <a:bodyPr wrap="square" rtlCol="0" anchor="ctr"/>
+          <a:lstStyle/>
+          <a:p>
+            <a:pPr marL="0" indent="0">
+              <a:buNone/>
+            </a:pPr>
+            <a:r>
+              <a:rPr lang="en-US" sz="1500" b="1" dirty="0">
+                <a:solidFill>
+                  <a:srgbClr val="3949AB"/>
+                </a:solidFill>
+                <a:latin typeface="Arial" pitchFamily="34" charset="0"/>
+                <a:ea typeface="Arial" pitchFamily="34" charset="-122"/>
+                <a:cs typeface="Arial" pitchFamily="34" charset="-120"/>
+              </a:rPr>
+              <a:t>AWS te da cinco tipos de señal — cada uno responde a una pregunta diferente</a:t>
+            </a:r>
+            <a:endParaRPr lang="en-US" sz="1500" dirty="0"/>
+          </a:p>
+        </p:txBody>
+      </p:sp>
       <p:graphicFrame>
         <p:nvGraphicFramePr>
-          <p:cNvPr id="5" name="Table 0"/>
+          <p:cNvPr id="6" name="Table 0"/>
           <p:cNvGraphicFramePr>
             <a:graphicFrameLocks noGrp="1"/>
           </p:cNvGraphicFramePr>
           <p:nvPr>
             <p:extLst>
               <p:ext uri="{D42A27DB-BD31-4B8C-83A1-F6EECF244321}">
-                <p14:modId xmlns:p14="http://schemas.microsoft.com/office/powerpoint/2010/main" val="2127249410"/>
+                <p14:modId xmlns:p14="http://schemas.microsoft.com/office/powerpoint/2010/main" val="1579011935"/>
               </p:ext>
             </p:extLst>
           </p:nvPr>
         </p:nvGraphicFramePr>
         <p:xfrm>
-          <a:off x="548639" y="1097280"/>
-          <a:ext cx="11170609" cy="4762344"/>
+          <a:off x="548640" y="1554480"/>
+          <a:ext cx="11091673" cy="3017520"/>
         </p:xfrm>
         <a:graphic>
           <a:graphicData uri="http://schemas.openxmlformats.org/drawingml/2006/table">
             <a:tbl>
               <a:tblPr/>
               <a:tblGrid>
-                <a:gridCol w="2234121">
+                <a:gridCol w="1774668">
                   <a:extLst>
                     <a:ext uri="{9D8B030D-6E8A-4147-A177-3AD203B41FA5}">
                       <a16:colId xmlns:a16="http://schemas.microsoft.com/office/drawing/2014/main" val="20000"/>
                     </a:ext>
                   </a:extLst>
                 </a:gridCol>
-                <a:gridCol w="3574595">
+                <a:gridCol w="4436669">
                   <a:extLst>
                     <a:ext uri="{9D8B030D-6E8A-4147-A177-3AD203B41FA5}">
                       <a16:colId xmlns:a16="http://schemas.microsoft.com/office/drawing/2014/main" val="20001"/>
                     </a:ext>
                   </a:extLst>
                 </a:gridCol>
-                <a:gridCol w="5361893">
+                <a:gridCol w="4880336">
                   <a:extLst>
                     <a:ext uri="{9D8B030D-6E8A-4147-A177-3AD203B41FA5}">
                       <a16:colId xmlns:a16="http://schemas.microsoft.com/office/drawing/2014/main" val="20002"/>
@@ -2660,7 +2210,7 @@
                   </a:extLst>
                 </a:gridCol>
               </a:tblGrid>
-              <a:tr h="793724">
+              <a:tr h="502920">
                 <a:tc>
                   <a:txBody>
                     <a:bodyPr/>
@@ -2670,7 +2220,7 @@
                         <a:buNone/>
                       </a:pPr>
                       <a:r>
-                        <a:rPr lang="en-US" sz="1400" b="1" dirty="0">
+                        <a:rPr lang="en-US" sz="1350" b="1" dirty="0">
                           <a:solidFill>
                             <a:srgbClr val="FFFFFF"/>
                           </a:solidFill>
@@ -2680,7 +2230,7 @@
                         </a:rPr>
                         <a:t>Señal</a:t>
                       </a:r>
-                      <a:endParaRPr lang="en-US" sz="1400" dirty="0">
+                      <a:endParaRPr lang="en-US" sz="1350" dirty="0">
                         <a:latin typeface="Arial" charset="0"/>
                         <a:ea typeface="Arial" charset="0"/>
                         <a:cs typeface="Arial" charset="0"/>
@@ -2738,7 +2288,7 @@
                         <a:buNone/>
                       </a:pPr>
                       <a:r>
-                        <a:rPr lang="en-US" sz="1400" b="1" dirty="0">
+                        <a:rPr lang="en-US" sz="1350" b="1" dirty="0">
                           <a:solidFill>
                             <a:srgbClr val="FFFFFF"/>
                           </a:solidFill>
@@ -2748,7 +2298,7 @@
                         </a:rPr>
                         <a:t>Responde a</a:t>
                       </a:r>
-                      <a:endParaRPr lang="en-US" sz="1400" dirty="0">
+                      <a:endParaRPr lang="en-US" sz="1350" dirty="0">
                         <a:latin typeface="Arial" charset="0"/>
                         <a:ea typeface="Arial" charset="0"/>
                         <a:cs typeface="Arial" charset="0"/>
@@ -2806,7 +2356,7 @@
                         <a:buNone/>
                       </a:pPr>
                       <a:r>
-                        <a:rPr lang="en-US" sz="1400" b="1" dirty="0">
+                        <a:rPr lang="en-US" sz="1350" b="1" dirty="0">
                           <a:solidFill>
                             <a:srgbClr val="FFFFFF"/>
                           </a:solidFill>
@@ -2816,7 +2366,7 @@
                         </a:rPr>
                         <a:t>Ejemplo</a:t>
                       </a:r>
-                      <a:endParaRPr lang="en-US" sz="1400" dirty="0">
+                      <a:endParaRPr lang="en-US" sz="1350" dirty="0">
                         <a:latin typeface="Arial" charset="0"/>
                         <a:ea typeface="Arial" charset="0"/>
                         <a:cs typeface="Arial" charset="0"/>
@@ -2871,7 +2421,7 @@
                   </a:ext>
                 </a:extLst>
               </a:tr>
-              <a:tr h="793724">
+              <a:tr h="502920">
                 <a:tc>
                   <a:txBody>
                     <a:bodyPr/>
@@ -2881,7 +2431,7 @@
                         <a:buNone/>
                       </a:pPr>
                       <a:r>
-                        <a:rPr lang="en-US" sz="1800" b="1" dirty="0">
+                        <a:rPr lang="en-US" sz="1250" b="1" dirty="0">
                           <a:solidFill>
                             <a:srgbClr val="212121"/>
                           </a:solidFill>
@@ -2891,7 +2441,7 @@
                         </a:rPr>
                         <a:t>Métricas</a:t>
                       </a:r>
-                      <a:endParaRPr lang="en-US" sz="1800" dirty="0">
+                      <a:endParaRPr lang="en-US" sz="1250" dirty="0">
                         <a:latin typeface="Arial" charset="0"/>
                         <a:ea typeface="Arial" charset="0"/>
                         <a:cs typeface="Arial" charset="0"/>
@@ -2949,7 +2499,7 @@
                         <a:buNone/>
                       </a:pPr>
                       <a:r>
-                        <a:rPr lang="en-US" sz="1800" dirty="0">
+                        <a:rPr lang="en-US" sz="1250" dirty="0">
                           <a:solidFill>
                             <a:srgbClr val="212121"/>
                           </a:solidFill>
@@ -2957,9 +2507,9 @@
                           <a:ea typeface="Arial" pitchFamily="34" charset="-122"/>
                           <a:cs typeface="Arial" pitchFamily="34" charset="-120"/>
                         </a:rPr>
-                        <a:t>¿Cuánto?</a:t>
+                        <a:t>¿Cuánto? (un número que cambia con el tiempo)</a:t>
                       </a:r>
-                      <a:endParaRPr lang="en-US" sz="1800" dirty="0">
+                      <a:endParaRPr lang="en-US" sz="1250" dirty="0">
                         <a:latin typeface="Arial" charset="0"/>
                         <a:ea typeface="Arial" charset="0"/>
                         <a:cs typeface="Arial" charset="0"/>
@@ -3017,7 +2567,7 @@
                         <a:buNone/>
                       </a:pPr>
                       <a:r>
-                        <a:rPr lang="en-US" sz="1800" dirty="0">
+                        <a:rPr lang="en-US" sz="1250" dirty="0">
                           <a:solidFill>
                             <a:srgbClr val="212121"/>
                           </a:solidFill>
@@ -3025,9 +2575,9 @@
                           <a:ea typeface="Arial" pitchFamily="34" charset="-122"/>
                           <a:cs typeface="Arial" pitchFamily="34" charset="-120"/>
                         </a:rPr>
-                        <a:t>CPU media, peticiones por segundo</a:t>
+                        <a:t>CPU media de las instancias, peticiones por segundo</a:t>
                       </a:r>
-                      <a:endParaRPr lang="en-US" sz="1800" dirty="0">
+                      <a:endParaRPr lang="en-US" sz="1250" dirty="0">
                         <a:latin typeface="Arial" charset="0"/>
                         <a:ea typeface="Arial" charset="0"/>
                         <a:cs typeface="Arial" charset="0"/>
@@ -3082,7 +2632,7 @@
                   </a:ext>
                 </a:extLst>
               </a:tr>
-              <a:tr h="793724">
+              <a:tr h="502920">
                 <a:tc>
                   <a:txBody>
                     <a:bodyPr/>
@@ -3092,7 +2642,7 @@
                         <a:buNone/>
                       </a:pPr>
                       <a:r>
-                        <a:rPr lang="en-US" sz="1800" b="1" dirty="0">
+                        <a:rPr lang="en-US" sz="1250" b="1" dirty="0">
                           <a:solidFill>
                             <a:srgbClr val="212121"/>
                           </a:solidFill>
@@ -3100,9 +2650,9 @@
                           <a:ea typeface="Arial" pitchFamily="34" charset="-122"/>
                           <a:cs typeface="Arial" pitchFamily="34" charset="-120"/>
                         </a:rPr>
-                        <a:t>Registros (logs)</a:t>
+                        <a:t>Registros</a:t>
                       </a:r>
-                      <a:endParaRPr lang="en-US" sz="1800" dirty="0">
+                      <a:endParaRPr lang="en-US" sz="1250" dirty="0">
                         <a:latin typeface="Arial" charset="0"/>
                         <a:ea typeface="Arial" charset="0"/>
                         <a:cs typeface="Arial" charset="0"/>
@@ -3160,7 +2710,7 @@
                         <a:buNone/>
                       </a:pPr>
                       <a:r>
-                        <a:rPr lang="en-US" sz="1800" dirty="0">
+                        <a:rPr lang="en-US" sz="1250" dirty="0">
                           <a:solidFill>
                             <a:srgbClr val="212121"/>
                           </a:solidFill>
@@ -3168,9 +2718,9 @@
                           <a:ea typeface="Arial" pitchFamily="34" charset="-122"/>
                           <a:cs typeface="Arial" pitchFamily="34" charset="-120"/>
                         </a:rPr>
-                        <a:t>¿Qué ha pasado, con detalle?</a:t>
+                        <a:t>¿Qué ha pasado exactamente, con detalle?</a:t>
                       </a:r>
-                      <a:endParaRPr lang="en-US" sz="1800" dirty="0">
+                      <a:endParaRPr lang="en-US" sz="1250" dirty="0">
                         <a:latin typeface="Arial" charset="0"/>
                         <a:ea typeface="Arial" charset="0"/>
                         <a:cs typeface="Arial" charset="0"/>
@@ -3228,7 +2778,7 @@
                         <a:buNone/>
                       </a:pPr>
                       <a:r>
-                        <a:rPr lang="en-US" sz="1800" dirty="0">
+                        <a:rPr lang="en-US" sz="1250" dirty="0">
                           <a:solidFill>
                             <a:srgbClr val="212121"/>
                           </a:solidFill>
@@ -3238,7 +2788,7 @@
                         </a:rPr>
                         <a:t>El mensaje de error concreto de una petición fallida</a:t>
                       </a:r>
-                      <a:endParaRPr lang="en-US" sz="1800" dirty="0">
+                      <a:endParaRPr lang="en-US" sz="1250" dirty="0">
                         <a:latin typeface="Arial" charset="0"/>
                         <a:ea typeface="Arial" charset="0"/>
                         <a:cs typeface="Arial" charset="0"/>
@@ -3293,7 +2843,7 @@
                   </a:ext>
                 </a:extLst>
               </a:tr>
-              <a:tr h="793724">
+              <a:tr h="502920">
                 <a:tc>
                   <a:txBody>
                     <a:bodyPr/>
@@ -3303,7 +2853,7 @@
                         <a:buNone/>
                       </a:pPr>
                       <a:r>
-                        <a:rPr lang="en-US" sz="1800" b="1" dirty="0">
+                        <a:rPr lang="en-US" sz="1250" b="1" dirty="0">
                           <a:solidFill>
                             <a:srgbClr val="212121"/>
                           </a:solidFill>
@@ -3313,7 +2863,7 @@
                         </a:rPr>
                         <a:t>Alarmas</a:t>
                       </a:r>
-                      <a:endParaRPr lang="en-US" sz="1800" dirty="0">
+                      <a:endParaRPr lang="en-US" sz="1250" dirty="0">
                         <a:latin typeface="Arial" charset="0"/>
                         <a:ea typeface="Arial" charset="0"/>
                         <a:cs typeface="Arial" charset="0"/>
@@ -3371,7 +2921,7 @@
                         <a:buNone/>
                       </a:pPr>
                       <a:r>
-                        <a:rPr lang="en-US" sz="1800" dirty="0">
+                        <a:rPr lang="en-US" sz="1250" dirty="0">
                           <a:solidFill>
                             <a:srgbClr val="212121"/>
                           </a:solidFill>
@@ -3379,9 +2929,9 @@
                           <a:ea typeface="Arial" pitchFamily="34" charset="-122"/>
                           <a:cs typeface="Arial" pitchFamily="34" charset="-120"/>
                         </a:rPr>
-                        <a:t>¿Cuándo cruza un umbral?</a:t>
+                        <a:t>¿Cuándo algo cruza un umbral que me importa?</a:t>
                       </a:r>
-                      <a:endParaRPr lang="en-US" sz="1800" dirty="0">
+                      <a:endParaRPr lang="en-US" sz="1250" dirty="0">
                         <a:latin typeface="Arial" charset="0"/>
                         <a:ea typeface="Arial" charset="0"/>
                         <a:cs typeface="Arial" charset="0"/>
@@ -3439,7 +2989,7 @@
                         <a:buNone/>
                       </a:pPr>
                       <a:r>
-                        <a:rPr lang="en-US" sz="1800" dirty="0">
+                        <a:rPr lang="en-US" sz="1250" dirty="0">
                           <a:solidFill>
                             <a:srgbClr val="212121"/>
                           </a:solidFill>
@@ -3449,7 +2999,7 @@
                         </a:rPr>
                         <a:t>CPU por encima del 80 % durante 5 minutos</a:t>
                       </a:r>
-                      <a:endParaRPr lang="en-US" sz="1800" dirty="0">
+                      <a:endParaRPr lang="en-US" sz="1250" dirty="0">
                         <a:latin typeface="Arial" charset="0"/>
                         <a:ea typeface="Arial" charset="0"/>
                         <a:cs typeface="Arial" charset="0"/>
@@ -3504,7 +3054,7 @@
                   </a:ext>
                 </a:extLst>
               </a:tr>
-              <a:tr h="793724">
+              <a:tr h="502920">
                 <a:tc>
                   <a:txBody>
                     <a:bodyPr/>
@@ -3514,7 +3064,7 @@
                         <a:buNone/>
                       </a:pPr>
                       <a:r>
-                        <a:rPr lang="en-US" sz="1800" b="1" dirty="0">
+                        <a:rPr lang="en-US" sz="1250" b="1" dirty="0">
                           <a:solidFill>
                             <a:srgbClr val="212121"/>
                           </a:solidFill>
@@ -3524,7 +3074,7 @@
                         </a:rPr>
                         <a:t>Eventos</a:t>
                       </a:r>
-                      <a:endParaRPr lang="en-US" sz="1800" dirty="0">
+                      <a:endParaRPr lang="en-US" sz="1250" dirty="0">
                         <a:latin typeface="Arial" charset="0"/>
                         <a:ea typeface="Arial" charset="0"/>
                         <a:cs typeface="Arial" charset="0"/>
@@ -3582,7 +3132,7 @@
                         <a:buNone/>
                       </a:pPr>
                       <a:r>
-                        <a:rPr lang="en-US" sz="1800" dirty="0">
+                        <a:rPr lang="en-US" sz="1250" dirty="0">
                           <a:solidFill>
                             <a:srgbClr val="212121"/>
                           </a:solidFill>
@@ -3592,7 +3142,7 @@
                         </a:rPr>
                         <a:t>¿Qué cambio de estado ha ocurrido?</a:t>
                       </a:r>
-                      <a:endParaRPr lang="en-US" sz="1800" dirty="0">
+                      <a:endParaRPr lang="en-US" sz="1250" dirty="0">
                         <a:latin typeface="Arial" charset="0"/>
                         <a:ea typeface="Arial" charset="0"/>
                         <a:cs typeface="Arial" charset="0"/>
@@ -3650,7 +3200,7 @@
                         <a:buNone/>
                       </a:pPr>
                       <a:r>
-                        <a:rPr lang="en-US" sz="1800" dirty="0">
+                        <a:rPr lang="en-US" sz="1250" dirty="0">
                           <a:solidFill>
                             <a:srgbClr val="212121"/>
                           </a:solidFill>
@@ -3660,7 +3210,7 @@
                         </a:rPr>
                         <a:t>Una instancia ha pasado de running a terminated</a:t>
                       </a:r>
-                      <a:endParaRPr lang="en-US" sz="1800" dirty="0">
+                      <a:endParaRPr lang="en-US" sz="1250" dirty="0">
                         <a:latin typeface="Arial" charset="0"/>
                         <a:ea typeface="Arial" charset="0"/>
                         <a:cs typeface="Arial" charset="0"/>
@@ -3715,7 +3265,7 @@
                   </a:ext>
                 </a:extLst>
               </a:tr>
-              <a:tr h="793724">
+              <a:tr h="502920">
                 <a:tc>
                   <a:txBody>
                     <a:bodyPr/>
@@ -3725,7 +3275,7 @@
                         <a:buNone/>
                       </a:pPr>
                       <a:r>
-                        <a:rPr lang="en-US" sz="1800" b="1" dirty="0">
+                        <a:rPr lang="en-US" sz="1250" b="1" dirty="0">
                           <a:solidFill>
                             <a:srgbClr val="212121"/>
                           </a:solidFill>
@@ -3735,7 +3285,7 @@
                         </a:rPr>
                         <a:t>Auditoría</a:t>
                       </a:r>
-                      <a:endParaRPr lang="en-US" sz="1800" dirty="0">
+                      <a:endParaRPr lang="en-US" sz="1250" dirty="0">
                         <a:latin typeface="Arial" charset="0"/>
                         <a:ea typeface="Arial" charset="0"/>
                         <a:cs typeface="Arial" charset="0"/>
@@ -3793,7 +3343,7 @@
                         <a:buNone/>
                       </a:pPr>
                       <a:r>
-                        <a:rPr lang="en-US" sz="1800" dirty="0">
+                        <a:rPr lang="en-US" sz="1250" dirty="0">
                           <a:solidFill>
                             <a:srgbClr val="212121"/>
                           </a:solidFill>
@@ -3803,7 +3353,7 @@
                         </a:rPr>
                         <a:t>¿Quién ha hecho qué, y cuándo?</a:t>
                       </a:r>
-                      <a:endParaRPr lang="en-US" sz="1800" dirty="0">
+                      <a:endParaRPr lang="en-US" sz="1250" dirty="0">
                         <a:latin typeface="Arial" charset="0"/>
                         <a:ea typeface="Arial" charset="0"/>
                         <a:cs typeface="Arial" charset="0"/>
@@ -3861,7 +3411,7 @@
                         <a:buNone/>
                       </a:pPr>
                       <a:r>
-                        <a:rPr lang="en-US" sz="1800" dirty="0">
+                        <a:rPr lang="en-US" sz="1250" dirty="0">
                           <a:solidFill>
                             <a:srgbClr val="212121"/>
                           </a:solidFill>
@@ -3869,9 +3419,9 @@
                           <a:ea typeface="Arial" pitchFamily="34" charset="-122"/>
                           <a:cs typeface="Arial" pitchFamily="34" charset="-120"/>
                         </a:rPr>
-                        <a:t>Quién ha modificado un grupo de seguridad</a:t>
+                        <a:t>Quién ha modificado un grupo de seguridad esta mañana</a:t>
                       </a:r>
-                      <a:endParaRPr lang="en-US" sz="1800" dirty="0">
+                      <a:endParaRPr lang="en-US" sz="1250" dirty="0">
                         <a:latin typeface="Arial" charset="0"/>
                         <a:ea typeface="Arial" charset="0"/>
                         <a:cs typeface="Arial" charset="0"/>
@@ -3930,6 +3480,77 @@
           </a:graphicData>
         </a:graphic>
       </p:graphicFrame>
+      <p:sp>
+        <p:nvSpPr>
+          <p:cNvPr id="7" name="Shape 4"/>
+          <p:cNvSpPr/>
+          <p:nvPr/>
+        </p:nvSpPr>
+        <p:spPr>
+          <a:xfrm>
+            <a:off x="548640" y="5074920"/>
+            <a:ext cx="11091672" cy="914400"/>
+          </a:xfrm>
+          <a:prstGeom prst="roundRect">
+            <a:avLst/>
+          </a:prstGeom>
+          <a:solidFill>
+            <a:srgbClr val="FFF8E1"/>
+          </a:solidFill>
+          <a:ln w="19050">
+            <a:solidFill>
+              <a:srgbClr val="FFA000"/>
+            </a:solidFill>
+            <a:prstDash val="solid"/>
+          </a:ln>
+        </p:spPr>
+        <p:txBody>
+          <a:bodyPr/>
+          <a:lstStyle/>
+          <a:p>
+            <a:endParaRPr lang="es-ES"/>
+          </a:p>
+        </p:txBody>
+      </p:sp>
+      <p:sp>
+        <p:nvSpPr>
+          <p:cNvPr id="8" name="Text 5"/>
+          <p:cNvSpPr/>
+          <p:nvPr/>
+        </p:nvSpPr>
+        <p:spPr>
+          <a:xfrm>
+            <a:off x="822960" y="5166360"/>
+            <a:ext cx="10543032" cy="731520"/>
+          </a:xfrm>
+          <a:prstGeom prst="rect">
+            <a:avLst/>
+          </a:prstGeom>
+          <a:noFill/>
+          <a:ln/>
+        </p:spPr>
+        <p:txBody>
+          <a:bodyPr wrap="square" rtlCol="0" anchor="ctr"/>
+          <a:lstStyle/>
+          <a:p>
+            <a:pPr marL="0" indent="0">
+              <a:buNone/>
+            </a:pPr>
+            <a:r>
+              <a:rPr lang="en-US" sz="1400" dirty="0">
+                <a:solidFill>
+                  <a:srgbClr val="212121"/>
+                </a:solidFill>
+                <a:latin typeface="Arial" pitchFamily="34" charset="0"/>
+                <a:ea typeface="Arial" pitchFamily="34" charset="-122"/>
+                <a:cs typeface="Arial" pitchFamily="34" charset="-120"/>
+              </a:rPr>
+              <a:t>Un servicio detrás de cada una: CloudWatch (métricas y alarmas), CloudWatch Logs (registros), EventBridge (eventos), CloudTrail (auditoría).</a:t>
+            </a:r>
+            <a:endParaRPr lang="en-US" sz="1400" dirty="0"/>
+          </a:p>
+        </p:txBody>
+      </p:sp>
     </p:spTree>
   </p:cSld>
   <p:clrMapOvr>
@@ -4020,7 +3641,7 @@
                 <a:ea typeface="Arial" pitchFamily="34" charset="-122"/>
                 <a:cs typeface="Arial" pitchFamily="34" charset="-120"/>
               </a:rPr>
-              <a:t>Un servicio de AWS detrás de cada señal</a:t>
+              <a:t>El mismo incidente, contado por cinco señales</a:t>
             </a:r>
             <a:endParaRPr lang="en-US" sz="2400" dirty="0"/>
           </a:p>
@@ -4073,8 +3694,8 @@
         </p:nvSpPr>
         <p:spPr>
           <a:xfrm>
-            <a:off x="548640" y="1371600"/>
-            <a:ext cx="11091672" cy="3291840"/>
+            <a:off x="548640" y="1143000"/>
+            <a:ext cx="11091672" cy="365760"/>
           </a:xfrm>
           <a:prstGeom prst="rect">
             <a:avLst/>
@@ -4083,18 +3704,156 @@
           <a:ln/>
         </p:spPr>
         <p:txBody>
-          <a:bodyPr wrap="square" rtlCol="0" anchor="t"/>
-          <a:lstStyle/>
-          <a:p>
-            <a:pPr marL="190500" indent="-190500">
-              <a:spcAft>
-                <a:spcPts val="1400"/>
-              </a:spcAft>
-              <a:buSzPct val="100000"/>
-              <a:buChar char="•"/>
+          <a:bodyPr wrap="square" rtlCol="0" anchor="ctr"/>
+          <a:lstStyle/>
+          <a:p>
+            <a:pPr marL="0" indent="0">
+              <a:buNone/>
             </a:pPr>
             <a:r>
-              <a:rPr lang="en-US" sz="1900" b="1" dirty="0">
+              <a:rPr lang="en-US" sz="1500" b="1" dirty="0">
+                <a:solidFill>
+                  <a:srgbClr val="3949AB"/>
+                </a:solidFill>
+                <a:latin typeface="Arial" pitchFamily="34" charset="0"/>
+                <a:ea typeface="Arial" pitchFamily="34" charset="-122"/>
+                <a:cs typeface="Arial" pitchFamily="34" charset="-120"/>
+              </a:rPr>
+              <a:t>Una instancia se queda sin memoria y deja de responder</a:t>
+            </a:r>
+            <a:endParaRPr lang="en-US" sz="1500" dirty="0"/>
+          </a:p>
+        </p:txBody>
+      </p:sp>
+      <p:sp>
+        <p:nvSpPr>
+          <p:cNvPr id="6" name="Shape 4"/>
+          <p:cNvSpPr/>
+          <p:nvPr/>
+        </p:nvSpPr>
+        <p:spPr>
+          <a:xfrm>
+            <a:off x="548640" y="1554480"/>
+            <a:ext cx="11091672" cy="777240"/>
+          </a:xfrm>
+          <a:prstGeom prst="roundRect">
+            <a:avLst/>
+          </a:prstGeom>
+          <a:solidFill>
+            <a:srgbClr val="E8EAF6"/>
+          </a:solidFill>
+          <a:ln w="15875">
+            <a:solidFill>
+              <a:srgbClr val="3949AB"/>
+            </a:solidFill>
+            <a:prstDash val="solid"/>
+          </a:ln>
+        </p:spPr>
+        <p:txBody>
+          <a:bodyPr/>
+          <a:lstStyle/>
+          <a:p>
+            <a:endParaRPr lang="es-ES"/>
+          </a:p>
+        </p:txBody>
+      </p:sp>
+      <p:sp>
+        <p:nvSpPr>
+          <p:cNvPr id="7" name="Shape 5"/>
+          <p:cNvSpPr/>
+          <p:nvPr/>
+        </p:nvSpPr>
+        <p:spPr>
+          <a:xfrm>
+            <a:off x="685800" y="1687068"/>
+            <a:ext cx="512064" cy="512064"/>
+          </a:xfrm>
+          <a:prstGeom prst="ellipse">
+            <a:avLst/>
+          </a:prstGeom>
+          <a:solidFill>
+            <a:srgbClr val="3949AB"/>
+          </a:solidFill>
+          <a:ln w="12700">
+            <a:solidFill>
+              <a:srgbClr val="3949AB"/>
+            </a:solidFill>
+            <a:prstDash val="solid"/>
+          </a:ln>
+        </p:spPr>
+        <p:txBody>
+          <a:bodyPr/>
+          <a:lstStyle/>
+          <a:p>
+            <a:endParaRPr lang="es-ES"/>
+          </a:p>
+        </p:txBody>
+      </p:sp>
+      <p:sp>
+        <p:nvSpPr>
+          <p:cNvPr id="8" name="Text 6"/>
+          <p:cNvSpPr/>
+          <p:nvPr/>
+        </p:nvSpPr>
+        <p:spPr>
+          <a:xfrm>
+            <a:off x="685800" y="1687068"/>
+            <a:ext cx="512064" cy="512064"/>
+          </a:xfrm>
+          <a:prstGeom prst="rect">
+            <a:avLst/>
+          </a:prstGeom>
+          <a:noFill/>
+          <a:ln/>
+        </p:spPr>
+        <p:txBody>
+          <a:bodyPr wrap="square" rtlCol="0" anchor="ctr"/>
+          <a:lstStyle/>
+          <a:p>
+            <a:pPr marL="0" indent="0" algn="ctr">
+              <a:buNone/>
+            </a:pPr>
+            <a:r>
+              <a:rPr lang="en-US" sz="1600" b="1" dirty="0">
+                <a:solidFill>
+                  <a:srgbClr val="FFFFFF"/>
+                </a:solidFill>
+                <a:latin typeface="Arial" pitchFamily="34" charset="0"/>
+                <a:ea typeface="Arial" pitchFamily="34" charset="-122"/>
+                <a:cs typeface="Arial" pitchFamily="34" charset="-120"/>
+              </a:rPr>
+              <a:t>1</a:t>
+            </a:r>
+            <a:endParaRPr lang="en-US" sz="1600" dirty="0"/>
+          </a:p>
+        </p:txBody>
+      </p:sp>
+      <p:sp>
+        <p:nvSpPr>
+          <p:cNvPr id="9" name="Text 7"/>
+          <p:cNvSpPr/>
+          <p:nvPr/>
+        </p:nvSpPr>
+        <p:spPr>
+          <a:xfrm>
+            <a:off x="1371600" y="1554480"/>
+            <a:ext cx="10085832" cy="777240"/>
+          </a:xfrm>
+          <a:prstGeom prst="rect">
+            <a:avLst/>
+          </a:prstGeom>
+          <a:noFill/>
+          <a:ln/>
+        </p:spPr>
+        <p:txBody>
+          <a:bodyPr wrap="square" rtlCol="0" anchor="ctr"/>
+          <a:lstStyle/>
+          <a:p>
+            <a:pPr marL="0" indent="0">
+              <a:buNone/>
+            </a:pPr>
+            <a:r>
+              <a:rPr lang="en-US" sz="1350" dirty="0">
                 <a:solidFill>
                   <a:srgbClr val="212121"/>
                 </a:solidFill>
@@ -4102,19 +3861,141 @@
                 <a:ea typeface="Arial" pitchFamily="34" charset="-122"/>
                 <a:cs typeface="Arial" pitchFamily="34" charset="-120"/>
               </a:rPr>
-              <a:t>CloudWatch: </a:t>
+              <a:t>Métrica: la memoria sube antes de que pase nada grave.</a:t>
             </a:r>
-            <a:endParaRPr lang="en-US" sz="1900" dirty="0"/>
-          </a:p>
-          <a:p>
-            <a:pPr marL="0" lvl="1" indent="0">
-              <a:spcAft>
-                <a:spcPts val="1400"/>
-              </a:spcAft>
+            <a:endParaRPr lang="en-US" sz="1350" dirty="0"/>
+          </a:p>
+        </p:txBody>
+      </p:sp>
+      <p:sp>
+        <p:nvSpPr>
+          <p:cNvPr id="10" name="Shape 8"/>
+          <p:cNvSpPr/>
+          <p:nvPr/>
+        </p:nvSpPr>
+        <p:spPr>
+          <a:xfrm>
+            <a:off x="548640" y="2423160"/>
+            <a:ext cx="11091672" cy="777240"/>
+          </a:xfrm>
+          <a:prstGeom prst="roundRect">
+            <a:avLst/>
+          </a:prstGeom>
+          <a:solidFill>
+            <a:srgbClr val="E8EAF6"/>
+          </a:solidFill>
+          <a:ln w="15875">
+            <a:solidFill>
+              <a:srgbClr val="3949AB"/>
+            </a:solidFill>
+            <a:prstDash val="solid"/>
+          </a:ln>
+        </p:spPr>
+        <p:txBody>
+          <a:bodyPr/>
+          <a:lstStyle/>
+          <a:p>
+            <a:endParaRPr lang="es-ES"/>
+          </a:p>
+        </p:txBody>
+      </p:sp>
+      <p:sp>
+        <p:nvSpPr>
+          <p:cNvPr id="11" name="Shape 9"/>
+          <p:cNvSpPr/>
+          <p:nvPr/>
+        </p:nvSpPr>
+        <p:spPr>
+          <a:xfrm>
+            <a:off x="685800" y="2555748"/>
+            <a:ext cx="512064" cy="512064"/>
+          </a:xfrm>
+          <a:prstGeom prst="ellipse">
+            <a:avLst/>
+          </a:prstGeom>
+          <a:solidFill>
+            <a:srgbClr val="3949AB"/>
+          </a:solidFill>
+          <a:ln w="12700">
+            <a:solidFill>
+              <a:srgbClr val="3949AB"/>
+            </a:solidFill>
+            <a:prstDash val="solid"/>
+          </a:ln>
+        </p:spPr>
+        <p:txBody>
+          <a:bodyPr/>
+          <a:lstStyle/>
+          <a:p>
+            <a:endParaRPr lang="es-ES"/>
+          </a:p>
+        </p:txBody>
+      </p:sp>
+      <p:sp>
+        <p:nvSpPr>
+          <p:cNvPr id="12" name="Text 10"/>
+          <p:cNvSpPr/>
+          <p:nvPr/>
+        </p:nvSpPr>
+        <p:spPr>
+          <a:xfrm>
+            <a:off x="685800" y="2555748"/>
+            <a:ext cx="512064" cy="512064"/>
+          </a:xfrm>
+          <a:prstGeom prst="rect">
+            <a:avLst/>
+          </a:prstGeom>
+          <a:noFill/>
+          <a:ln/>
+        </p:spPr>
+        <p:txBody>
+          <a:bodyPr wrap="square" rtlCol="0" anchor="ctr"/>
+          <a:lstStyle/>
+          <a:p>
+            <a:pPr marL="0" indent="0" algn="ctr">
               <a:buNone/>
             </a:pPr>
             <a:r>
-              <a:rPr lang="en-US" sz="1900" dirty="0">
+              <a:rPr lang="en-US" sz="1600" b="1" dirty="0">
+                <a:solidFill>
+                  <a:srgbClr val="FFFFFF"/>
+                </a:solidFill>
+                <a:latin typeface="Arial" pitchFamily="34" charset="0"/>
+                <a:ea typeface="Arial" pitchFamily="34" charset="-122"/>
+                <a:cs typeface="Arial" pitchFamily="34" charset="-120"/>
+              </a:rPr>
+              <a:t>2</a:t>
+            </a:r>
+            <a:endParaRPr lang="en-US" sz="1600" dirty="0"/>
+          </a:p>
+        </p:txBody>
+      </p:sp>
+      <p:sp>
+        <p:nvSpPr>
+          <p:cNvPr id="13" name="Text 11"/>
+          <p:cNvSpPr/>
+          <p:nvPr/>
+        </p:nvSpPr>
+        <p:spPr>
+          <a:xfrm>
+            <a:off x="1371600" y="2423160"/>
+            <a:ext cx="10085832" cy="777240"/>
+          </a:xfrm>
+          <a:prstGeom prst="rect">
+            <a:avLst/>
+          </a:prstGeom>
+          <a:noFill/>
+          <a:ln/>
+        </p:spPr>
+        <p:txBody>
+          <a:bodyPr wrap="square" rtlCol="0" anchor="ctr"/>
+          <a:lstStyle/>
+          <a:p>
+            <a:pPr marL="0" indent="0">
+              <a:buNone/>
+            </a:pPr>
+            <a:r>
+              <a:rPr lang="en-US" sz="1350" dirty="0">
                 <a:solidFill>
                   <a:srgbClr val="212121"/>
                 </a:solidFill>
@@ -4122,20 +4003,141 @@
                 <a:ea typeface="Arial" pitchFamily="34" charset="-122"/>
                 <a:cs typeface="Arial" pitchFamily="34" charset="-120"/>
               </a:rPr>
-              <a:t>recoge las métricas y las alarmas que se disparan sobre ellas.</a:t>
+              <a:t>Registro: la aplicación deja el error concreto en el momento del fallo.</a:t>
             </a:r>
-            <a:endParaRPr lang="en-US" sz="1900" dirty="0"/>
-          </a:p>
-          <a:p>
-            <a:pPr marL="190500" indent="-190500">
-              <a:spcAft>
-                <a:spcPts val="1400"/>
-              </a:spcAft>
-              <a:buSzPct val="100000"/>
-              <a:buChar char="•"/>
+            <a:endParaRPr lang="en-US" sz="1350" dirty="0"/>
+          </a:p>
+        </p:txBody>
+      </p:sp>
+      <p:sp>
+        <p:nvSpPr>
+          <p:cNvPr id="14" name="Shape 12"/>
+          <p:cNvSpPr/>
+          <p:nvPr/>
+        </p:nvSpPr>
+        <p:spPr>
+          <a:xfrm>
+            <a:off x="548640" y="3291840"/>
+            <a:ext cx="11091672" cy="777240"/>
+          </a:xfrm>
+          <a:prstGeom prst="roundRect">
+            <a:avLst/>
+          </a:prstGeom>
+          <a:solidFill>
+            <a:srgbClr val="E8EAF6"/>
+          </a:solidFill>
+          <a:ln w="15875">
+            <a:solidFill>
+              <a:srgbClr val="3949AB"/>
+            </a:solidFill>
+            <a:prstDash val="solid"/>
+          </a:ln>
+        </p:spPr>
+        <p:txBody>
+          <a:bodyPr/>
+          <a:lstStyle/>
+          <a:p>
+            <a:endParaRPr lang="es-ES"/>
+          </a:p>
+        </p:txBody>
+      </p:sp>
+      <p:sp>
+        <p:nvSpPr>
+          <p:cNvPr id="15" name="Shape 13"/>
+          <p:cNvSpPr/>
+          <p:nvPr/>
+        </p:nvSpPr>
+        <p:spPr>
+          <a:xfrm>
+            <a:off x="685800" y="3424428"/>
+            <a:ext cx="512064" cy="512064"/>
+          </a:xfrm>
+          <a:prstGeom prst="ellipse">
+            <a:avLst/>
+          </a:prstGeom>
+          <a:solidFill>
+            <a:srgbClr val="3949AB"/>
+          </a:solidFill>
+          <a:ln w="12700">
+            <a:solidFill>
+              <a:srgbClr val="3949AB"/>
+            </a:solidFill>
+            <a:prstDash val="solid"/>
+          </a:ln>
+        </p:spPr>
+        <p:txBody>
+          <a:bodyPr/>
+          <a:lstStyle/>
+          <a:p>
+            <a:endParaRPr lang="es-ES"/>
+          </a:p>
+        </p:txBody>
+      </p:sp>
+      <p:sp>
+        <p:nvSpPr>
+          <p:cNvPr id="16" name="Text 14"/>
+          <p:cNvSpPr/>
+          <p:nvPr/>
+        </p:nvSpPr>
+        <p:spPr>
+          <a:xfrm>
+            <a:off x="685800" y="3424428"/>
+            <a:ext cx="512064" cy="512064"/>
+          </a:xfrm>
+          <a:prstGeom prst="rect">
+            <a:avLst/>
+          </a:prstGeom>
+          <a:noFill/>
+          <a:ln/>
+        </p:spPr>
+        <p:txBody>
+          <a:bodyPr wrap="square" rtlCol="0" anchor="ctr"/>
+          <a:lstStyle/>
+          <a:p>
+            <a:pPr marL="0" indent="0" algn="ctr">
+              <a:buNone/>
             </a:pPr>
             <a:r>
-              <a:rPr lang="en-US" sz="1900" b="1" dirty="0">
+              <a:rPr lang="en-US" sz="1600" b="1" dirty="0">
+                <a:solidFill>
+                  <a:srgbClr val="FFFFFF"/>
+                </a:solidFill>
+                <a:latin typeface="Arial" pitchFamily="34" charset="0"/>
+                <a:ea typeface="Arial" pitchFamily="34" charset="-122"/>
+                <a:cs typeface="Arial" pitchFamily="34" charset="-120"/>
+              </a:rPr>
+              <a:t>3</a:t>
+            </a:r>
+            <a:endParaRPr lang="en-US" sz="1600" dirty="0"/>
+          </a:p>
+        </p:txBody>
+      </p:sp>
+      <p:sp>
+        <p:nvSpPr>
+          <p:cNvPr id="17" name="Text 15"/>
+          <p:cNvSpPr/>
+          <p:nvPr/>
+        </p:nvSpPr>
+        <p:spPr>
+          <a:xfrm>
+            <a:off x="1371600" y="3291840"/>
+            <a:ext cx="10085832" cy="777240"/>
+          </a:xfrm>
+          <a:prstGeom prst="rect">
+            <a:avLst/>
+          </a:prstGeom>
+          <a:noFill/>
+          <a:ln/>
+        </p:spPr>
+        <p:txBody>
+          <a:bodyPr wrap="square" rtlCol="0" anchor="ctr"/>
+          <a:lstStyle/>
+          <a:p>
+            <a:pPr marL="0" indent="0">
+              <a:buNone/>
+            </a:pPr>
+            <a:r>
+              <a:rPr lang="en-US" sz="1350" dirty="0">
                 <a:solidFill>
                   <a:srgbClr val="212121"/>
                 </a:solidFill>
@@ -4143,19 +4145,141 @@
                 <a:ea typeface="Arial" pitchFamily="34" charset="-122"/>
                 <a:cs typeface="Arial" pitchFamily="34" charset="-120"/>
               </a:rPr>
-              <a:t>CloudWatch Logs: </a:t>
+              <a:t>Alarma: te avisa en cuanto la métrica cruza el umbral.</a:t>
             </a:r>
-            <a:endParaRPr lang="en-US" sz="1900" dirty="0"/>
-          </a:p>
-          <a:p>
-            <a:pPr marL="0" lvl="1" indent="0">
-              <a:spcAft>
-                <a:spcPts val="1400"/>
-              </a:spcAft>
+            <a:endParaRPr lang="en-US" sz="1350" dirty="0"/>
+          </a:p>
+        </p:txBody>
+      </p:sp>
+      <p:sp>
+        <p:nvSpPr>
+          <p:cNvPr id="18" name="Shape 16"/>
+          <p:cNvSpPr/>
+          <p:nvPr/>
+        </p:nvSpPr>
+        <p:spPr>
+          <a:xfrm>
+            <a:off x="548640" y="4160520"/>
+            <a:ext cx="11091672" cy="777240"/>
+          </a:xfrm>
+          <a:prstGeom prst="roundRect">
+            <a:avLst/>
+          </a:prstGeom>
+          <a:solidFill>
+            <a:srgbClr val="E8EAF6"/>
+          </a:solidFill>
+          <a:ln w="15875">
+            <a:solidFill>
+              <a:srgbClr val="3949AB"/>
+            </a:solidFill>
+            <a:prstDash val="solid"/>
+          </a:ln>
+        </p:spPr>
+        <p:txBody>
+          <a:bodyPr/>
+          <a:lstStyle/>
+          <a:p>
+            <a:endParaRPr lang="es-ES"/>
+          </a:p>
+        </p:txBody>
+      </p:sp>
+      <p:sp>
+        <p:nvSpPr>
+          <p:cNvPr id="19" name="Shape 17"/>
+          <p:cNvSpPr/>
+          <p:nvPr/>
+        </p:nvSpPr>
+        <p:spPr>
+          <a:xfrm>
+            <a:off x="685800" y="4293108"/>
+            <a:ext cx="512064" cy="512064"/>
+          </a:xfrm>
+          <a:prstGeom prst="ellipse">
+            <a:avLst/>
+          </a:prstGeom>
+          <a:solidFill>
+            <a:srgbClr val="3949AB"/>
+          </a:solidFill>
+          <a:ln w="12700">
+            <a:solidFill>
+              <a:srgbClr val="3949AB"/>
+            </a:solidFill>
+            <a:prstDash val="solid"/>
+          </a:ln>
+        </p:spPr>
+        <p:txBody>
+          <a:bodyPr/>
+          <a:lstStyle/>
+          <a:p>
+            <a:endParaRPr lang="es-ES"/>
+          </a:p>
+        </p:txBody>
+      </p:sp>
+      <p:sp>
+        <p:nvSpPr>
+          <p:cNvPr id="20" name="Text 18"/>
+          <p:cNvSpPr/>
+          <p:nvPr/>
+        </p:nvSpPr>
+        <p:spPr>
+          <a:xfrm>
+            <a:off x="685800" y="4293108"/>
+            <a:ext cx="512064" cy="512064"/>
+          </a:xfrm>
+          <a:prstGeom prst="rect">
+            <a:avLst/>
+          </a:prstGeom>
+          <a:noFill/>
+          <a:ln/>
+        </p:spPr>
+        <p:txBody>
+          <a:bodyPr wrap="square" rtlCol="0" anchor="ctr"/>
+          <a:lstStyle/>
+          <a:p>
+            <a:pPr marL="0" indent="0" algn="ctr">
               <a:buNone/>
             </a:pPr>
             <a:r>
-              <a:rPr lang="en-US" sz="1900" dirty="0">
+              <a:rPr lang="en-US" sz="1600" b="1" dirty="0">
+                <a:solidFill>
+                  <a:srgbClr val="FFFFFF"/>
+                </a:solidFill>
+                <a:latin typeface="Arial" pitchFamily="34" charset="0"/>
+                <a:ea typeface="Arial" pitchFamily="34" charset="-122"/>
+                <a:cs typeface="Arial" pitchFamily="34" charset="-120"/>
+              </a:rPr>
+              <a:t>4</a:t>
+            </a:r>
+            <a:endParaRPr lang="en-US" sz="1600" dirty="0"/>
+          </a:p>
+        </p:txBody>
+      </p:sp>
+      <p:sp>
+        <p:nvSpPr>
+          <p:cNvPr id="21" name="Text 19"/>
+          <p:cNvSpPr/>
+          <p:nvPr/>
+        </p:nvSpPr>
+        <p:spPr>
+          <a:xfrm>
+            <a:off x="1371600" y="4160520"/>
+            <a:ext cx="10085832" cy="777240"/>
+          </a:xfrm>
+          <a:prstGeom prst="rect">
+            <a:avLst/>
+          </a:prstGeom>
+          <a:noFill/>
+          <a:ln/>
+        </p:spPr>
+        <p:txBody>
+          <a:bodyPr wrap="square" rtlCol="0" anchor="ctr"/>
+          <a:lstStyle/>
+          <a:p>
+            <a:pPr marL="0" indent="0">
+              <a:buNone/>
+            </a:pPr>
+            <a:r>
+              <a:rPr lang="en-US" sz="1350" dirty="0">
                 <a:solidFill>
                   <a:srgbClr val="212121"/>
                 </a:solidFill>
@@ -4163,20 +4287,141 @@
                 <a:ea typeface="Arial" pitchFamily="34" charset="-122"/>
                 <a:cs typeface="Arial" pitchFamily="34" charset="-120"/>
               </a:rPr>
-              <a:t>guarda los registros.</a:t>
+              <a:t>Evento: el grupo de escalado ha terminado esa instancia y lanzado otra.</a:t>
             </a:r>
-            <a:endParaRPr lang="en-US" sz="1900" dirty="0"/>
-          </a:p>
-          <a:p>
-            <a:pPr marL="190500" indent="-190500">
-              <a:spcAft>
-                <a:spcPts val="1400"/>
-              </a:spcAft>
-              <a:buSzPct val="100000"/>
-              <a:buChar char="•"/>
+            <a:endParaRPr lang="en-US" sz="1350" dirty="0"/>
+          </a:p>
+        </p:txBody>
+      </p:sp>
+      <p:sp>
+        <p:nvSpPr>
+          <p:cNvPr id="22" name="Shape 20"/>
+          <p:cNvSpPr/>
+          <p:nvPr/>
+        </p:nvSpPr>
+        <p:spPr>
+          <a:xfrm>
+            <a:off x="548640" y="5029200"/>
+            <a:ext cx="11091672" cy="777240"/>
+          </a:xfrm>
+          <a:prstGeom prst="roundRect">
+            <a:avLst/>
+          </a:prstGeom>
+          <a:solidFill>
+            <a:srgbClr val="E8EAF6"/>
+          </a:solidFill>
+          <a:ln w="15875">
+            <a:solidFill>
+              <a:srgbClr val="3949AB"/>
+            </a:solidFill>
+            <a:prstDash val="solid"/>
+          </a:ln>
+        </p:spPr>
+        <p:txBody>
+          <a:bodyPr/>
+          <a:lstStyle/>
+          <a:p>
+            <a:endParaRPr lang="es-ES"/>
+          </a:p>
+        </p:txBody>
+      </p:sp>
+      <p:sp>
+        <p:nvSpPr>
+          <p:cNvPr id="23" name="Shape 21"/>
+          <p:cNvSpPr/>
+          <p:nvPr/>
+        </p:nvSpPr>
+        <p:spPr>
+          <a:xfrm>
+            <a:off x="685800" y="5161788"/>
+            <a:ext cx="512064" cy="512064"/>
+          </a:xfrm>
+          <a:prstGeom prst="ellipse">
+            <a:avLst/>
+          </a:prstGeom>
+          <a:solidFill>
+            <a:srgbClr val="3949AB"/>
+          </a:solidFill>
+          <a:ln w="12700">
+            <a:solidFill>
+              <a:srgbClr val="3949AB"/>
+            </a:solidFill>
+            <a:prstDash val="solid"/>
+          </a:ln>
+        </p:spPr>
+        <p:txBody>
+          <a:bodyPr/>
+          <a:lstStyle/>
+          <a:p>
+            <a:endParaRPr lang="es-ES"/>
+          </a:p>
+        </p:txBody>
+      </p:sp>
+      <p:sp>
+        <p:nvSpPr>
+          <p:cNvPr id="24" name="Text 22"/>
+          <p:cNvSpPr/>
+          <p:nvPr/>
+        </p:nvSpPr>
+        <p:spPr>
+          <a:xfrm>
+            <a:off x="685800" y="5161788"/>
+            <a:ext cx="512064" cy="512064"/>
+          </a:xfrm>
+          <a:prstGeom prst="rect">
+            <a:avLst/>
+          </a:prstGeom>
+          <a:noFill/>
+          <a:ln/>
+        </p:spPr>
+        <p:txBody>
+          <a:bodyPr wrap="square" rtlCol="0" anchor="ctr"/>
+          <a:lstStyle/>
+          <a:p>
+            <a:pPr marL="0" indent="0" algn="ctr">
+              <a:buNone/>
             </a:pPr>
             <a:r>
-              <a:rPr lang="en-US" sz="1900" b="1" dirty="0">
+              <a:rPr lang="en-US" sz="1600" b="1" dirty="0">
+                <a:solidFill>
+                  <a:srgbClr val="FFFFFF"/>
+                </a:solidFill>
+                <a:latin typeface="Arial" pitchFamily="34" charset="0"/>
+                <a:ea typeface="Arial" pitchFamily="34" charset="-122"/>
+                <a:cs typeface="Arial" pitchFamily="34" charset="-120"/>
+              </a:rPr>
+              <a:t>5</a:t>
+            </a:r>
+            <a:endParaRPr lang="en-US" sz="1600" dirty="0"/>
+          </a:p>
+        </p:txBody>
+      </p:sp>
+      <p:sp>
+        <p:nvSpPr>
+          <p:cNvPr id="25" name="Text 23"/>
+          <p:cNvSpPr/>
+          <p:nvPr/>
+        </p:nvSpPr>
+        <p:spPr>
+          <a:xfrm>
+            <a:off x="1371600" y="5029200"/>
+            <a:ext cx="10085832" cy="777240"/>
+          </a:xfrm>
+          <a:prstGeom prst="rect">
+            <a:avLst/>
+          </a:prstGeom>
+          <a:noFill/>
+          <a:ln/>
+        </p:spPr>
+        <p:txBody>
+          <a:bodyPr wrap="square" rtlCol="0" anchor="ctr"/>
+          <a:lstStyle/>
+          <a:p>
+            <a:pPr marL="0" indent="0">
+              <a:buNone/>
+            </a:pPr>
+            <a:r>
+              <a:rPr lang="en-US" sz="1350" dirty="0">
                 <a:solidFill>
                   <a:srgbClr val="212121"/>
                 </a:solidFill>
@@ -4184,70 +4429,9 @@
                 <a:ea typeface="Arial" pitchFamily="34" charset="-122"/>
                 <a:cs typeface="Arial" pitchFamily="34" charset="-120"/>
               </a:rPr>
-              <a:t>EventBridge: </a:t>
+              <a:t>Auditoría: confirma que nadie ha tocado nada a mano — el sistema ha reaccionado solo.</a:t>
             </a:r>
-            <a:endParaRPr lang="en-US" sz="1900" dirty="0"/>
-          </a:p>
-          <a:p>
-            <a:pPr marL="0" lvl="1" indent="0">
-              <a:spcAft>
-                <a:spcPts val="1400"/>
-              </a:spcAft>
-              <a:buNone/>
-            </a:pPr>
-            <a:r>
-              <a:rPr lang="en-US" sz="1900" dirty="0">
-                <a:solidFill>
-                  <a:srgbClr val="212121"/>
-                </a:solidFill>
-                <a:latin typeface="Arial" pitchFamily="34" charset="0"/>
-                <a:ea typeface="Arial" pitchFamily="34" charset="-122"/>
-                <a:cs typeface="Arial" pitchFamily="34" charset="-120"/>
-              </a:rPr>
-              <a:t>reacciona a los eventos de cambio de estado.</a:t>
-            </a:r>
-            <a:endParaRPr lang="en-US" sz="1900" dirty="0"/>
-          </a:p>
-          <a:p>
-            <a:pPr marL="190500" indent="-190500">
-              <a:spcAft>
-                <a:spcPts val="1400"/>
-              </a:spcAft>
-              <a:buSzPct val="100000"/>
-              <a:buChar char="•"/>
-            </a:pPr>
-            <a:r>
-              <a:rPr lang="en-US" sz="1900" b="1" dirty="0">
-                <a:solidFill>
-                  <a:srgbClr val="212121"/>
-                </a:solidFill>
-                <a:latin typeface="Arial" pitchFamily="34" charset="0"/>
-                <a:ea typeface="Arial" pitchFamily="34" charset="-122"/>
-                <a:cs typeface="Arial" pitchFamily="34" charset="-120"/>
-              </a:rPr>
-              <a:t>CloudTrail: </a:t>
-            </a:r>
-            <a:endParaRPr lang="en-US" sz="1900" dirty="0"/>
-          </a:p>
-          <a:p>
-            <a:pPr marL="0" lvl="1" indent="0">
-              <a:spcAft>
-                <a:spcPts val="1400"/>
-              </a:spcAft>
-              <a:buNone/>
-            </a:pPr>
-            <a:r>
-              <a:rPr lang="en-US" sz="1900" dirty="0">
-                <a:solidFill>
-                  <a:srgbClr val="212121"/>
-                </a:solidFill>
-                <a:latin typeface="Arial" pitchFamily="34" charset="0"/>
-                <a:ea typeface="Arial" pitchFamily="34" charset="-122"/>
-                <a:cs typeface="Arial" pitchFamily="34" charset="-120"/>
-              </a:rPr>
-              <a:t>el registro de auditoría — quién ha hecho cada llamada a la API y cuándo.</a:t>
-            </a:r>
-            <a:endParaRPr lang="en-US" sz="1900" dirty="0"/>
+            <a:endParaRPr lang="en-US" sz="1350" dirty="0"/>
           </a:p>
         </p:txBody>
       </p:sp>
@@ -4341,7 +4525,7 @@
                 <a:ea typeface="Arial" pitchFamily="34" charset="-122"/>
                 <a:cs typeface="Arial" pitchFamily="34" charset="-120"/>
               </a:rPr>
-              <a:t>Las cinco señales sobre el mismo incidente</a:t>
+              <a:t>Cuánto monitorizar: filtrar el ruido</a:t>
             </a:r>
             <a:endParaRPr lang="en-US" sz="2400" dirty="0"/>
           </a:p>
@@ -4388,14 +4572,46 @@
       </p:sp>
       <p:sp>
         <p:nvSpPr>
-          <p:cNvPr id="5" name="Text 3"/>
-          <p:cNvSpPr/>
-          <p:nvPr/>
-        </p:nvSpPr>
-        <p:spPr>
-          <a:xfrm>
-            <a:off x="548640" y="1188720"/>
-            <a:ext cx="11091672" cy="457200"/>
+          <p:cNvPr id="5" name="Shape 3"/>
+          <p:cNvSpPr/>
+          <p:nvPr/>
+        </p:nvSpPr>
+        <p:spPr>
+          <a:xfrm>
+            <a:off x="548640" y="1143000"/>
+            <a:ext cx="11091672" cy="914400"/>
+          </a:xfrm>
+          <a:prstGeom prst="roundRect">
+            <a:avLst/>
+          </a:prstGeom>
+          <a:solidFill>
+            <a:srgbClr val="FFF8E1"/>
+          </a:solidFill>
+          <a:ln w="19050">
+            <a:solidFill>
+              <a:srgbClr val="FFA000"/>
+            </a:solidFill>
+            <a:prstDash val="solid"/>
+          </a:ln>
+        </p:spPr>
+        <p:txBody>
+          <a:bodyPr/>
+          <a:lstStyle/>
+          <a:p>
+            <a:endParaRPr lang="es-ES"/>
+          </a:p>
+        </p:txBody>
+      </p:sp>
+      <p:sp>
+        <p:nvSpPr>
+          <p:cNvPr id="6" name="Text 4"/>
+          <p:cNvSpPr/>
+          <p:nvPr/>
+        </p:nvSpPr>
+        <p:spPr>
+          <a:xfrm>
+            <a:off x="822960" y="1234440"/>
+            <a:ext cx="10543032" cy="731520"/>
           </a:xfrm>
           <a:prstGeom prst="rect">
             <a:avLst/>
@@ -4404,14 +4620,14 @@
           <a:ln/>
         </p:spPr>
         <p:txBody>
-          <a:bodyPr wrap="square" rtlCol="0" anchor="t"/>
+          <a:bodyPr wrap="square" rtlCol="0" anchor="ctr"/>
           <a:lstStyle/>
           <a:p>
             <a:pPr marL="0" indent="0">
               <a:buNone/>
             </a:pPr>
             <a:r>
-              <a:rPr lang="en-US" sz="1900" b="1" dirty="0">
+              <a:rPr lang="en-US" sz="1500" dirty="0">
                 <a:solidFill>
                   <a:srgbClr val="212121"/>
                 </a:solidFill>
@@ -4419,22 +4635,54 @@
                 <a:ea typeface="Arial" pitchFamily="34" charset="-122"/>
                 <a:cs typeface="Arial" pitchFamily="34" charset="-120"/>
               </a:rPr>
-              <a:t>Una instancia se queda sin memoria y deja de responder:</a:t>
+              <a:t>No todo lo que se puede medir merece una alarma — es el mismo problema que un detector de humos tan sensible que salta con el vapor de la ducha: al final lo desconectas.</a:t>
             </a:r>
-            <a:endParaRPr lang="en-US" sz="1900" dirty="0"/>
-          </a:p>
-        </p:txBody>
-      </p:sp>
-      <p:sp>
-        <p:nvSpPr>
-          <p:cNvPr id="6" name="Text 4"/>
-          <p:cNvSpPr/>
-          <p:nvPr/>
-        </p:nvSpPr>
-        <p:spPr>
-          <a:xfrm>
-            <a:off x="548640" y="1828800"/>
-            <a:ext cx="11091672" cy="3200400"/>
+            <a:endParaRPr lang="en-US" sz="1500" dirty="0"/>
+          </a:p>
+        </p:txBody>
+      </p:sp>
+      <p:sp>
+        <p:nvSpPr>
+          <p:cNvPr id="7" name="Shape 5"/>
+          <p:cNvSpPr/>
+          <p:nvPr/>
+        </p:nvSpPr>
+        <p:spPr>
+          <a:xfrm>
+            <a:off x="548640" y="2468880"/>
+            <a:ext cx="4174236" cy="822960"/>
+          </a:xfrm>
+          <a:prstGeom prst="roundRect">
+            <a:avLst/>
+          </a:prstGeom>
+          <a:solidFill>
+            <a:srgbClr val="E8EAF6"/>
+          </a:solidFill>
+          <a:ln w="15875">
+            <a:solidFill>
+              <a:srgbClr val="3949AB"/>
+            </a:solidFill>
+            <a:prstDash val="solid"/>
+          </a:ln>
+        </p:spPr>
+        <p:txBody>
+          <a:bodyPr/>
+          <a:lstStyle/>
+          <a:p>
+            <a:endParaRPr lang="es-ES"/>
+          </a:p>
+        </p:txBody>
+      </p:sp>
+      <p:sp>
+        <p:nvSpPr>
+          <p:cNvPr id="8" name="Text 6"/>
+          <p:cNvSpPr/>
+          <p:nvPr/>
+        </p:nvSpPr>
+        <p:spPr>
+          <a:xfrm>
+            <a:off x="640080" y="2468880"/>
+            <a:ext cx="3991356" cy="822960"/>
           </a:xfrm>
           <a:prstGeom prst="rect">
             <a:avLst/>
@@ -4443,18 +4691,14 @@
           <a:ln/>
         </p:spPr>
         <p:txBody>
-          <a:bodyPr wrap="square" rtlCol="0" anchor="t"/>
-          <a:lstStyle/>
-          <a:p>
-            <a:pPr marL="342900" indent="-342900">
-              <a:spcAft>
-                <a:spcPts val="800"/>
-              </a:spcAft>
-              <a:buSzPct val="100000"/>
-              <a:buChar char="•"/>
+          <a:bodyPr wrap="square" rtlCol="0" anchor="ctr"/>
+          <a:lstStyle/>
+          <a:p>
+            <a:pPr marL="0" indent="0" algn="ctr">
+              <a:buNone/>
             </a:pPr>
             <a:r>
-              <a:rPr lang="en-US" sz="2400" dirty="0">
+              <a:rPr lang="en-US" sz="1500" dirty="0">
                 <a:solidFill>
                   <a:srgbClr val="212121"/>
                 </a:solidFill>
@@ -4462,20 +4706,16 @@
                 <a:ea typeface="Arial" pitchFamily="34" charset="-122"/>
                 <a:cs typeface="Arial" pitchFamily="34" charset="-120"/>
               </a:rPr>
-              <a:t>Métrica: la subida de memoria, antes de que pasara nada grave.</a:t>
+              <a:t>📊 Todo lo que</a:t>
             </a:r>
-            <a:endParaRPr lang="en-US" sz="2400" dirty="0"/>
-          </a:p>
-          <a:p>
-            <a:pPr marL="342900" indent="-342900">
-              <a:spcAft>
-                <a:spcPts val="800"/>
-              </a:spcAft>
-              <a:buSzPct val="100000"/>
-              <a:buChar char="•"/>
+            <a:endParaRPr lang="en-US" sz="1500" dirty="0"/>
+          </a:p>
+          <a:p>
+            <a:pPr marL="0" indent="0" algn="ctr">
+              <a:buNone/>
             </a:pPr>
             <a:r>
-              <a:rPr lang="en-US" sz="2400" dirty="0">
+              <a:rPr lang="en-US" sz="1500" dirty="0">
                 <a:solidFill>
                   <a:srgbClr val="212121"/>
                 </a:solidFill>
@@ -4483,20 +4723,70 @@
                 <a:ea typeface="Arial" pitchFamily="34" charset="-122"/>
                 <a:cs typeface="Arial" pitchFamily="34" charset="-120"/>
               </a:rPr>
-              <a:t>Registro: el error concreto de la aplicación en el momento del fallo.</a:t>
+              <a:t>se puede medir</a:t>
             </a:r>
-            <a:endParaRPr lang="en-US" sz="2400" dirty="0"/>
-          </a:p>
-          <a:p>
-            <a:pPr marL="342900" indent="-342900">
-              <a:spcAft>
-                <a:spcPts val="800"/>
-              </a:spcAft>
-              <a:buSzPct val="100000"/>
-              <a:buChar char="•"/>
+            <a:endParaRPr lang="en-US" sz="1500" dirty="0"/>
+          </a:p>
+        </p:txBody>
+      </p:sp>
+      <p:sp>
+        <p:nvSpPr>
+          <p:cNvPr id="9" name="Shape 7"/>
+          <p:cNvSpPr/>
+          <p:nvPr/>
+        </p:nvSpPr>
+        <p:spPr>
+          <a:xfrm>
+            <a:off x="7466076" y="2468880"/>
+            <a:ext cx="4174236" cy="822960"/>
+          </a:xfrm>
+          <a:prstGeom prst="roundRect">
+            <a:avLst/>
+          </a:prstGeom>
+          <a:solidFill>
+            <a:srgbClr val="E8EAF6"/>
+          </a:solidFill>
+          <a:ln w="15875">
+            <a:solidFill>
+              <a:srgbClr val="3949AB"/>
+            </a:solidFill>
+            <a:prstDash val="solid"/>
+          </a:ln>
+        </p:spPr>
+        <p:txBody>
+          <a:bodyPr/>
+          <a:lstStyle/>
+          <a:p>
+            <a:endParaRPr lang="es-ES"/>
+          </a:p>
+        </p:txBody>
+      </p:sp>
+      <p:sp>
+        <p:nvSpPr>
+          <p:cNvPr id="10" name="Text 8"/>
+          <p:cNvSpPr/>
+          <p:nvPr/>
+        </p:nvSpPr>
+        <p:spPr>
+          <a:xfrm>
+            <a:off x="7557516" y="2468880"/>
+            <a:ext cx="3991356" cy="822960"/>
+          </a:xfrm>
+          <a:prstGeom prst="rect">
+            <a:avLst/>
+          </a:prstGeom>
+          <a:noFill/>
+          <a:ln/>
+        </p:spPr>
+        <p:txBody>
+          <a:bodyPr wrap="square" rtlCol="0" anchor="ctr"/>
+          <a:lstStyle/>
+          <a:p>
+            <a:pPr marL="0" indent="0" algn="ctr">
+              <a:buNone/>
             </a:pPr>
             <a:r>
-              <a:rPr lang="en-US" sz="2400" dirty="0">
+              <a:rPr lang="en-US" sz="1500" dirty="0">
                 <a:solidFill>
                   <a:srgbClr val="212121"/>
                 </a:solidFill>
@@ -4504,20 +4794,16 @@
                 <a:ea typeface="Arial" pitchFamily="34" charset="-122"/>
                 <a:cs typeface="Arial" pitchFamily="34" charset="-120"/>
               </a:rPr>
-              <a:t>Alarma: te habría avisado en cuanto la métrica cruzó el umbral.</a:t>
+              <a:t>¿Predice un</a:t>
             </a:r>
-            <a:endParaRPr lang="en-US" sz="2400" dirty="0"/>
-          </a:p>
-          <a:p>
-            <a:pPr marL="342900" indent="-342900">
-              <a:spcAft>
-                <a:spcPts val="800"/>
-              </a:spcAft>
-              <a:buSzPct val="100000"/>
-              <a:buChar char="•"/>
+            <a:endParaRPr lang="en-US" sz="1500" dirty="0"/>
+          </a:p>
+          <a:p>
+            <a:pPr marL="0" indent="0" algn="ctr">
+              <a:buNone/>
             </a:pPr>
             <a:r>
-              <a:rPr lang="en-US" sz="2400" dirty="0">
+              <a:rPr lang="en-US" sz="1500" dirty="0">
                 <a:solidFill>
                   <a:srgbClr val="212121"/>
                 </a:solidFill>
@@ -4525,20 +4811,307 @@
                 <a:ea typeface="Arial" pitchFamily="34" charset="-122"/>
                 <a:cs typeface="Arial" pitchFamily="34" charset="-120"/>
               </a:rPr>
-              <a:t>Evento: el grupo de escalado ha terminado esa instancia y lanzado otra.</a:t>
+              <a:t>problema real?</a:t>
             </a:r>
-            <a:endParaRPr lang="en-US" sz="2400" dirty="0"/>
-          </a:p>
-          <a:p>
-            <a:pPr marL="342900" indent="-342900">
-              <a:spcAft>
-                <a:spcPts val="800"/>
-              </a:spcAft>
-              <a:buSzPct val="100000"/>
-              <a:buChar char="•"/>
+            <a:endParaRPr lang="en-US" sz="1500" dirty="0"/>
+          </a:p>
+        </p:txBody>
+      </p:sp>
+      <p:sp>
+        <p:nvSpPr>
+          <p:cNvPr id="11" name="Text 9"/>
+          <p:cNvSpPr/>
+          <p:nvPr/>
+        </p:nvSpPr>
+        <p:spPr>
+          <a:xfrm>
+            <a:off x="4722876" y="2468880"/>
+            <a:ext cx="2743200" cy="822960"/>
+          </a:xfrm>
+          <a:prstGeom prst="rect">
+            <a:avLst/>
+          </a:prstGeom>
+          <a:noFill/>
+          <a:ln/>
+        </p:spPr>
+        <p:txBody>
+          <a:bodyPr wrap="square" rtlCol="0" anchor="ctr"/>
+          <a:lstStyle/>
+          <a:p>
+            <a:pPr marL="0" indent="0" algn="ctr">
+              <a:buNone/>
             </a:pPr>
             <a:r>
-              <a:rPr lang="en-US" sz="2400" dirty="0">
+              <a:rPr lang="en-US" sz="1300" b="1" i="1" dirty="0">
+                <a:solidFill>
+                  <a:srgbClr val="3949AB"/>
+                </a:solidFill>
+                <a:latin typeface="Arial" pitchFamily="34" charset="0"/>
+                <a:ea typeface="Arial" pitchFamily="34" charset="-122"/>
+                <a:cs typeface="Arial" pitchFamily="34" charset="-120"/>
+              </a:rPr>
+              <a:t>filtra →</a:t>
+            </a:r>
+            <a:endParaRPr lang="en-US" sz="1300" dirty="0"/>
+          </a:p>
+        </p:txBody>
+      </p:sp>
+      <p:sp>
+        <p:nvSpPr>
+          <p:cNvPr id="12" name="Shape 10"/>
+          <p:cNvSpPr/>
+          <p:nvPr/>
+        </p:nvSpPr>
+        <p:spPr>
+          <a:xfrm>
+            <a:off x="548640" y="3566160"/>
+            <a:ext cx="5362956" cy="822960"/>
+          </a:xfrm>
+          <a:prstGeom prst="roundRect">
+            <a:avLst/>
+          </a:prstGeom>
+          <a:solidFill>
+            <a:srgbClr val="FFF8E1"/>
+          </a:solidFill>
+          <a:ln w="25400">
+            <a:solidFill>
+              <a:srgbClr val="FFA000"/>
+            </a:solidFill>
+            <a:prstDash val="solid"/>
+          </a:ln>
+        </p:spPr>
+        <p:txBody>
+          <a:bodyPr/>
+          <a:lstStyle/>
+          <a:p>
+            <a:endParaRPr lang="es-ES"/>
+          </a:p>
+        </p:txBody>
+      </p:sp>
+      <p:sp>
+        <p:nvSpPr>
+          <p:cNvPr id="13" name="Text 11"/>
+          <p:cNvSpPr/>
+          <p:nvPr/>
+        </p:nvSpPr>
+        <p:spPr>
+          <a:xfrm>
+            <a:off x="685800" y="3657600"/>
+            <a:ext cx="5088636" cy="548640"/>
+          </a:xfrm>
+          <a:prstGeom prst="rect">
+            <a:avLst/>
+          </a:prstGeom>
+          <a:noFill/>
+          <a:ln/>
+        </p:spPr>
+        <p:txBody>
+          <a:bodyPr wrap="square" rtlCol="0" anchor="ctr"/>
+          <a:lstStyle/>
+          <a:p>
+            <a:pPr marL="0" indent="0" algn="ctr">
+              <a:buNone/>
+            </a:pPr>
+            <a:r>
+              <a:rPr lang="en-US" sz="1600" b="1" dirty="0">
+                <a:solidFill>
+                  <a:srgbClr val="1A237E"/>
+                </a:solidFill>
+                <a:latin typeface="Arial" pitchFamily="34" charset="0"/>
+                <a:ea typeface="Arial" pitchFamily="34" charset="-122"/>
+                <a:cs typeface="Arial" pitchFamily="34" charset="-120"/>
+              </a:rPr>
+              <a:t>Sí → Alarma útil</a:t>
+            </a:r>
+            <a:endParaRPr lang="en-US" sz="1600" dirty="0"/>
+          </a:p>
+        </p:txBody>
+      </p:sp>
+      <p:sp>
+        <p:nvSpPr>
+          <p:cNvPr id="14" name="Text 12"/>
+          <p:cNvSpPr/>
+          <p:nvPr/>
+        </p:nvSpPr>
+        <p:spPr>
+          <a:xfrm>
+            <a:off x="731520" y="4251960"/>
+            <a:ext cx="4997196" cy="45720"/>
+          </a:xfrm>
+          <a:prstGeom prst="rect">
+            <a:avLst/>
+          </a:prstGeom>
+          <a:noFill/>
+          <a:ln/>
+        </p:spPr>
+        <p:txBody>
+          <a:bodyPr wrap="square" rtlCol="0" anchor="t"/>
+          <a:lstStyle/>
+          <a:p>
+            <a:pPr marL="0" indent="0" algn="ctr">
+              <a:buNone/>
+            </a:pPr>
+            <a:endParaRPr lang="en-US" sz="100" dirty="0"/>
+          </a:p>
+        </p:txBody>
+      </p:sp>
+      <p:sp>
+        <p:nvSpPr>
+          <p:cNvPr id="15" name="Shape 13"/>
+          <p:cNvSpPr/>
+          <p:nvPr/>
+        </p:nvSpPr>
+        <p:spPr>
+          <a:xfrm>
+            <a:off x="6277356" y="3566160"/>
+            <a:ext cx="5362956" cy="822960"/>
+          </a:xfrm>
+          <a:prstGeom prst="roundRect">
+            <a:avLst/>
+          </a:prstGeom>
+          <a:solidFill>
+            <a:srgbClr val="E8EAF6"/>
+          </a:solidFill>
+          <a:ln w="15875">
+            <a:solidFill>
+              <a:srgbClr val="3949AB"/>
+            </a:solidFill>
+            <a:prstDash val="solid"/>
+          </a:ln>
+        </p:spPr>
+        <p:txBody>
+          <a:bodyPr/>
+          <a:lstStyle/>
+          <a:p>
+            <a:endParaRPr lang="es-ES"/>
+          </a:p>
+        </p:txBody>
+      </p:sp>
+      <p:sp>
+        <p:nvSpPr>
+          <p:cNvPr id="16" name="Text 14"/>
+          <p:cNvSpPr/>
+          <p:nvPr/>
+        </p:nvSpPr>
+        <p:spPr>
+          <a:xfrm>
+            <a:off x="6414516" y="3657600"/>
+            <a:ext cx="5088636" cy="548640"/>
+          </a:xfrm>
+          <a:prstGeom prst="rect">
+            <a:avLst/>
+          </a:prstGeom>
+          <a:noFill/>
+          <a:ln/>
+        </p:spPr>
+        <p:txBody>
+          <a:bodyPr wrap="square" rtlCol="0" anchor="ctr"/>
+          <a:lstStyle/>
+          <a:p>
+            <a:pPr marL="0" indent="0" algn="ctr">
+              <a:buNone/>
+            </a:pPr>
+            <a:r>
+              <a:rPr lang="en-US" sz="1600" b="1" dirty="0">
+                <a:solidFill>
+                  <a:srgbClr val="1A237E"/>
+                </a:solidFill>
+                <a:latin typeface="Arial" pitchFamily="34" charset="0"/>
+                <a:ea typeface="Arial" pitchFamily="34" charset="-122"/>
+                <a:cs typeface="Arial" pitchFamily="34" charset="-120"/>
+              </a:rPr>
+              <a:t>No → Ruido, descartar</a:t>
+            </a:r>
+            <a:endParaRPr lang="en-US" sz="1600" dirty="0"/>
+          </a:p>
+        </p:txBody>
+      </p:sp>
+      <p:sp>
+        <p:nvSpPr>
+          <p:cNvPr id="17" name="Text 15"/>
+          <p:cNvSpPr/>
+          <p:nvPr/>
+        </p:nvSpPr>
+        <p:spPr>
+          <a:xfrm>
+            <a:off x="6460236" y="4251960"/>
+            <a:ext cx="4997196" cy="45720"/>
+          </a:xfrm>
+          <a:prstGeom prst="rect">
+            <a:avLst/>
+          </a:prstGeom>
+          <a:noFill/>
+          <a:ln/>
+        </p:spPr>
+        <p:txBody>
+          <a:bodyPr wrap="square" rtlCol="0" anchor="t"/>
+          <a:lstStyle/>
+          <a:p>
+            <a:pPr marL="0" indent="0" algn="ctr">
+              <a:buNone/>
+            </a:pPr>
+            <a:endParaRPr lang="en-US" sz="100" dirty="0"/>
+          </a:p>
+        </p:txBody>
+      </p:sp>
+      <p:sp>
+        <p:nvSpPr>
+          <p:cNvPr id="18" name="Shape 16"/>
+          <p:cNvSpPr/>
+          <p:nvPr/>
+        </p:nvSpPr>
+        <p:spPr>
+          <a:xfrm>
+            <a:off x="548640" y="4754880"/>
+            <a:ext cx="11091672" cy="1005840"/>
+          </a:xfrm>
+          <a:prstGeom prst="roundRect">
+            <a:avLst/>
+          </a:prstGeom>
+          <a:solidFill>
+            <a:srgbClr val="FFF8E1"/>
+          </a:solidFill>
+          <a:ln w="19050">
+            <a:solidFill>
+              <a:srgbClr val="FFA000"/>
+            </a:solidFill>
+            <a:prstDash val="solid"/>
+          </a:ln>
+        </p:spPr>
+        <p:txBody>
+          <a:bodyPr/>
+          <a:lstStyle/>
+          <a:p>
+            <a:endParaRPr lang="es-ES"/>
+          </a:p>
+        </p:txBody>
+      </p:sp>
+      <p:sp>
+        <p:nvSpPr>
+          <p:cNvPr id="19" name="Text 17"/>
+          <p:cNvSpPr/>
+          <p:nvPr/>
+        </p:nvSpPr>
+        <p:spPr>
+          <a:xfrm>
+            <a:off x="822960" y="4846320"/>
+            <a:ext cx="10543032" cy="822960"/>
+          </a:xfrm>
+          <a:prstGeom prst="rect">
+            <a:avLst/>
+          </a:prstGeom>
+          <a:noFill/>
+          <a:ln/>
+        </p:spPr>
+        <p:txBody>
+          <a:bodyPr wrap="square" rtlCol="0" anchor="ctr"/>
+          <a:lstStyle/>
+          <a:p>
+            <a:pPr marL="0" indent="0">
+              <a:buNone/>
+            </a:pPr>
+            <a:r>
+              <a:rPr lang="en-US" sz="1450" dirty="0">
                 <a:solidFill>
                   <a:srgbClr val="212121"/>
                 </a:solidFill>
@@ -4546,52 +5119,9 @@
                 <a:ea typeface="Arial" pitchFamily="34" charset="-122"/>
                 <a:cs typeface="Arial" pitchFamily="34" charset="-120"/>
               </a:rPr>
-              <a:t>Auditoría: confirma que nadie ha tocado nada manualmente — el sistema ha reaccionado solo</a:t>
+              <a:t>Vas a diseñar tres alarmas útiles en la Actividad 5.1, no veinte. Un dashboard de CloudWatch agrupa las métricas que consultas a menudo en una sola pantalla.</a:t>
             </a:r>
-            <a:r>
-              <a:rPr lang="en-US" sz="1800" dirty="0">
-                <a:solidFill>
-                  <a:srgbClr val="212121"/>
-                </a:solidFill>
-                <a:latin typeface="Arial" pitchFamily="34" charset="0"/>
-                <a:ea typeface="Arial" pitchFamily="34" charset="-122"/>
-                <a:cs typeface="Arial" pitchFamily="34" charset="-120"/>
-              </a:rPr>
-              <a:t>.</a:t>
-            </a:r>
-            <a:endParaRPr lang="en-US" sz="1800" dirty="0"/>
-          </a:p>
-        </p:txBody>
-      </p:sp>
-      <p:sp>
-        <p:nvSpPr>
-          <p:cNvPr id="7" name="CuadroTexto 6">
-            <a:extLst>
-              <a:ext uri="{FF2B5EF4-FFF2-40B4-BE49-F238E27FC236}">
-                <a16:creationId xmlns:a16="http://schemas.microsoft.com/office/drawing/2014/main" id="{0962BDE8-C03B-8352-9824-73F1EE45EBA1}"/>
-              </a:ext>
-            </a:extLst>
-          </p:cNvPr>
-          <p:cNvSpPr txBox="1"/>
-          <p:nvPr/>
-        </p:nvSpPr>
-        <p:spPr>
-          <a:xfrm>
-            <a:off x="10692882" y="3573624"/>
-            <a:ext cx="184731" cy="369332"/>
-          </a:xfrm>
-          <a:prstGeom prst="rect">
-            <a:avLst/>
-          </a:prstGeom>
-          <a:noFill/>
-        </p:spPr>
-        <p:txBody>
-          <a:bodyPr wrap="none" rtlCol="0">
-            <a:spAutoFit/>
-          </a:bodyPr>
-          <a:lstStyle/>
-          <a:p>
-            <a:endParaRPr lang="es-ES" dirty="0"/>
+            <a:endParaRPr lang="en-US" sz="1450" dirty="0"/>
           </a:p>
         </p:txBody>
       </p:sp>
@@ -4685,7 +5215,7 @@
                 <a:ea typeface="Arial" pitchFamily="34" charset="-122"/>
                 <a:cs typeface="Arial" pitchFamily="34" charset="-120"/>
               </a:rPr>
-              <a:t>Qué se monitoriza de verdad y qué es ruido</a:t>
+              <a:t>Capa a capa: cada una falla de forma distinta</a:t>
             </a:r>
             <a:endParaRPr lang="en-US" sz="2400" dirty="0"/>
           </a:p>
@@ -4738,8 +5268,8 @@
         </p:nvSpPr>
         <p:spPr>
           <a:xfrm>
-            <a:off x="1071154" y="2403566"/>
-            <a:ext cx="4340601" cy="2774924"/>
+            <a:off x="548640" y="1143000"/>
+            <a:ext cx="11091672" cy="365760"/>
           </a:xfrm>
           <a:prstGeom prst="rect">
             <a:avLst/>
@@ -4748,14 +5278,85 @@
           <a:ln/>
         </p:spPr>
         <p:txBody>
-          <a:bodyPr wrap="square" rtlCol="0" anchor="t"/>
+          <a:bodyPr wrap="square" rtlCol="0" anchor="ctr"/>
           <a:lstStyle/>
           <a:p>
             <a:pPr marL="0" indent="0">
               <a:buNone/>
             </a:pPr>
             <a:r>
-              <a:rPr lang="en-US" sz="2400" dirty="0">
+              <a:rPr lang="en-US" sz="1500" b="1" dirty="0">
+                <a:solidFill>
+                  <a:srgbClr val="3949AB"/>
+                </a:solidFill>
+                <a:latin typeface="Arial" pitchFamily="34" charset="0"/>
+                <a:ea typeface="Arial" pitchFamily="34" charset="-122"/>
+                <a:cs typeface="Arial" pitchFamily="34" charset="-120"/>
+              </a:rPr>
+              <a:t>Diagnosticar rápido es saber, según el síntoma, en qué capa mirar primero</a:t>
+            </a:r>
+            <a:endParaRPr lang="en-US" sz="1500" dirty="0"/>
+          </a:p>
+        </p:txBody>
+      </p:sp>
+      <p:sp>
+        <p:nvSpPr>
+          <p:cNvPr id="6" name="Shape 4"/>
+          <p:cNvSpPr/>
+          <p:nvPr/>
+        </p:nvSpPr>
+        <p:spPr>
+          <a:xfrm>
+            <a:off x="548640" y="1554480"/>
+            <a:ext cx="3483864" cy="1005840"/>
+          </a:xfrm>
+          <a:prstGeom prst="roundRect">
+            <a:avLst/>
+          </a:prstGeom>
+          <a:solidFill>
+            <a:srgbClr val="E8EAF6"/>
+          </a:solidFill>
+          <a:ln w="15875">
+            <a:solidFill>
+              <a:srgbClr val="3949AB"/>
+            </a:solidFill>
+            <a:prstDash val="solid"/>
+          </a:ln>
+        </p:spPr>
+        <p:txBody>
+          <a:bodyPr/>
+          <a:lstStyle/>
+          <a:p>
+            <a:endParaRPr lang="es-ES"/>
+          </a:p>
+        </p:txBody>
+      </p:sp>
+      <p:sp>
+        <p:nvSpPr>
+          <p:cNvPr id="7" name="Text 5"/>
+          <p:cNvSpPr/>
+          <p:nvPr/>
+        </p:nvSpPr>
+        <p:spPr>
+          <a:xfrm>
+            <a:off x="594360" y="1600200"/>
+            <a:ext cx="3392424" cy="914400"/>
+          </a:xfrm>
+          <a:prstGeom prst="rect">
+            <a:avLst/>
+          </a:prstGeom>
+          <a:noFill/>
+          <a:ln/>
+        </p:spPr>
+        <p:txBody>
+          <a:bodyPr wrap="square" rtlCol="0" anchor="ctr"/>
+          <a:lstStyle/>
+          <a:p>
+            <a:pPr marL="0" indent="0" algn="ctr">
+              <a:buNone/>
+            </a:pPr>
+            <a:r>
+              <a:rPr lang="en-US" sz="1400" dirty="0">
                 <a:solidFill>
                   <a:srgbClr val="212121"/>
                 </a:solidFill>
@@ -4763,36 +5364,425 @@
                 <a:ea typeface="Arial" pitchFamily="34" charset="-122"/>
                 <a:cs typeface="Arial" pitchFamily="34" charset="-120"/>
               </a:rPr>
-              <a:t>Monitorizar todo sin criterio produce tanto ruido que dejas de prestar atención a las alarmas de verdad — como un detector de humos tan sensible que salta con el vapor de la ducha.</a:t>
+              <a:t>🌐 Borde</a:t>
             </a:r>
-            <a:endParaRPr lang="en-US" sz="2400" dirty="0"/>
-          </a:p>
-        </p:txBody>
-      </p:sp>
-      <p:pic>
-        <p:nvPicPr>
-          <p:cNvPr id="6" name="Image 0" descr="C:/Users/Aitor/docxgen/img/inu_t5_filtro_alarma.png"/>
-          <p:cNvPicPr>
-            <a:picLocks noChangeAspect="1"/>
-          </p:cNvPicPr>
-          <p:nvPr/>
-        </p:nvPicPr>
-        <p:blipFill>
-          <a:blip r:embed="rId3"/>
-          <a:stretch>
-            <a:fillRect/>
-          </a:stretch>
-        </p:blipFill>
-        <p:spPr>
-          <a:xfrm>
-            <a:off x="5291799" y="1097280"/>
-            <a:ext cx="4747940" cy="5143602"/>
+            <a:endParaRPr lang="en-US" sz="1400" dirty="0"/>
+          </a:p>
+          <a:p>
+            <a:pPr marL="0" indent="0" algn="ctr">
+              <a:buNone/>
+            </a:pPr>
+            <a:r>
+              <a:rPr lang="en-US" sz="1400" dirty="0">
+                <a:solidFill>
+                  <a:srgbClr val="212121"/>
+                </a:solidFill>
+                <a:latin typeface="Arial" pitchFamily="34" charset="0"/>
+                <a:ea typeface="Arial" pitchFamily="34" charset="-122"/>
+                <a:cs typeface="Arial" pitchFamily="34" charset="-120"/>
+              </a:rPr>
+              <a:t>errores 5xx, latencia</a:t>
+            </a:r>
+            <a:endParaRPr lang="en-US" sz="1400" dirty="0"/>
+          </a:p>
+        </p:txBody>
+      </p:sp>
+      <p:sp>
+        <p:nvSpPr>
+          <p:cNvPr id="8" name="Text 6"/>
+          <p:cNvSpPr/>
+          <p:nvPr/>
+        </p:nvSpPr>
+        <p:spPr>
+          <a:xfrm>
+            <a:off x="3986784" y="1554480"/>
+            <a:ext cx="411480" cy="1005840"/>
           </a:xfrm>
           <a:prstGeom prst="rect">
             <a:avLst/>
           </a:prstGeom>
-        </p:spPr>
-      </p:pic>
+          <a:noFill/>
+          <a:ln/>
+        </p:spPr>
+        <p:txBody>
+          <a:bodyPr wrap="square" rtlCol="0" anchor="ctr"/>
+          <a:lstStyle/>
+          <a:p>
+            <a:pPr marL="0" indent="0" algn="ctr">
+              <a:buNone/>
+            </a:pPr>
+            <a:r>
+              <a:rPr lang="en-US" sz="1800" b="1" dirty="0">
+                <a:solidFill>
+                  <a:srgbClr val="3949AB"/>
+                </a:solidFill>
+                <a:latin typeface="Arial" pitchFamily="34" charset="0"/>
+                <a:ea typeface="Arial" pitchFamily="34" charset="-122"/>
+                <a:cs typeface="Arial" pitchFamily="34" charset="-120"/>
+              </a:rPr>
+              <a:t>→</a:t>
+            </a:r>
+            <a:endParaRPr lang="en-US" sz="1800" dirty="0"/>
+          </a:p>
+        </p:txBody>
+      </p:sp>
+      <p:sp>
+        <p:nvSpPr>
+          <p:cNvPr id="9" name="Shape 7"/>
+          <p:cNvSpPr/>
+          <p:nvPr/>
+        </p:nvSpPr>
+        <p:spPr>
+          <a:xfrm>
+            <a:off x="4352544" y="1554480"/>
+            <a:ext cx="3483864" cy="1005840"/>
+          </a:xfrm>
+          <a:prstGeom prst="roundRect">
+            <a:avLst/>
+          </a:prstGeom>
+          <a:solidFill>
+            <a:srgbClr val="E8EAF6"/>
+          </a:solidFill>
+          <a:ln w="15875">
+            <a:solidFill>
+              <a:srgbClr val="3949AB"/>
+            </a:solidFill>
+            <a:prstDash val="solid"/>
+          </a:ln>
+        </p:spPr>
+        <p:txBody>
+          <a:bodyPr/>
+          <a:lstStyle/>
+          <a:p>
+            <a:endParaRPr lang="es-ES"/>
+          </a:p>
+        </p:txBody>
+      </p:sp>
+      <p:sp>
+        <p:nvSpPr>
+          <p:cNvPr id="10" name="Text 8"/>
+          <p:cNvSpPr/>
+          <p:nvPr/>
+        </p:nvSpPr>
+        <p:spPr>
+          <a:xfrm>
+            <a:off x="4398264" y="1600200"/>
+            <a:ext cx="3392424" cy="914400"/>
+          </a:xfrm>
+          <a:prstGeom prst="rect">
+            <a:avLst/>
+          </a:prstGeom>
+          <a:noFill/>
+          <a:ln/>
+        </p:spPr>
+        <p:txBody>
+          <a:bodyPr wrap="square" rtlCol="0" anchor="ctr"/>
+          <a:lstStyle/>
+          <a:p>
+            <a:pPr marL="0" indent="0" algn="ctr">
+              <a:buNone/>
+            </a:pPr>
+            <a:r>
+              <a:rPr lang="en-US" sz="1400" dirty="0">
+                <a:solidFill>
+                  <a:srgbClr val="212121"/>
+                </a:solidFill>
+                <a:latin typeface="Arial" pitchFamily="34" charset="0"/>
+                <a:ea typeface="Arial" pitchFamily="34" charset="-122"/>
+                <a:cs typeface="Arial" pitchFamily="34" charset="-120"/>
+              </a:rPr>
+              <a:t>⚙️ Aplicación</a:t>
+            </a:r>
+            <a:endParaRPr lang="en-US" sz="1400" dirty="0"/>
+          </a:p>
+          <a:p>
+            <a:pPr marL="0" indent="0" algn="ctr">
+              <a:buNone/>
+            </a:pPr>
+            <a:r>
+              <a:rPr lang="en-US" sz="1400" dirty="0">
+                <a:solidFill>
+                  <a:srgbClr val="212121"/>
+                </a:solidFill>
+                <a:latin typeface="Arial" pitchFamily="34" charset="0"/>
+                <a:ea typeface="Arial" pitchFamily="34" charset="-122"/>
+                <a:cs typeface="Arial" pitchFamily="34" charset="-120"/>
+              </a:rPr>
+              <a:t>CPU, memoria, registros</a:t>
+            </a:r>
+            <a:endParaRPr lang="en-US" sz="1400" dirty="0"/>
+          </a:p>
+        </p:txBody>
+      </p:sp>
+      <p:sp>
+        <p:nvSpPr>
+          <p:cNvPr id="11" name="Text 9"/>
+          <p:cNvSpPr/>
+          <p:nvPr/>
+        </p:nvSpPr>
+        <p:spPr>
+          <a:xfrm>
+            <a:off x="7790688" y="1554480"/>
+            <a:ext cx="411480" cy="1005840"/>
+          </a:xfrm>
+          <a:prstGeom prst="rect">
+            <a:avLst/>
+          </a:prstGeom>
+          <a:noFill/>
+          <a:ln/>
+        </p:spPr>
+        <p:txBody>
+          <a:bodyPr wrap="square" rtlCol="0" anchor="ctr"/>
+          <a:lstStyle/>
+          <a:p>
+            <a:pPr marL="0" indent="0" algn="ctr">
+              <a:buNone/>
+            </a:pPr>
+            <a:r>
+              <a:rPr lang="en-US" sz="1800" b="1" dirty="0">
+                <a:solidFill>
+                  <a:srgbClr val="3949AB"/>
+                </a:solidFill>
+                <a:latin typeface="Arial" pitchFamily="34" charset="0"/>
+                <a:ea typeface="Arial" pitchFamily="34" charset="-122"/>
+                <a:cs typeface="Arial" pitchFamily="34" charset="-120"/>
+              </a:rPr>
+              <a:t>→</a:t>
+            </a:r>
+            <a:endParaRPr lang="en-US" sz="1800" dirty="0"/>
+          </a:p>
+        </p:txBody>
+      </p:sp>
+      <p:sp>
+        <p:nvSpPr>
+          <p:cNvPr id="12" name="Shape 10"/>
+          <p:cNvSpPr/>
+          <p:nvPr/>
+        </p:nvSpPr>
+        <p:spPr>
+          <a:xfrm>
+            <a:off x="8156448" y="1554480"/>
+            <a:ext cx="3483864" cy="1005840"/>
+          </a:xfrm>
+          <a:prstGeom prst="roundRect">
+            <a:avLst/>
+          </a:prstGeom>
+          <a:solidFill>
+            <a:srgbClr val="E8EAF6"/>
+          </a:solidFill>
+          <a:ln w="15875">
+            <a:solidFill>
+              <a:srgbClr val="3949AB"/>
+            </a:solidFill>
+            <a:prstDash val="solid"/>
+          </a:ln>
+        </p:spPr>
+        <p:txBody>
+          <a:bodyPr/>
+          <a:lstStyle/>
+          <a:p>
+            <a:endParaRPr lang="es-ES"/>
+          </a:p>
+        </p:txBody>
+      </p:sp>
+      <p:sp>
+        <p:nvSpPr>
+          <p:cNvPr id="13" name="Text 11"/>
+          <p:cNvSpPr/>
+          <p:nvPr/>
+        </p:nvSpPr>
+        <p:spPr>
+          <a:xfrm>
+            <a:off x="8202168" y="1600200"/>
+            <a:ext cx="3392424" cy="914400"/>
+          </a:xfrm>
+          <a:prstGeom prst="rect">
+            <a:avLst/>
+          </a:prstGeom>
+          <a:noFill/>
+          <a:ln/>
+        </p:spPr>
+        <p:txBody>
+          <a:bodyPr wrap="square" rtlCol="0" anchor="ctr"/>
+          <a:lstStyle/>
+          <a:p>
+            <a:pPr marL="0" indent="0" algn="ctr">
+              <a:buNone/>
+            </a:pPr>
+            <a:r>
+              <a:rPr lang="en-US" sz="1400" dirty="0">
+                <a:solidFill>
+                  <a:srgbClr val="212121"/>
+                </a:solidFill>
+                <a:latin typeface="Arial" pitchFamily="34" charset="0"/>
+                <a:ea typeface="Arial" pitchFamily="34" charset="-122"/>
+                <a:cs typeface="Arial" pitchFamily="34" charset="-120"/>
+              </a:rPr>
+              <a:t>🗄️ Datos</a:t>
+            </a:r>
+            <a:endParaRPr lang="en-US" sz="1400" dirty="0"/>
+          </a:p>
+          <a:p>
+            <a:pPr marL="0" indent="0" algn="ctr">
+              <a:buNone/>
+            </a:pPr>
+            <a:r>
+              <a:rPr lang="en-US" sz="1400" dirty="0">
+                <a:solidFill>
+                  <a:srgbClr val="212121"/>
+                </a:solidFill>
+                <a:latin typeface="Arial" pitchFamily="34" charset="0"/>
+                <a:ea typeface="Arial" pitchFamily="34" charset="-122"/>
+                <a:cs typeface="Arial" pitchFamily="34" charset="-120"/>
+              </a:rPr>
+              <a:t>conexiones, espacio en disco</a:t>
+            </a:r>
+            <a:endParaRPr lang="en-US" sz="1400" dirty="0"/>
+          </a:p>
+        </p:txBody>
+      </p:sp>
+      <p:sp>
+        <p:nvSpPr>
+          <p:cNvPr id="14" name="Shape 12"/>
+          <p:cNvSpPr/>
+          <p:nvPr/>
+        </p:nvSpPr>
+        <p:spPr>
+          <a:xfrm>
+            <a:off x="548640" y="2834640"/>
+            <a:ext cx="11091672" cy="1005840"/>
+          </a:xfrm>
+          <a:prstGeom prst="roundRect">
+            <a:avLst/>
+          </a:prstGeom>
+          <a:solidFill>
+            <a:srgbClr val="FFF8E1"/>
+          </a:solidFill>
+          <a:ln w="19050">
+            <a:solidFill>
+              <a:srgbClr val="FFA000"/>
+            </a:solidFill>
+            <a:prstDash val="solid"/>
+          </a:ln>
+        </p:spPr>
+        <p:txBody>
+          <a:bodyPr/>
+          <a:lstStyle/>
+          <a:p>
+            <a:endParaRPr lang="es-ES"/>
+          </a:p>
+        </p:txBody>
+      </p:sp>
+      <p:sp>
+        <p:nvSpPr>
+          <p:cNvPr id="15" name="Text 13"/>
+          <p:cNvSpPr/>
+          <p:nvPr/>
+        </p:nvSpPr>
+        <p:spPr>
+          <a:xfrm>
+            <a:off x="822960" y="2926080"/>
+            <a:ext cx="10543032" cy="822960"/>
+          </a:xfrm>
+          <a:prstGeom prst="rect">
+            <a:avLst/>
+          </a:prstGeom>
+          <a:noFill/>
+          <a:ln/>
+        </p:spPr>
+        <p:txBody>
+          <a:bodyPr wrap="square" rtlCol="0" anchor="ctr"/>
+          <a:lstStyle/>
+          <a:p>
+            <a:pPr marL="0" indent="0">
+              <a:buNone/>
+            </a:pPr>
+            <a:r>
+              <a:rPr lang="en-US" sz="1500" dirty="0">
+                <a:solidFill>
+                  <a:srgbClr val="212121"/>
+                </a:solidFill>
+                <a:latin typeface="Arial" pitchFamily="34" charset="0"/>
+                <a:ea typeface="Arial" pitchFamily="34" charset="-122"/>
+                <a:cs typeface="Arial" pitchFamily="34" charset="-120"/>
+              </a:rPr>
+              <a:t>Cada respuesta HTTP lleva un código de tres cifras: los que empiezan por 2 son éxito, por 4 error del cliente, y por 5 —los errores 5xx— error del propio servidor.</a:t>
+            </a:r>
+            <a:endParaRPr lang="en-US" sz="1500" dirty="0"/>
+          </a:p>
+        </p:txBody>
+      </p:sp>
+      <p:sp>
+        <p:nvSpPr>
+          <p:cNvPr id="16" name="Shape 14"/>
+          <p:cNvSpPr/>
+          <p:nvPr/>
+        </p:nvSpPr>
+        <p:spPr>
+          <a:xfrm>
+            <a:off x="548640" y="4114800"/>
+            <a:ext cx="11091672" cy="731520"/>
+          </a:xfrm>
+          <a:prstGeom prst="roundRect">
+            <a:avLst/>
+          </a:prstGeom>
+          <a:solidFill>
+            <a:srgbClr val="FFF8E1"/>
+          </a:solidFill>
+          <a:ln w="19050">
+            <a:solidFill>
+              <a:srgbClr val="FFA000"/>
+            </a:solidFill>
+            <a:prstDash val="solid"/>
+          </a:ln>
+        </p:spPr>
+        <p:txBody>
+          <a:bodyPr/>
+          <a:lstStyle/>
+          <a:p>
+            <a:endParaRPr lang="es-ES"/>
+          </a:p>
+        </p:txBody>
+      </p:sp>
+      <p:sp>
+        <p:nvSpPr>
+          <p:cNvPr id="17" name="Text 15"/>
+          <p:cNvSpPr/>
+          <p:nvPr/>
+        </p:nvSpPr>
+        <p:spPr>
+          <a:xfrm>
+            <a:off x="822960" y="4206240"/>
+            <a:ext cx="10543032" cy="548640"/>
+          </a:xfrm>
+          <a:prstGeom prst="rect">
+            <a:avLst/>
+          </a:prstGeom>
+          <a:noFill/>
+          <a:ln/>
+        </p:spPr>
+        <p:txBody>
+          <a:bodyPr wrap="square" rtlCol="0" anchor="ctr"/>
+          <a:lstStyle/>
+          <a:p>
+            <a:pPr marL="0" indent="0">
+              <a:buNone/>
+            </a:pPr>
+            <a:r>
+              <a:rPr lang="en-US" sz="1500" dirty="0">
+                <a:solidFill>
+                  <a:srgbClr val="212121"/>
+                </a:solidFill>
+                <a:latin typeface="Arial" pitchFamily="34" charset="0"/>
+                <a:ea typeface="Arial" pitchFamily="34" charset="-122"/>
+                <a:cs typeface="Arial" pitchFamily="34" charset="-120"/>
+              </a:rPr>
+              <a:t>El mismo principio de «fuera hacia dentro» que ya has aplicado con las averías de red del Tema 2.</a:t>
+            </a:r>
+            <a:endParaRPr lang="en-US" sz="1500" dirty="0"/>
+          </a:p>
+        </p:txBody>
+      </p:sp>
     </p:spTree>
   </p:cSld>
   <p:clrMapOvr>
@@ -4883,7 +5873,7 @@
                 <a:ea typeface="Arial" pitchFamily="34" charset="-122"/>
                 <a:cs typeface="Arial" pitchFamily="34" charset="-120"/>
               </a:rPr>
-              <a:t>Dashboard: todas las métricas en un mismo golpe de vista</a:t>
+              <a:t>Cómo se diagnostica sin acceso al servidor</a:t>
             </a:r>
             <a:endParaRPr lang="en-US" sz="2400" dirty="0"/>
           </a:p>
@@ -4936,8 +5926,8 @@
         </p:nvSpPr>
         <p:spPr>
           <a:xfrm>
-            <a:off x="548640" y="1920240"/>
-            <a:ext cx="11091672" cy="1737360"/>
+            <a:off x="548640" y="1143000"/>
+            <a:ext cx="11091672" cy="914400"/>
           </a:xfrm>
           <a:prstGeom prst="roundRect">
             <a:avLst/>
@@ -4968,8 +5958,8 @@
         </p:nvSpPr>
         <p:spPr>
           <a:xfrm>
-            <a:off x="822960" y="2011680"/>
-            <a:ext cx="10543032" cy="1554480"/>
+            <a:off x="822960" y="1234440"/>
+            <a:ext cx="10543032" cy="731520"/>
           </a:xfrm>
           <a:prstGeom prst="rect">
             <a:avLst/>
@@ -4985,7 +5975,7 @@
               <a:buNone/>
             </a:pPr>
             <a:r>
-              <a:rPr lang="en-US" sz="2100" dirty="0">
+              <a:rPr lang="en-US" sz="1450" dirty="0">
                 <a:solidFill>
                   <a:srgbClr val="212121"/>
                 </a:solidFill>
@@ -4993,22 +5983,811 @@
                 <a:ea typeface="Arial" pitchFamily="34" charset="-122"/>
                 <a:cs typeface="Arial" pitchFamily="34" charset="-120"/>
               </a:rPr>
-              <a:t>Para no ir métrica por métrica cada vez que diagnosticas algo, CloudWatch permite agrupar varias en una sola pantalla: un dashboard, con las gráficas que de verdad consultas a menudo ya montadas una junto a otra.</a:t>
+              <a:t>La instancia que fallaba puede haber sido terminada y reemplazada antes de que te conectes — el diagnóstico se apoya en lo ya registrado, no en lo que observes en directo.</a:t>
             </a:r>
-            <a:endParaRPr lang="en-US" sz="2100" dirty="0"/>
-          </a:p>
-        </p:txBody>
-      </p:sp>
-      <p:sp>
-        <p:nvSpPr>
-          <p:cNvPr id="7" name="Text 5"/>
-          <p:cNvSpPr/>
-          <p:nvPr/>
-        </p:nvSpPr>
-        <p:spPr>
-          <a:xfrm>
-            <a:off x="548640" y="3977640"/>
-            <a:ext cx="11091672" cy="822960"/>
+            <a:endParaRPr lang="en-US" sz="1450" dirty="0"/>
+          </a:p>
+        </p:txBody>
+      </p:sp>
+      <p:graphicFrame>
+        <p:nvGraphicFramePr>
+          <p:cNvPr id="8" name="Table 0"/>
+          <p:cNvGraphicFramePr>
+            <a:graphicFrameLocks noGrp="1"/>
+          </p:cNvGraphicFramePr>
+          <p:nvPr>
+            <p:extLst>
+              <p:ext uri="{D42A27DB-BD31-4B8C-83A1-F6EECF244321}">
+                <p14:modId xmlns:p14="http://schemas.microsoft.com/office/powerpoint/2010/main" val="1579011935"/>
+              </p:ext>
+            </p:extLst>
+          </p:nvPr>
+        </p:nvGraphicFramePr>
+        <p:xfrm>
+          <a:off x="548640" y="2194560"/>
+          <a:ext cx="11091672" cy="2514600"/>
+        </p:xfrm>
+        <a:graphic>
+          <a:graphicData uri="http://schemas.openxmlformats.org/drawingml/2006/table">
+            <a:tbl>
+              <a:tblPr/>
+              <a:tblGrid>
+                <a:gridCol w="4658502">
+                  <a:extLst>
+                    <a:ext uri="{9D8B030D-6E8A-4147-A177-3AD203B41FA5}">
+                      <a16:colId xmlns:a16="http://schemas.microsoft.com/office/drawing/2014/main" val="20000"/>
+                    </a:ext>
+                  </a:extLst>
+                </a:gridCol>
+                <a:gridCol w="6433170">
+                  <a:extLst>
+                    <a:ext uri="{9D8B030D-6E8A-4147-A177-3AD203B41FA5}">
+                      <a16:colId xmlns:a16="http://schemas.microsoft.com/office/drawing/2014/main" val="20001"/>
+                    </a:ext>
+                  </a:extLst>
+                </a:gridCol>
+              </a:tblGrid>
+              <a:tr h="502920">
+                <a:tc>
+                  <a:txBody>
+                    <a:bodyPr/>
+                    <a:lstStyle/>
+                    <a:p>
+                      <a:pPr marL="0" indent="0" algn="ctr">
+                        <a:buNone/>
+                      </a:pPr>
+                      <a:r>
+                        <a:rPr lang="en-US" sz="1400" b="1" dirty="0">
+                          <a:solidFill>
+                            <a:srgbClr val="FFFFFF"/>
+                          </a:solidFill>
+                          <a:latin typeface="Arial" pitchFamily="34" charset="0"/>
+                          <a:ea typeface="Arial" pitchFamily="34" charset="-122"/>
+                          <a:cs typeface="Arial" pitchFamily="34" charset="-120"/>
+                        </a:rPr>
+                        <a:t>Paso</a:t>
+                      </a:r>
+                      <a:endParaRPr lang="en-US" sz="1400" dirty="0">
+                        <a:latin typeface="Arial" charset="0"/>
+                        <a:ea typeface="Arial" charset="0"/>
+                        <a:cs typeface="Arial" charset="0"/>
+                      </a:endParaRPr>
+                    </a:p>
+                  </a:txBody>
+                  <a:tcPr anchor="ctr">
+                    <a:lnL w="12700" cap="flat" cmpd="sng" algn="ctr">
+                      <a:solidFill>
+                        <a:srgbClr val="EEEEEE"/>
+                      </a:solidFill>
+                      <a:prstDash val="solid"/>
+                      <a:round/>
+                      <a:headEnd type="none" w="med" len="med"/>
+                      <a:tailEnd type="none" w="med" len="med"/>
+                    </a:lnL>
+                    <a:lnR w="12700" cap="flat" cmpd="sng" algn="ctr">
+                      <a:solidFill>
+                        <a:srgbClr val="EEEEEE"/>
+                      </a:solidFill>
+                      <a:prstDash val="solid"/>
+                      <a:round/>
+                      <a:headEnd type="none" w="med" len="med"/>
+                      <a:tailEnd type="none" w="med" len="med"/>
+                    </a:lnR>
+                    <a:lnT w="12700" cap="flat" cmpd="sng" algn="ctr">
+                      <a:solidFill>
+                        <a:srgbClr val="EEEEEE"/>
+                      </a:solidFill>
+                      <a:prstDash val="solid"/>
+                      <a:round/>
+                      <a:headEnd type="none" w="med" len="med"/>
+                      <a:tailEnd type="none" w="med" len="med"/>
+                    </a:lnT>
+                    <a:lnB w="12700" cap="flat" cmpd="sng" algn="ctr">
+                      <a:solidFill>
+                        <a:srgbClr val="EEEEEE"/>
+                      </a:solidFill>
+                      <a:prstDash val="solid"/>
+                      <a:round/>
+                      <a:headEnd type="none" w="med" len="med"/>
+                      <a:tailEnd type="none" w="med" len="med"/>
+                    </a:lnB>
+                    <a:solidFill>
+                      <a:srgbClr val="3949AB"/>
+                    </a:solidFill>
+                  </a:tcPr>
+                </a:tc>
+                <a:tc>
+                  <a:txBody>
+                    <a:bodyPr/>
+                    <a:lstStyle/>
+                    <a:p>
+                      <a:pPr marL="0" indent="0" algn="ctr">
+                        <a:buNone/>
+                      </a:pPr>
+                      <a:r>
+                        <a:rPr lang="en-US" sz="1400" b="1" dirty="0">
+                          <a:solidFill>
+                            <a:srgbClr val="FFFFFF"/>
+                          </a:solidFill>
+                          <a:latin typeface="Arial" pitchFamily="34" charset="0"/>
+                          <a:ea typeface="Arial" pitchFamily="34" charset="-122"/>
+                          <a:cs typeface="Arial" pitchFamily="34" charset="-120"/>
+                        </a:rPr>
+                        <a:t>Con qué señal</a:t>
+                      </a:r>
+                      <a:endParaRPr lang="en-US" sz="1400" dirty="0">
+                        <a:latin typeface="Arial" charset="0"/>
+                        <a:ea typeface="Arial" charset="0"/>
+                        <a:cs typeface="Arial" charset="0"/>
+                      </a:endParaRPr>
+                    </a:p>
+                  </a:txBody>
+                  <a:tcPr anchor="ctr">
+                    <a:lnL w="12700" cap="flat" cmpd="sng" algn="ctr">
+                      <a:solidFill>
+                        <a:srgbClr val="EEEEEE"/>
+                      </a:solidFill>
+                      <a:prstDash val="solid"/>
+                      <a:round/>
+                      <a:headEnd type="none" w="med" len="med"/>
+                      <a:tailEnd type="none" w="med" len="med"/>
+                    </a:lnL>
+                    <a:lnR w="12700" cap="flat" cmpd="sng" algn="ctr">
+                      <a:solidFill>
+                        <a:srgbClr val="EEEEEE"/>
+                      </a:solidFill>
+                      <a:prstDash val="solid"/>
+                      <a:round/>
+                      <a:headEnd type="none" w="med" len="med"/>
+                      <a:tailEnd type="none" w="med" len="med"/>
+                    </a:lnR>
+                    <a:lnT w="12700" cap="flat" cmpd="sng" algn="ctr">
+                      <a:solidFill>
+                        <a:srgbClr val="EEEEEE"/>
+                      </a:solidFill>
+                      <a:prstDash val="solid"/>
+                      <a:round/>
+                      <a:headEnd type="none" w="med" len="med"/>
+                      <a:tailEnd type="none" w="med" len="med"/>
+                    </a:lnT>
+                    <a:lnB w="12700" cap="flat" cmpd="sng" algn="ctr">
+                      <a:solidFill>
+                        <a:srgbClr val="EEEEEE"/>
+                      </a:solidFill>
+                      <a:prstDash val="solid"/>
+                      <a:round/>
+                      <a:headEnd type="none" w="med" len="med"/>
+                      <a:tailEnd type="none" w="med" len="med"/>
+                    </a:lnB>
+                    <a:solidFill>
+                      <a:srgbClr val="3949AB"/>
+                    </a:solidFill>
+                  </a:tcPr>
+                </a:tc>
+                <a:extLst>
+                  <a:ext uri="{0D108BD9-81ED-4DB2-BD59-A6C34878D82A}">
+                    <a16:rowId xmlns:a16="http://schemas.microsoft.com/office/drawing/2014/main" val="10000"/>
+                  </a:ext>
+                </a:extLst>
+              </a:tr>
+              <a:tr h="502920">
+                <a:tc>
+                  <a:txBody>
+                    <a:bodyPr/>
+                    <a:lstStyle/>
+                    <a:p>
+                      <a:pPr marL="0" indent="0">
+                        <a:buNone/>
+                      </a:pPr>
+                      <a:r>
+                        <a:rPr lang="en-US" sz="1300" b="1" dirty="0">
+                          <a:solidFill>
+                            <a:srgbClr val="212121"/>
+                          </a:solidFill>
+                          <a:latin typeface="Arial" pitchFamily="34" charset="0"/>
+                          <a:ea typeface="Arial" pitchFamily="34" charset="-122"/>
+                          <a:cs typeface="Arial" pitchFamily="34" charset="-120"/>
+                        </a:rPr>
+                        <a:t>1. ¿Cuándo empezó el problema?</a:t>
+                      </a:r>
+                      <a:endParaRPr lang="en-US" sz="1300" dirty="0">
+                        <a:latin typeface="Arial" charset="0"/>
+                        <a:ea typeface="Arial" charset="0"/>
+                        <a:cs typeface="Arial" charset="0"/>
+                      </a:endParaRPr>
+                    </a:p>
+                  </a:txBody>
+                  <a:tcPr anchor="ctr">
+                    <a:lnL w="12700" cap="flat" cmpd="sng" algn="ctr">
+                      <a:solidFill>
+                        <a:srgbClr val="EEEEEE"/>
+                      </a:solidFill>
+                      <a:prstDash val="solid"/>
+                      <a:round/>
+                      <a:headEnd type="none" w="med" len="med"/>
+                      <a:tailEnd type="none" w="med" len="med"/>
+                    </a:lnL>
+                    <a:lnR w="12700" cap="flat" cmpd="sng" algn="ctr">
+                      <a:solidFill>
+                        <a:srgbClr val="EEEEEE"/>
+                      </a:solidFill>
+                      <a:prstDash val="solid"/>
+                      <a:round/>
+                      <a:headEnd type="none" w="med" len="med"/>
+                      <a:tailEnd type="none" w="med" len="med"/>
+                    </a:lnR>
+                    <a:lnT w="12700" cap="flat" cmpd="sng" algn="ctr">
+                      <a:solidFill>
+                        <a:srgbClr val="EEEEEE"/>
+                      </a:solidFill>
+                      <a:prstDash val="solid"/>
+                      <a:round/>
+                      <a:headEnd type="none" w="med" len="med"/>
+                      <a:tailEnd type="none" w="med" len="med"/>
+                    </a:lnT>
+                    <a:lnB w="12700" cap="flat" cmpd="sng" algn="ctr">
+                      <a:solidFill>
+                        <a:srgbClr val="EEEEEE"/>
+                      </a:solidFill>
+                      <a:prstDash val="solid"/>
+                      <a:round/>
+                      <a:headEnd type="none" w="med" len="med"/>
+                      <a:tailEnd type="none" w="med" len="med"/>
+                    </a:lnB>
+                    <a:solidFill>
+                      <a:srgbClr val="FFFFFF"/>
+                    </a:solidFill>
+                  </a:tcPr>
+                </a:tc>
+                <a:tc>
+                  <a:txBody>
+                    <a:bodyPr/>
+                    <a:lstStyle/>
+                    <a:p>
+                      <a:pPr marL="0" indent="0">
+                        <a:buNone/>
+                      </a:pPr>
+                      <a:r>
+                        <a:rPr lang="en-US" sz="1300" dirty="0">
+                          <a:solidFill>
+                            <a:srgbClr val="212121"/>
+                          </a:solidFill>
+                          <a:latin typeface="Arial" pitchFamily="34" charset="0"/>
+                          <a:ea typeface="Arial" pitchFamily="34" charset="-122"/>
+                          <a:cs typeface="Arial" pitchFamily="34" charset="-120"/>
+                        </a:rPr>
+                        <a:t>Métricas — el momento exacto en que algo cruzó un umbral</a:t>
+                      </a:r>
+                      <a:endParaRPr lang="en-US" sz="1300" dirty="0">
+                        <a:latin typeface="Arial" charset="0"/>
+                        <a:ea typeface="Arial" charset="0"/>
+                        <a:cs typeface="Arial" charset="0"/>
+                      </a:endParaRPr>
+                    </a:p>
+                  </a:txBody>
+                  <a:tcPr anchor="ctr">
+                    <a:lnL w="12700" cap="flat" cmpd="sng" algn="ctr">
+                      <a:solidFill>
+                        <a:srgbClr val="EEEEEE"/>
+                      </a:solidFill>
+                      <a:prstDash val="solid"/>
+                      <a:round/>
+                      <a:headEnd type="none" w="med" len="med"/>
+                      <a:tailEnd type="none" w="med" len="med"/>
+                    </a:lnL>
+                    <a:lnR w="12700" cap="flat" cmpd="sng" algn="ctr">
+                      <a:solidFill>
+                        <a:srgbClr val="EEEEEE"/>
+                      </a:solidFill>
+                      <a:prstDash val="solid"/>
+                      <a:round/>
+                      <a:headEnd type="none" w="med" len="med"/>
+                      <a:tailEnd type="none" w="med" len="med"/>
+                    </a:lnR>
+                    <a:lnT w="12700" cap="flat" cmpd="sng" algn="ctr">
+                      <a:solidFill>
+                        <a:srgbClr val="EEEEEE"/>
+                      </a:solidFill>
+                      <a:prstDash val="solid"/>
+                      <a:round/>
+                      <a:headEnd type="none" w="med" len="med"/>
+                      <a:tailEnd type="none" w="med" len="med"/>
+                    </a:lnT>
+                    <a:lnB w="12700" cap="flat" cmpd="sng" algn="ctr">
+                      <a:solidFill>
+                        <a:srgbClr val="EEEEEE"/>
+                      </a:solidFill>
+                      <a:prstDash val="solid"/>
+                      <a:round/>
+                      <a:headEnd type="none" w="med" len="med"/>
+                      <a:tailEnd type="none" w="med" len="med"/>
+                    </a:lnB>
+                    <a:solidFill>
+                      <a:srgbClr val="FFFFFF"/>
+                    </a:solidFill>
+                  </a:tcPr>
+                </a:tc>
+                <a:extLst>
+                  <a:ext uri="{0D108BD9-81ED-4DB2-BD59-A6C34878D82A}">
+                    <a16:rowId xmlns:a16="http://schemas.microsoft.com/office/drawing/2014/main" val="10001"/>
+                  </a:ext>
+                </a:extLst>
+              </a:tr>
+              <a:tr h="502920">
+                <a:tc>
+                  <a:txBody>
+                    <a:bodyPr/>
+                    <a:lstStyle/>
+                    <a:p>
+                      <a:pPr marL="0" indent="0">
+                        <a:buNone/>
+                      </a:pPr>
+                      <a:r>
+                        <a:rPr lang="en-US" sz="1300" b="1" dirty="0">
+                          <a:solidFill>
+                            <a:srgbClr val="212121"/>
+                          </a:solidFill>
+                          <a:latin typeface="Arial" pitchFamily="34" charset="0"/>
+                          <a:ea typeface="Arial" pitchFamily="34" charset="-122"/>
+                          <a:cs typeface="Arial" pitchFamily="34" charset="-120"/>
+                        </a:rPr>
+                        <a:t>2. ¿Qué capa está implicada?</a:t>
+                      </a:r>
+                      <a:endParaRPr lang="en-US" sz="1300" dirty="0">
+                        <a:latin typeface="Arial" charset="0"/>
+                        <a:ea typeface="Arial" charset="0"/>
+                        <a:cs typeface="Arial" charset="0"/>
+                      </a:endParaRPr>
+                    </a:p>
+                  </a:txBody>
+                  <a:tcPr anchor="ctr">
+                    <a:lnL w="12700" cap="flat" cmpd="sng" algn="ctr">
+                      <a:solidFill>
+                        <a:srgbClr val="EEEEEE"/>
+                      </a:solidFill>
+                      <a:prstDash val="solid"/>
+                      <a:round/>
+                      <a:headEnd type="none" w="med" len="med"/>
+                      <a:tailEnd type="none" w="med" len="med"/>
+                    </a:lnL>
+                    <a:lnR w="12700" cap="flat" cmpd="sng" algn="ctr">
+                      <a:solidFill>
+                        <a:srgbClr val="EEEEEE"/>
+                      </a:solidFill>
+                      <a:prstDash val="solid"/>
+                      <a:round/>
+                      <a:headEnd type="none" w="med" len="med"/>
+                      <a:tailEnd type="none" w="med" len="med"/>
+                    </a:lnR>
+                    <a:lnT w="12700" cap="flat" cmpd="sng" algn="ctr">
+                      <a:solidFill>
+                        <a:srgbClr val="EEEEEE"/>
+                      </a:solidFill>
+                      <a:prstDash val="solid"/>
+                      <a:round/>
+                      <a:headEnd type="none" w="med" len="med"/>
+                      <a:tailEnd type="none" w="med" len="med"/>
+                    </a:lnT>
+                    <a:lnB w="12700" cap="flat" cmpd="sng" algn="ctr">
+                      <a:solidFill>
+                        <a:srgbClr val="EEEEEE"/>
+                      </a:solidFill>
+                      <a:prstDash val="solid"/>
+                      <a:round/>
+                      <a:headEnd type="none" w="med" len="med"/>
+                      <a:tailEnd type="none" w="med" len="med"/>
+                    </a:lnB>
+                    <a:solidFill>
+                      <a:srgbClr val="F5F5F5"/>
+                    </a:solidFill>
+                  </a:tcPr>
+                </a:tc>
+                <a:tc>
+                  <a:txBody>
+                    <a:bodyPr/>
+                    <a:lstStyle/>
+                    <a:p>
+                      <a:pPr marL="0" indent="0">
+                        <a:buNone/>
+                      </a:pPr>
+                      <a:r>
+                        <a:rPr lang="en-US" sz="1300" dirty="0">
+                          <a:solidFill>
+                            <a:srgbClr val="212121"/>
+                          </a:solidFill>
+                          <a:latin typeface="Arial" pitchFamily="34" charset="0"/>
+                          <a:ea typeface="Arial" pitchFamily="34" charset="-122"/>
+                          <a:cs typeface="Arial" pitchFamily="34" charset="-120"/>
+                        </a:rPr>
+                        <a:t>Métricas por capa — compara borde, aplicación y datos</a:t>
+                      </a:r>
+                      <a:endParaRPr lang="en-US" sz="1300" dirty="0">
+                        <a:latin typeface="Arial" charset="0"/>
+                        <a:ea typeface="Arial" charset="0"/>
+                        <a:cs typeface="Arial" charset="0"/>
+                      </a:endParaRPr>
+                    </a:p>
+                  </a:txBody>
+                  <a:tcPr anchor="ctr">
+                    <a:lnL w="12700" cap="flat" cmpd="sng" algn="ctr">
+                      <a:solidFill>
+                        <a:srgbClr val="EEEEEE"/>
+                      </a:solidFill>
+                      <a:prstDash val="solid"/>
+                      <a:round/>
+                      <a:headEnd type="none" w="med" len="med"/>
+                      <a:tailEnd type="none" w="med" len="med"/>
+                    </a:lnL>
+                    <a:lnR w="12700" cap="flat" cmpd="sng" algn="ctr">
+                      <a:solidFill>
+                        <a:srgbClr val="EEEEEE"/>
+                      </a:solidFill>
+                      <a:prstDash val="solid"/>
+                      <a:round/>
+                      <a:headEnd type="none" w="med" len="med"/>
+                      <a:tailEnd type="none" w="med" len="med"/>
+                    </a:lnR>
+                    <a:lnT w="12700" cap="flat" cmpd="sng" algn="ctr">
+                      <a:solidFill>
+                        <a:srgbClr val="EEEEEE"/>
+                      </a:solidFill>
+                      <a:prstDash val="solid"/>
+                      <a:round/>
+                      <a:headEnd type="none" w="med" len="med"/>
+                      <a:tailEnd type="none" w="med" len="med"/>
+                    </a:lnT>
+                    <a:lnB w="12700" cap="flat" cmpd="sng" algn="ctr">
+                      <a:solidFill>
+                        <a:srgbClr val="EEEEEE"/>
+                      </a:solidFill>
+                      <a:prstDash val="solid"/>
+                      <a:round/>
+                      <a:headEnd type="none" w="med" len="med"/>
+                      <a:tailEnd type="none" w="med" len="med"/>
+                    </a:lnB>
+                    <a:solidFill>
+                      <a:srgbClr val="F5F5F5"/>
+                    </a:solidFill>
+                  </a:tcPr>
+                </a:tc>
+                <a:extLst>
+                  <a:ext uri="{0D108BD9-81ED-4DB2-BD59-A6C34878D82A}">
+                    <a16:rowId xmlns:a16="http://schemas.microsoft.com/office/drawing/2014/main" val="10002"/>
+                  </a:ext>
+                </a:extLst>
+              </a:tr>
+              <a:tr h="502920">
+                <a:tc>
+                  <a:txBody>
+                    <a:bodyPr/>
+                    <a:lstStyle/>
+                    <a:p>
+                      <a:pPr marL="0" indent="0">
+                        <a:buNone/>
+                      </a:pPr>
+                      <a:r>
+                        <a:rPr lang="en-US" sz="1300" b="1" dirty="0">
+                          <a:solidFill>
+                            <a:srgbClr val="212121"/>
+                          </a:solidFill>
+                          <a:latin typeface="Arial" pitchFamily="34" charset="0"/>
+                          <a:ea typeface="Arial" pitchFamily="34" charset="-122"/>
+                          <a:cs typeface="Arial" pitchFamily="34" charset="-120"/>
+                        </a:rPr>
+                        <a:t>3. ¿Qué error concreto ha ocurrido?</a:t>
+                      </a:r>
+                      <a:endParaRPr lang="en-US" sz="1300" dirty="0">
+                        <a:latin typeface="Arial" charset="0"/>
+                        <a:ea typeface="Arial" charset="0"/>
+                        <a:cs typeface="Arial" charset="0"/>
+                      </a:endParaRPr>
+                    </a:p>
+                  </a:txBody>
+                  <a:tcPr anchor="ctr">
+                    <a:lnL w="12700" cap="flat" cmpd="sng" algn="ctr">
+                      <a:solidFill>
+                        <a:srgbClr val="EEEEEE"/>
+                      </a:solidFill>
+                      <a:prstDash val="solid"/>
+                      <a:round/>
+                      <a:headEnd type="none" w="med" len="med"/>
+                      <a:tailEnd type="none" w="med" len="med"/>
+                    </a:lnL>
+                    <a:lnR w="12700" cap="flat" cmpd="sng" algn="ctr">
+                      <a:solidFill>
+                        <a:srgbClr val="EEEEEE"/>
+                      </a:solidFill>
+                      <a:prstDash val="solid"/>
+                      <a:round/>
+                      <a:headEnd type="none" w="med" len="med"/>
+                      <a:tailEnd type="none" w="med" len="med"/>
+                    </a:lnR>
+                    <a:lnT w="12700" cap="flat" cmpd="sng" algn="ctr">
+                      <a:solidFill>
+                        <a:srgbClr val="EEEEEE"/>
+                      </a:solidFill>
+                      <a:prstDash val="solid"/>
+                      <a:round/>
+                      <a:headEnd type="none" w="med" len="med"/>
+                      <a:tailEnd type="none" w="med" len="med"/>
+                    </a:lnT>
+                    <a:lnB w="12700" cap="flat" cmpd="sng" algn="ctr">
+                      <a:solidFill>
+                        <a:srgbClr val="EEEEEE"/>
+                      </a:solidFill>
+                      <a:prstDash val="solid"/>
+                      <a:round/>
+                      <a:headEnd type="none" w="med" len="med"/>
+                      <a:tailEnd type="none" w="med" len="med"/>
+                    </a:lnB>
+                    <a:solidFill>
+                      <a:srgbClr val="FFFFFF"/>
+                    </a:solidFill>
+                  </a:tcPr>
+                </a:tc>
+                <a:tc>
+                  <a:txBody>
+                    <a:bodyPr/>
+                    <a:lstStyle/>
+                    <a:p>
+                      <a:pPr marL="0" indent="0">
+                        <a:buNone/>
+                      </a:pPr>
+                      <a:r>
+                        <a:rPr lang="en-US" sz="1300" dirty="0">
+                          <a:solidFill>
+                            <a:srgbClr val="212121"/>
+                          </a:solidFill>
+                          <a:latin typeface="Arial" pitchFamily="34" charset="0"/>
+                          <a:ea typeface="Arial" pitchFamily="34" charset="-122"/>
+                          <a:cs typeface="Arial" pitchFamily="34" charset="-120"/>
+                        </a:rPr>
+                        <a:t>Registros de esa capa, en esa ventana de tiempo</a:t>
+                      </a:r>
+                      <a:endParaRPr lang="en-US" sz="1300" dirty="0">
+                        <a:latin typeface="Arial" charset="0"/>
+                        <a:ea typeface="Arial" charset="0"/>
+                        <a:cs typeface="Arial" charset="0"/>
+                      </a:endParaRPr>
+                    </a:p>
+                  </a:txBody>
+                  <a:tcPr anchor="ctr">
+                    <a:lnL w="12700" cap="flat" cmpd="sng" algn="ctr">
+                      <a:solidFill>
+                        <a:srgbClr val="EEEEEE"/>
+                      </a:solidFill>
+                      <a:prstDash val="solid"/>
+                      <a:round/>
+                      <a:headEnd type="none" w="med" len="med"/>
+                      <a:tailEnd type="none" w="med" len="med"/>
+                    </a:lnL>
+                    <a:lnR w="12700" cap="flat" cmpd="sng" algn="ctr">
+                      <a:solidFill>
+                        <a:srgbClr val="EEEEEE"/>
+                      </a:solidFill>
+                      <a:prstDash val="solid"/>
+                      <a:round/>
+                      <a:headEnd type="none" w="med" len="med"/>
+                      <a:tailEnd type="none" w="med" len="med"/>
+                    </a:lnR>
+                    <a:lnT w="12700" cap="flat" cmpd="sng" algn="ctr">
+                      <a:solidFill>
+                        <a:srgbClr val="EEEEEE"/>
+                      </a:solidFill>
+                      <a:prstDash val="solid"/>
+                      <a:round/>
+                      <a:headEnd type="none" w="med" len="med"/>
+                      <a:tailEnd type="none" w="med" len="med"/>
+                    </a:lnT>
+                    <a:lnB w="12700" cap="flat" cmpd="sng" algn="ctr">
+                      <a:solidFill>
+                        <a:srgbClr val="EEEEEE"/>
+                      </a:solidFill>
+                      <a:prstDash val="solid"/>
+                      <a:round/>
+                      <a:headEnd type="none" w="med" len="med"/>
+                      <a:tailEnd type="none" w="med" len="med"/>
+                    </a:lnB>
+                    <a:solidFill>
+                      <a:srgbClr val="FFFFFF"/>
+                    </a:solidFill>
+                  </a:tcPr>
+                </a:tc>
+                <a:extLst>
+                  <a:ext uri="{0D108BD9-81ED-4DB2-BD59-A6C34878D82A}">
+                    <a16:rowId xmlns:a16="http://schemas.microsoft.com/office/drawing/2014/main" val="10003"/>
+                  </a:ext>
+                </a:extLst>
+              </a:tr>
+              <a:tr h="502920">
+                <a:tc>
+                  <a:txBody>
+                    <a:bodyPr/>
+                    <a:lstStyle/>
+                    <a:p>
+                      <a:pPr marL="0" indent="0">
+                        <a:buNone/>
+                      </a:pPr>
+                      <a:r>
+                        <a:rPr lang="en-US" sz="1300" b="1" dirty="0">
+                          <a:solidFill>
+                            <a:srgbClr val="212121"/>
+                          </a:solidFill>
+                          <a:latin typeface="Arial" pitchFamily="34" charset="0"/>
+                          <a:ea typeface="Arial" pitchFamily="34" charset="-122"/>
+                          <a:cs typeface="Arial" pitchFamily="34" charset="-120"/>
+                        </a:rPr>
+                        <a:t>4. ¿Alguien ha cambiado algo antes?</a:t>
+                      </a:r>
+                      <a:endParaRPr lang="en-US" sz="1300" dirty="0">
+                        <a:latin typeface="Arial" charset="0"/>
+                        <a:ea typeface="Arial" charset="0"/>
+                        <a:cs typeface="Arial" charset="0"/>
+                      </a:endParaRPr>
+                    </a:p>
+                  </a:txBody>
+                  <a:tcPr anchor="ctr">
+                    <a:lnL w="12700" cap="flat" cmpd="sng" algn="ctr">
+                      <a:solidFill>
+                        <a:srgbClr val="EEEEEE"/>
+                      </a:solidFill>
+                      <a:prstDash val="solid"/>
+                      <a:round/>
+                      <a:headEnd type="none" w="med" len="med"/>
+                      <a:tailEnd type="none" w="med" len="med"/>
+                    </a:lnL>
+                    <a:lnR w="12700" cap="flat" cmpd="sng" algn="ctr">
+                      <a:solidFill>
+                        <a:srgbClr val="EEEEEE"/>
+                      </a:solidFill>
+                      <a:prstDash val="solid"/>
+                      <a:round/>
+                      <a:headEnd type="none" w="med" len="med"/>
+                      <a:tailEnd type="none" w="med" len="med"/>
+                    </a:lnR>
+                    <a:lnT w="12700" cap="flat" cmpd="sng" algn="ctr">
+                      <a:solidFill>
+                        <a:srgbClr val="EEEEEE"/>
+                      </a:solidFill>
+                      <a:prstDash val="solid"/>
+                      <a:round/>
+                      <a:headEnd type="none" w="med" len="med"/>
+                      <a:tailEnd type="none" w="med" len="med"/>
+                    </a:lnT>
+                    <a:lnB w="12700" cap="flat" cmpd="sng" algn="ctr">
+                      <a:solidFill>
+                        <a:srgbClr val="EEEEEE"/>
+                      </a:solidFill>
+                      <a:prstDash val="solid"/>
+                      <a:round/>
+                      <a:headEnd type="none" w="med" len="med"/>
+                      <a:tailEnd type="none" w="med" len="med"/>
+                    </a:lnB>
+                    <a:solidFill>
+                      <a:srgbClr val="F5F5F5"/>
+                    </a:solidFill>
+                  </a:tcPr>
+                </a:tc>
+                <a:tc>
+                  <a:txBody>
+                    <a:bodyPr/>
+                    <a:lstStyle/>
+                    <a:p>
+                      <a:pPr marL="0" indent="0">
+                        <a:buNone/>
+                      </a:pPr>
+                      <a:r>
+                        <a:rPr lang="en-US" sz="1300" dirty="0">
+                          <a:solidFill>
+                            <a:srgbClr val="212121"/>
+                          </a:solidFill>
+                          <a:latin typeface="Arial" pitchFamily="34" charset="0"/>
+                          <a:ea typeface="Arial" pitchFamily="34" charset="-122"/>
+                          <a:cs typeface="Arial" pitchFamily="34" charset="-120"/>
+                        </a:rPr>
+                        <a:t>Auditoría — modificaciones cerca del momento del fallo</a:t>
+                      </a:r>
+                      <a:endParaRPr lang="en-US" sz="1300" dirty="0">
+                        <a:latin typeface="Arial" charset="0"/>
+                        <a:ea typeface="Arial" charset="0"/>
+                        <a:cs typeface="Arial" charset="0"/>
+                      </a:endParaRPr>
+                    </a:p>
+                  </a:txBody>
+                  <a:tcPr anchor="ctr">
+                    <a:lnL w="12700" cap="flat" cmpd="sng" algn="ctr">
+                      <a:solidFill>
+                        <a:srgbClr val="EEEEEE"/>
+                      </a:solidFill>
+                      <a:prstDash val="solid"/>
+                      <a:round/>
+                      <a:headEnd type="none" w="med" len="med"/>
+                      <a:tailEnd type="none" w="med" len="med"/>
+                    </a:lnL>
+                    <a:lnR w="12700" cap="flat" cmpd="sng" algn="ctr">
+                      <a:solidFill>
+                        <a:srgbClr val="EEEEEE"/>
+                      </a:solidFill>
+                      <a:prstDash val="solid"/>
+                      <a:round/>
+                      <a:headEnd type="none" w="med" len="med"/>
+                      <a:tailEnd type="none" w="med" len="med"/>
+                    </a:lnR>
+                    <a:lnT w="12700" cap="flat" cmpd="sng" algn="ctr">
+                      <a:solidFill>
+                        <a:srgbClr val="EEEEEE"/>
+                      </a:solidFill>
+                      <a:prstDash val="solid"/>
+                      <a:round/>
+                      <a:headEnd type="none" w="med" len="med"/>
+                      <a:tailEnd type="none" w="med" len="med"/>
+                    </a:lnT>
+                    <a:lnB w="12700" cap="flat" cmpd="sng" algn="ctr">
+                      <a:solidFill>
+                        <a:srgbClr val="EEEEEE"/>
+                      </a:solidFill>
+                      <a:prstDash val="solid"/>
+                      <a:round/>
+                      <a:headEnd type="none" w="med" len="med"/>
+                      <a:tailEnd type="none" w="med" len="med"/>
+                    </a:lnB>
+                    <a:solidFill>
+                      <a:srgbClr val="F5F5F5"/>
+                    </a:solidFill>
+                  </a:tcPr>
+                </a:tc>
+                <a:extLst>
+                  <a:ext uri="{0D108BD9-81ED-4DB2-BD59-A6C34878D82A}">
+                    <a16:rowId xmlns:a16="http://schemas.microsoft.com/office/drawing/2014/main" val="10004"/>
+                  </a:ext>
+                </a:extLst>
+              </a:tr>
+            </a:tbl>
+          </a:graphicData>
+        </a:graphic>
+      </p:graphicFrame>
+      <p:sp>
+        <p:nvSpPr>
+          <p:cNvPr id="7" name="Shape 5"/>
+          <p:cNvSpPr/>
+          <p:nvPr/>
+        </p:nvSpPr>
+        <p:spPr>
+          <a:xfrm>
+            <a:off x="548640" y="5212080"/>
+            <a:ext cx="11091672" cy="1160728"/>
+          </a:xfrm>
+          <a:prstGeom prst="roundRect">
+            <a:avLst/>
+          </a:prstGeom>
+          <a:solidFill>
+            <a:srgbClr val="FFF8E1"/>
+          </a:solidFill>
+          <a:ln w="28575">
+            <a:solidFill>
+              <a:srgbClr val="FFA000"/>
+            </a:solidFill>
+            <a:prstDash val="solid"/>
+          </a:ln>
+        </p:spPr>
+        <p:txBody>
+          <a:bodyPr/>
+          <a:lstStyle/>
+          <a:p>
+            <a:endParaRPr lang="es-ES"/>
+          </a:p>
+        </p:txBody>
+      </p:sp>
+      <p:sp>
+        <p:nvSpPr>
+          <p:cNvPr id="9" name="Text 6"/>
+          <p:cNvSpPr/>
+          <p:nvPr/>
+        </p:nvSpPr>
+        <p:spPr>
+          <a:xfrm>
+            <a:off x="822960" y="5321808"/>
+            <a:ext cx="10543032" cy="786384"/>
           </a:xfrm>
           <a:prstGeom prst="rect">
             <a:avLst/>
@@ -5024,17 +6803,35 @@
               <a:buNone/>
             </a:pPr>
             <a:r>
-              <a:rPr lang="en-US" sz="1800" i="1" dirty="0">
+              <a:rPr lang="en-US" sz="1500" b="1" dirty="0">
                 <a:solidFill>
-                  <a:srgbClr val="757575"/>
+                  <a:srgbClr val="1A237E"/>
                 </a:solidFill>
                 <a:latin typeface="Arial" pitchFamily="34" charset="0"/>
                 <a:ea typeface="Arial" pitchFamily="34" charset="-122"/>
                 <a:cs typeface="Arial" pitchFamily="34" charset="-120"/>
               </a:rPr>
-              <a:t>Vas a diseñar exactamente tres alarmas útiles en la Actividad 5.1, no veinte — elegir pocas y que importen es la parte difícil.</a:t>
+              <a:t>El orden importa: empieza siempre por cuándo, no por qué
+</a:t>
             </a:r>
-            <a:endParaRPr lang="en-US" sz="1800" dirty="0"/>
+            <a:endParaRPr lang="en-US" sz="1500" dirty="0"/>
+          </a:p>
+          <a:p>
+            <a:pPr marL="0" indent="0">
+              <a:buNone/>
+            </a:pPr>
+            <a:r>
+              <a:rPr lang="en-US" sz="1400" dirty="0">
+                <a:solidFill>
+                  <a:srgbClr val="212121"/>
+                </a:solidFill>
+                <a:latin typeface="Arial" pitchFamily="34" charset="0"/>
+                <a:ea typeface="Arial" pitchFamily="34" charset="-122"/>
+                <a:cs typeface="Arial" pitchFamily="34" charset="-120"/>
+              </a:rPr>
+              <a:t>Ir directamente a leer registros sin haber acotado antes la ventana de tiempo con las métricas es buscar una aguja en un pajar entero, no en el rincón donde de verdad cayó.</a:t>
+            </a:r>
+            <a:endParaRPr lang="en-US" sz="1500" dirty="0"/>
           </a:p>
         </p:txBody>
       </p:sp>
@@ -5128,7 +6925,7 @@
                 <a:ea typeface="Arial" pitchFamily="34" charset="-122"/>
                 <a:cs typeface="Arial" pitchFamily="34" charset="-120"/>
               </a:rPr>
-              <a:t>Cada capa falla de forma distinta</a:t>
+              <a:t>Los registros no se guardan gratis ni para siempre</a:t>
             </a:r>
             <a:endParaRPr lang="en-US" sz="2400" dirty="0"/>
           </a:p>
@@ -5175,53 +6972,14 @@
       </p:sp>
       <p:sp>
         <p:nvSpPr>
-          <p:cNvPr id="5" name="Text 3"/>
+          <p:cNvPr id="5" name="Shape 3"/>
           <p:cNvSpPr/>
           <p:nvPr/>
         </p:nvSpPr>
         <p:spPr>
           <a:xfrm>
             <a:off x="548640" y="1280160"/>
-            <a:ext cx="11091672" cy="914400"/>
-          </a:xfrm>
-          <a:prstGeom prst="rect">
-            <a:avLst/>
-          </a:prstGeom>
-          <a:noFill/>
-          <a:ln/>
-        </p:spPr>
-        <p:txBody>
-          <a:bodyPr wrap="square" rtlCol="0" anchor="t"/>
-          <a:lstStyle/>
-          <a:p>
-            <a:pPr marL="0" indent="0">
-              <a:buNone/>
-            </a:pPr>
-            <a:r>
-              <a:rPr lang="en-US" sz="1800" dirty="0">
-                <a:solidFill>
-                  <a:srgbClr val="212121"/>
-                </a:solidFill>
-                <a:latin typeface="Arial" pitchFamily="34" charset="0"/>
-                <a:ea typeface="Arial" pitchFamily="34" charset="-122"/>
-                <a:cs typeface="Arial" pitchFamily="34" charset="-120"/>
-              </a:rPr>
-              <a:t>Los códigos de estado HTTP que empiezan por 5 —los errores 5xx— son error del propio servidor, la señal de que algo se ha roto por dentro.</a:t>
-            </a:r>
-            <a:endParaRPr lang="en-US" sz="1800" dirty="0"/>
-          </a:p>
-        </p:txBody>
-      </p:sp>
-      <p:sp>
-        <p:nvSpPr>
-          <p:cNvPr id="6" name="Shape 4"/>
-          <p:cNvSpPr/>
-          <p:nvPr/>
-        </p:nvSpPr>
-        <p:spPr>
-          <a:xfrm>
-            <a:off x="548640" y="2560320"/>
-            <a:ext cx="3422904" cy="1371600"/>
+            <a:ext cx="11091672" cy="1645920"/>
           </a:xfrm>
           <a:prstGeom prst="roundRect">
             <a:avLst/>
@@ -5246,14 +7004,14 @@
       </p:sp>
       <p:sp>
         <p:nvSpPr>
-          <p:cNvPr id="7" name="Text 5"/>
-          <p:cNvSpPr/>
-          <p:nvPr/>
-        </p:nvSpPr>
-        <p:spPr>
-          <a:xfrm>
-            <a:off x="594360" y="2606040"/>
-            <a:ext cx="3331464" cy="1280160"/>
+          <p:cNvPr id="6" name="Text 4"/>
+          <p:cNvSpPr/>
+          <p:nvPr/>
+        </p:nvSpPr>
+        <p:spPr>
+          <a:xfrm>
+            <a:off x="731520" y="1353312"/>
+            <a:ext cx="10725912" cy="548640"/>
           </a:xfrm>
           <a:prstGeom prst="rect">
             <a:avLst/>
@@ -5265,11 +7023,50 @@
           <a:bodyPr wrap="square" rtlCol="0" anchor="ctr"/>
           <a:lstStyle/>
           <a:p>
-            <a:pPr marL="0" indent="0" algn="ctr">
+            <a:pPr marL="0" indent="0">
               <a:buNone/>
             </a:pPr>
             <a:r>
-              <a:rPr lang="en-US" sz="1500" dirty="0">
+              <a:rPr lang="en-US" sz="1900" b="1" dirty="0">
+                <a:solidFill>
+                  <a:srgbClr val="1A237E"/>
+                </a:solidFill>
+                <a:latin typeface="Arial" pitchFamily="34" charset="0"/>
+                <a:ea typeface="Arial" pitchFamily="34" charset="-122"/>
+                <a:cs typeface="Arial" pitchFamily="34" charset="-120"/>
+              </a:rPr>
+              <a:t>Cada registro que se genera ocupa espacio</a:t>
+            </a:r>
+            <a:endParaRPr lang="en-US" sz="1900" dirty="0"/>
+          </a:p>
+        </p:txBody>
+      </p:sp>
+      <p:sp>
+        <p:nvSpPr>
+          <p:cNvPr id="7" name="Text 5"/>
+          <p:cNvSpPr/>
+          <p:nvPr/>
+        </p:nvSpPr>
+        <p:spPr>
+          <a:xfrm>
+            <a:off x="731520" y="1901952"/>
+            <a:ext cx="10725912" cy="950976"/>
+          </a:xfrm>
+          <a:prstGeom prst="rect">
+            <a:avLst/>
+          </a:prstGeom>
+          <a:noFill/>
+          <a:ln/>
+        </p:spPr>
+        <p:txBody>
+          <a:bodyPr wrap="square" rtlCol="0" anchor="t"/>
+          <a:lstStyle/>
+          <a:p>
+            <a:pPr marL="0" indent="0">
+              <a:buNone/>
+            </a:pPr>
+            <a:r>
+              <a:rPr lang="en-US" sz="1600" dirty="0">
                 <a:solidFill>
                   <a:srgbClr val="212121"/>
                 </a:solidFill>
@@ -5277,78 +7074,22 @@
                 <a:ea typeface="Arial" pitchFamily="34" charset="-122"/>
                 <a:cs typeface="Arial" pitchFamily="34" charset="-120"/>
               </a:rPr>
-              <a:t>🌐 Borde</a:t>
+              <a:t>Y ese espacio cuesta dinero mientras lo conservas — es fácil no darte cuenta si la retención se queda «para siempre» por defecto.</a:t>
             </a:r>
-            <a:endParaRPr lang="en-US" sz="1500" dirty="0"/>
-          </a:p>
-          <a:p>
-            <a:pPr marL="0" indent="0" algn="ctr">
-              <a:buNone/>
-            </a:pPr>
-            <a:r>
-              <a:rPr lang="en-US" sz="1500" dirty="0">
-                <a:solidFill>
-                  <a:srgbClr val="212121"/>
-                </a:solidFill>
-                <a:latin typeface="Arial" pitchFamily="34" charset="0"/>
-                <a:ea typeface="Arial" pitchFamily="34" charset="-122"/>
-                <a:cs typeface="Arial" pitchFamily="34" charset="-120"/>
-              </a:rPr>
-              <a:t>errores 5xx, latencia</a:t>
-            </a:r>
-            <a:endParaRPr lang="en-US" sz="1500" dirty="0"/>
-          </a:p>
-        </p:txBody>
-      </p:sp>
-      <p:sp>
-        <p:nvSpPr>
-          <p:cNvPr id="8" name="Text 6"/>
-          <p:cNvSpPr/>
-          <p:nvPr/>
-        </p:nvSpPr>
-        <p:spPr>
-          <a:xfrm>
-            <a:off x="3925824" y="2560320"/>
-            <a:ext cx="502920" cy="1371600"/>
-          </a:xfrm>
-          <a:prstGeom prst="rect">
-            <a:avLst/>
-          </a:prstGeom>
-          <a:noFill/>
-          <a:ln/>
-        </p:spPr>
-        <p:txBody>
-          <a:bodyPr wrap="square" rtlCol="0" anchor="ctr"/>
-          <a:lstStyle/>
-          <a:p>
-            <a:pPr marL="0" indent="0" algn="ctr">
-              <a:buNone/>
-            </a:pPr>
-            <a:r>
-              <a:rPr lang="en-US" sz="2200" b="1" dirty="0">
-                <a:solidFill>
-                  <a:srgbClr val="3949AB"/>
-                </a:solidFill>
-                <a:latin typeface="Arial" pitchFamily="34" charset="0"/>
-                <a:ea typeface="Arial" pitchFamily="34" charset="-122"/>
-                <a:cs typeface="Arial" pitchFamily="34" charset="-120"/>
-              </a:rPr>
-              <a:t>→</a:t>
-            </a:r>
-            <a:endParaRPr lang="en-US" sz="2200" dirty="0"/>
-          </a:p>
-        </p:txBody>
-      </p:sp>
-      <p:sp>
-        <p:nvSpPr>
-          <p:cNvPr id="9" name="Shape 7"/>
-          <p:cNvSpPr/>
-          <p:nvPr/>
-        </p:nvSpPr>
-        <p:spPr>
-          <a:xfrm>
-            <a:off x="4383024" y="2560320"/>
-            <a:ext cx="3422904" cy="1371600"/>
+            <a:endParaRPr lang="en-US" sz="1600" dirty="0"/>
+          </a:p>
+        </p:txBody>
+      </p:sp>
+      <p:sp>
+        <p:nvSpPr>
+          <p:cNvPr id="8" name="Shape 6"/>
+          <p:cNvSpPr/>
+          <p:nvPr/>
+        </p:nvSpPr>
+        <p:spPr>
+          <a:xfrm>
+            <a:off x="548640" y="3200400"/>
+            <a:ext cx="11091672" cy="1463040"/>
           </a:xfrm>
           <a:prstGeom prst="roundRect">
             <a:avLst/>
@@ -5373,14 +7114,14 @@
       </p:sp>
       <p:sp>
         <p:nvSpPr>
-          <p:cNvPr id="10" name="Text 8"/>
-          <p:cNvSpPr/>
-          <p:nvPr/>
-        </p:nvSpPr>
-        <p:spPr>
-          <a:xfrm>
-            <a:off x="4428744" y="2606040"/>
-            <a:ext cx="3331464" cy="1280160"/>
+          <p:cNvPr id="9" name="Text 7"/>
+          <p:cNvSpPr/>
+          <p:nvPr/>
+        </p:nvSpPr>
+        <p:spPr>
+          <a:xfrm>
+            <a:off x="731520" y="3273552"/>
+            <a:ext cx="10725912" cy="548640"/>
           </a:xfrm>
           <a:prstGeom prst="rect">
             <a:avLst/>
@@ -5392,11 +7133,50 @@
           <a:bodyPr wrap="square" rtlCol="0" anchor="ctr"/>
           <a:lstStyle/>
           <a:p>
-            <a:pPr marL="0" indent="0" algn="ctr">
+            <a:pPr marL="0" indent="0">
               <a:buNone/>
             </a:pPr>
             <a:r>
-              <a:rPr lang="en-US" sz="1500" dirty="0">
+              <a:rPr lang="en-US" sz="1900" b="1" dirty="0">
+                <a:solidFill>
+                  <a:srgbClr val="1A237E"/>
+                </a:solidFill>
+                <a:latin typeface="Arial" pitchFamily="34" charset="0"/>
+                <a:ea typeface="Arial" pitchFamily="34" charset="-122"/>
+                <a:cs typeface="Arial" pitchFamily="34" charset="-120"/>
+              </a:rPr>
+              <a:t>La pregunta correcta</a:t>
+            </a:r>
+            <a:endParaRPr lang="en-US" sz="1900" dirty="0"/>
+          </a:p>
+        </p:txBody>
+      </p:sp>
+      <p:sp>
+        <p:nvSpPr>
+          <p:cNvPr id="10" name="Text 8"/>
+          <p:cNvSpPr/>
+          <p:nvPr/>
+        </p:nvSpPr>
+        <p:spPr>
+          <a:xfrm>
+            <a:off x="731520" y="3822192"/>
+            <a:ext cx="10725912" cy="768096"/>
+          </a:xfrm>
+          <a:prstGeom prst="rect">
+            <a:avLst/>
+          </a:prstGeom>
+          <a:noFill/>
+          <a:ln/>
+        </p:spPr>
+        <p:txBody>
+          <a:bodyPr wrap="square" rtlCol="0" anchor="t"/>
+          <a:lstStyle/>
+          <a:p>
+            <a:pPr marL="0" indent="0">
+              <a:buNone/>
+            </a:pPr>
+            <a:r>
+              <a:rPr lang="en-US" sz="1600" dirty="0">
                 <a:solidFill>
                   <a:srgbClr val="212121"/>
                 </a:solidFill>
@@ -5404,190 +7184,7 @@
                 <a:ea typeface="Arial" pitchFamily="34" charset="-122"/>
                 <a:cs typeface="Arial" pitchFamily="34" charset="-120"/>
               </a:rPr>
-              <a:t>⚙️ Aplicación</a:t>
-            </a:r>
-            <a:endParaRPr lang="en-US" sz="1500" dirty="0"/>
-          </a:p>
-          <a:p>
-            <a:pPr marL="0" indent="0" algn="ctr">
-              <a:buNone/>
-            </a:pPr>
-            <a:r>
-              <a:rPr lang="en-US" sz="1500" dirty="0">
-                <a:solidFill>
-                  <a:srgbClr val="212121"/>
-                </a:solidFill>
-                <a:latin typeface="Arial" pitchFamily="34" charset="0"/>
-                <a:ea typeface="Arial" pitchFamily="34" charset="-122"/>
-                <a:cs typeface="Arial" pitchFamily="34" charset="-120"/>
-              </a:rPr>
-              <a:t>CPU, memoria, registros de error</a:t>
-            </a:r>
-            <a:endParaRPr lang="en-US" sz="1500" dirty="0"/>
-          </a:p>
-        </p:txBody>
-      </p:sp>
-      <p:sp>
-        <p:nvSpPr>
-          <p:cNvPr id="11" name="Text 9"/>
-          <p:cNvSpPr/>
-          <p:nvPr/>
-        </p:nvSpPr>
-        <p:spPr>
-          <a:xfrm>
-            <a:off x="7760208" y="2560320"/>
-            <a:ext cx="502920" cy="1371600"/>
-          </a:xfrm>
-          <a:prstGeom prst="rect">
-            <a:avLst/>
-          </a:prstGeom>
-          <a:noFill/>
-          <a:ln/>
-        </p:spPr>
-        <p:txBody>
-          <a:bodyPr wrap="square" rtlCol="0" anchor="ctr"/>
-          <a:lstStyle/>
-          <a:p>
-            <a:pPr marL="0" indent="0" algn="ctr">
-              <a:buNone/>
-            </a:pPr>
-            <a:r>
-              <a:rPr lang="en-US" sz="2200" b="1" dirty="0">
-                <a:solidFill>
-                  <a:srgbClr val="3949AB"/>
-                </a:solidFill>
-                <a:latin typeface="Arial" pitchFamily="34" charset="0"/>
-                <a:ea typeface="Arial" pitchFamily="34" charset="-122"/>
-                <a:cs typeface="Arial" pitchFamily="34" charset="-120"/>
-              </a:rPr>
-              <a:t>→</a:t>
-            </a:r>
-            <a:endParaRPr lang="en-US" sz="2200" dirty="0"/>
-          </a:p>
-        </p:txBody>
-      </p:sp>
-      <p:sp>
-        <p:nvSpPr>
-          <p:cNvPr id="12" name="Shape 10"/>
-          <p:cNvSpPr/>
-          <p:nvPr/>
-        </p:nvSpPr>
-        <p:spPr>
-          <a:xfrm>
-            <a:off x="8217408" y="2560320"/>
-            <a:ext cx="3422904" cy="1371600"/>
-          </a:xfrm>
-          <a:prstGeom prst="roundRect">
-            <a:avLst/>
-          </a:prstGeom>
-          <a:solidFill>
-            <a:srgbClr val="E8EAF6"/>
-          </a:solidFill>
-          <a:ln w="15875">
-            <a:solidFill>
-              <a:srgbClr val="3949AB"/>
-            </a:solidFill>
-            <a:prstDash val="solid"/>
-          </a:ln>
-        </p:spPr>
-        <p:txBody>
-          <a:bodyPr/>
-          <a:lstStyle/>
-          <a:p>
-            <a:endParaRPr lang="es-ES"/>
-          </a:p>
-        </p:txBody>
-      </p:sp>
-      <p:sp>
-        <p:nvSpPr>
-          <p:cNvPr id="13" name="Text 11"/>
-          <p:cNvSpPr/>
-          <p:nvPr/>
-        </p:nvSpPr>
-        <p:spPr>
-          <a:xfrm>
-            <a:off x="8263128" y="2606040"/>
-            <a:ext cx="3331464" cy="1280160"/>
-          </a:xfrm>
-          <a:prstGeom prst="rect">
-            <a:avLst/>
-          </a:prstGeom>
-          <a:noFill/>
-          <a:ln/>
-        </p:spPr>
-        <p:txBody>
-          <a:bodyPr wrap="square" rtlCol="0" anchor="ctr"/>
-          <a:lstStyle/>
-          <a:p>
-            <a:pPr marL="0" indent="0" algn="ctr">
-              <a:buNone/>
-            </a:pPr>
-            <a:r>
-              <a:rPr lang="en-US" sz="1500" dirty="0">
-                <a:solidFill>
-                  <a:srgbClr val="212121"/>
-                </a:solidFill>
-                <a:latin typeface="Arial" pitchFamily="34" charset="0"/>
-                <a:ea typeface="Arial" pitchFamily="34" charset="-122"/>
-                <a:cs typeface="Arial" pitchFamily="34" charset="-120"/>
-              </a:rPr>
-              <a:t>🗄️ Datos</a:t>
-            </a:r>
-            <a:endParaRPr lang="en-US" sz="1500" dirty="0"/>
-          </a:p>
-          <a:p>
-            <a:pPr marL="0" indent="0" algn="ctr">
-              <a:buNone/>
-            </a:pPr>
-            <a:r>
-              <a:rPr lang="en-US" sz="1500" dirty="0">
-                <a:solidFill>
-                  <a:srgbClr val="212121"/>
-                </a:solidFill>
-                <a:latin typeface="Arial" pitchFamily="34" charset="0"/>
-                <a:ea typeface="Arial" pitchFamily="34" charset="-122"/>
-                <a:cs typeface="Arial" pitchFamily="34" charset="-120"/>
-              </a:rPr>
-              <a:t>conexiones activas, espacio en disco</a:t>
-            </a:r>
-            <a:endParaRPr lang="en-US" sz="1500" dirty="0"/>
-          </a:p>
-        </p:txBody>
-      </p:sp>
-      <p:sp>
-        <p:nvSpPr>
-          <p:cNvPr id="14" name="Text 12"/>
-          <p:cNvSpPr/>
-          <p:nvPr/>
-        </p:nvSpPr>
-        <p:spPr>
-          <a:xfrm>
-            <a:off x="548640" y="4297680"/>
-            <a:ext cx="11091672" cy="548640"/>
-          </a:xfrm>
-          <a:prstGeom prst="rect">
-            <a:avLst/>
-          </a:prstGeom>
-          <a:noFill/>
-          <a:ln/>
-        </p:spPr>
-        <p:txBody>
-          <a:bodyPr wrap="square" rtlCol="0" anchor="t"/>
-          <a:lstStyle/>
-          <a:p>
-            <a:pPr marL="0" indent="0">
-              <a:buNone/>
-            </a:pPr>
-            <a:r>
-              <a:rPr lang="en-US" sz="1600" i="1" dirty="0">
-                <a:solidFill>
-                  <a:srgbClr val="757575"/>
-                </a:solidFill>
-                <a:latin typeface="Arial" pitchFamily="34" charset="0"/>
-                <a:ea typeface="Arial" pitchFamily="34" charset="-122"/>
-                <a:cs typeface="Arial" pitchFamily="34" charset="-120"/>
-              </a:rPr>
-              <a:t>Diagnosticar rápido significa saber, según el síntoma, en qué capa mirar primero — «fuera hacia dentro», igual que con las averías de red del Tema 2.</a:t>
+              <a:t>¿Cuánto tiempo de verdad necesitas conservar cada registro? Vuelves a esta idea, con números reales, en el siguiente apartado — Economía de la nube.</a:t>
             </a:r>
             <a:endParaRPr lang="en-US" sz="1600" dirty="0"/>
           </a:p>
@@ -5683,7 +7280,7 @@
                 <a:ea typeface="Arial" pitchFamily="34" charset="-122"/>
                 <a:cs typeface="Arial" pitchFamily="34" charset="-120"/>
               </a:rPr>
-              <a:t>Diagnosticar una incidencia sin acceso al servidor</a:t>
+              <a:t>Ideas clave</a:t>
             </a:r>
             <a:endParaRPr lang="en-US" sz="2400" dirty="0"/>
           </a:p>
@@ -5730,14 +7327,78 @@
       </p:sp>
       <p:sp>
         <p:nvSpPr>
-          <p:cNvPr id="5" name="Text 3"/>
-          <p:cNvSpPr/>
-          <p:nvPr/>
-        </p:nvSpPr>
-        <p:spPr>
-          <a:xfrm>
-            <a:off x="548640" y="1188720"/>
-            <a:ext cx="11091672" cy="822960"/>
+          <p:cNvPr id="5" name="Shape 3"/>
+          <p:cNvSpPr/>
+          <p:nvPr/>
+        </p:nvSpPr>
+        <p:spPr>
+          <a:xfrm>
+            <a:off x="548640" y="1280160"/>
+            <a:ext cx="5431536" cy="1325880"/>
+          </a:xfrm>
+          <a:prstGeom prst="roundRect">
+            <a:avLst/>
+          </a:prstGeom>
+          <a:solidFill>
+            <a:srgbClr val="E8EAF6"/>
+          </a:solidFill>
+          <a:ln w="15875">
+            <a:solidFill>
+              <a:srgbClr val="3949AB"/>
+            </a:solidFill>
+            <a:prstDash val="solid"/>
+          </a:ln>
+        </p:spPr>
+        <p:txBody>
+          <a:bodyPr/>
+          <a:lstStyle/>
+          <a:p>
+            <a:endParaRPr lang="es-ES"/>
+          </a:p>
+        </p:txBody>
+      </p:sp>
+      <p:sp>
+        <p:nvSpPr>
+          <p:cNvPr id="6" name="Shape 4"/>
+          <p:cNvSpPr/>
+          <p:nvPr/>
+        </p:nvSpPr>
+        <p:spPr>
+          <a:xfrm>
+            <a:off x="731520" y="1650492"/>
+            <a:ext cx="566928" cy="566928"/>
+          </a:xfrm>
+          <a:prstGeom prst="ellipse">
+            <a:avLst/>
+          </a:prstGeom>
+          <a:solidFill>
+            <a:srgbClr val="3949AB"/>
+          </a:solidFill>
+          <a:ln w="12700">
+            <a:solidFill>
+              <a:srgbClr val="3949AB"/>
+            </a:solidFill>
+            <a:prstDash val="solid"/>
+          </a:ln>
+        </p:spPr>
+        <p:txBody>
+          <a:bodyPr/>
+          <a:lstStyle/>
+          <a:p>
+            <a:endParaRPr lang="es-ES"/>
+          </a:p>
+        </p:txBody>
+      </p:sp>
+      <p:sp>
+        <p:nvSpPr>
+          <p:cNvPr id="7" name="Text 5"/>
+          <p:cNvSpPr/>
+          <p:nvPr/>
+        </p:nvSpPr>
+        <p:spPr>
+          <a:xfrm>
+            <a:off x="731520" y="1650492"/>
+            <a:ext cx="566928" cy="566928"/>
           </a:xfrm>
           <a:prstGeom prst="rect">
             <a:avLst/>
@@ -5746,14 +7407,53 @@
           <a:ln/>
         </p:spPr>
         <p:txBody>
-          <a:bodyPr wrap="square" rtlCol="0" anchor="t"/>
+          <a:bodyPr wrap="square" rtlCol="0" anchor="ctr"/>
+          <a:lstStyle/>
+          <a:p>
+            <a:pPr marL="0" indent="0" algn="ctr">
+              <a:buNone/>
+            </a:pPr>
+            <a:r>
+              <a:rPr lang="en-US" sz="1700" b="1" dirty="0">
+                <a:solidFill>
+                  <a:srgbClr val="FFFFFF"/>
+                </a:solidFill>
+                <a:latin typeface="Arial" pitchFamily="34" charset="0"/>
+                <a:ea typeface="Arial" pitchFamily="34" charset="-122"/>
+                <a:cs typeface="Arial" pitchFamily="34" charset="-120"/>
+              </a:rPr>
+              <a:t>1</a:t>
+            </a:r>
+            <a:endParaRPr lang="en-US" sz="1700" dirty="0"/>
+          </a:p>
+        </p:txBody>
+      </p:sp>
+      <p:sp>
+        <p:nvSpPr>
+          <p:cNvPr id="8" name="Text 6"/>
+          <p:cNvSpPr/>
+          <p:nvPr/>
+        </p:nvSpPr>
+        <p:spPr>
+          <a:xfrm>
+            <a:off x="1417320" y="1280160"/>
+            <a:ext cx="4379976" cy="1325880"/>
+          </a:xfrm>
+          <a:prstGeom prst="rect">
+            <a:avLst/>
+          </a:prstGeom>
+          <a:noFill/>
+          <a:ln/>
+        </p:spPr>
+        <p:txBody>
+          <a:bodyPr wrap="square" rtlCol="0" anchor="ctr"/>
           <a:lstStyle/>
           <a:p>
             <a:pPr marL="0" indent="0">
               <a:buNone/>
             </a:pPr>
             <a:r>
-              <a:rPr lang="en-US" sz="1700" dirty="0">
+              <a:rPr lang="en-US" sz="1500" dirty="0">
                 <a:solidFill>
                   <a:srgbClr val="212121"/>
                 </a:solidFill>
@@ -5761,769 +7461,722 @@
                 <a:ea typeface="Arial" pitchFamily="34" charset="-122"/>
                 <a:cs typeface="Arial" pitchFamily="34" charset="-120"/>
               </a:rPr>
-              <a:t>La instancia que fallaba puede haber sido terminada y reemplazada antes de que te conectes — el diagnóstico se apoya en lo ya registrado:</a:t>
+              <a:t>Cinco señales, cada una con su servicio: métricas y alarmas (CloudWatch), registros (CloudWatch Logs), eventos (EventBridge), auditoría (CloudTrail).</a:t>
+            </a:r>
+            <a:endParaRPr lang="en-US" sz="1500" dirty="0"/>
+          </a:p>
+        </p:txBody>
+      </p:sp>
+      <p:sp>
+        <p:nvSpPr>
+          <p:cNvPr id="9" name="Shape 7"/>
+          <p:cNvSpPr/>
+          <p:nvPr/>
+        </p:nvSpPr>
+        <p:spPr>
+          <a:xfrm>
+            <a:off x="6208776" y="1280160"/>
+            <a:ext cx="5431536" cy="1325880"/>
+          </a:xfrm>
+          <a:prstGeom prst="roundRect">
+            <a:avLst/>
+          </a:prstGeom>
+          <a:solidFill>
+            <a:srgbClr val="E8EAF6"/>
+          </a:solidFill>
+          <a:ln w="15875">
+            <a:solidFill>
+              <a:srgbClr val="3949AB"/>
+            </a:solidFill>
+            <a:prstDash val="solid"/>
+          </a:ln>
+        </p:spPr>
+        <p:txBody>
+          <a:bodyPr/>
+          <a:lstStyle/>
+          <a:p>
+            <a:endParaRPr lang="es-ES"/>
+          </a:p>
+        </p:txBody>
+      </p:sp>
+      <p:sp>
+        <p:nvSpPr>
+          <p:cNvPr id="10" name="Shape 8"/>
+          <p:cNvSpPr/>
+          <p:nvPr/>
+        </p:nvSpPr>
+        <p:spPr>
+          <a:xfrm>
+            <a:off x="6391656" y="1650492"/>
+            <a:ext cx="566928" cy="566928"/>
+          </a:xfrm>
+          <a:prstGeom prst="ellipse">
+            <a:avLst/>
+          </a:prstGeom>
+          <a:solidFill>
+            <a:srgbClr val="3949AB"/>
+          </a:solidFill>
+          <a:ln w="12700">
+            <a:solidFill>
+              <a:srgbClr val="3949AB"/>
+            </a:solidFill>
+            <a:prstDash val="solid"/>
+          </a:ln>
+        </p:spPr>
+        <p:txBody>
+          <a:bodyPr/>
+          <a:lstStyle/>
+          <a:p>
+            <a:endParaRPr lang="es-ES"/>
+          </a:p>
+        </p:txBody>
+      </p:sp>
+      <p:sp>
+        <p:nvSpPr>
+          <p:cNvPr id="11" name="Text 9"/>
+          <p:cNvSpPr/>
+          <p:nvPr/>
+        </p:nvSpPr>
+        <p:spPr>
+          <a:xfrm>
+            <a:off x="6391656" y="1650492"/>
+            <a:ext cx="566928" cy="566928"/>
+          </a:xfrm>
+          <a:prstGeom prst="rect">
+            <a:avLst/>
+          </a:prstGeom>
+          <a:noFill/>
+          <a:ln/>
+        </p:spPr>
+        <p:txBody>
+          <a:bodyPr wrap="square" rtlCol="0" anchor="ctr"/>
+          <a:lstStyle/>
+          <a:p>
+            <a:pPr marL="0" indent="0" algn="ctr">
+              <a:buNone/>
+            </a:pPr>
+            <a:r>
+              <a:rPr lang="en-US" sz="1700" b="1" dirty="0">
+                <a:solidFill>
+                  <a:srgbClr val="FFFFFF"/>
+                </a:solidFill>
+                <a:latin typeface="Arial" pitchFamily="34" charset="0"/>
+                <a:ea typeface="Arial" pitchFamily="34" charset="-122"/>
+                <a:cs typeface="Arial" pitchFamily="34" charset="-120"/>
+              </a:rPr>
+              <a:t>2</a:t>
             </a:r>
             <a:endParaRPr lang="en-US" sz="1700" dirty="0"/>
           </a:p>
         </p:txBody>
       </p:sp>
-      <p:graphicFrame>
-        <p:nvGraphicFramePr>
-          <p:cNvPr id="10" name="Table 0"/>
-          <p:cNvGraphicFramePr>
-            <a:graphicFrameLocks noGrp="1"/>
-          </p:cNvGraphicFramePr>
-          <p:nvPr>
-            <p:extLst>
-              <p:ext uri="{D42A27DB-BD31-4B8C-83A1-F6EECF244321}">
-                <p14:modId xmlns:p14="http://schemas.microsoft.com/office/powerpoint/2010/main" val="1579011935"/>
-              </p:ext>
-            </p:extLst>
-          </p:nvPr>
-        </p:nvGraphicFramePr>
-        <p:xfrm>
-          <a:off x="548640" y="2194560"/>
-          <a:ext cx="11091672" cy="3200400"/>
-        </p:xfrm>
-        <a:graphic>
-          <a:graphicData uri="http://schemas.openxmlformats.org/drawingml/2006/table">
-            <a:tbl>
-              <a:tblPr/>
-              <a:tblGrid>
-                <a:gridCol w="4436669">
-                  <a:extLst>
-                    <a:ext uri="{9D8B030D-6E8A-4147-A177-3AD203B41FA5}">
-                      <a16:colId xmlns:a16="http://schemas.microsoft.com/office/drawing/2014/main" val="20000"/>
-                    </a:ext>
-                  </a:extLst>
-                </a:gridCol>
-                <a:gridCol w="6655003">
-                  <a:extLst>
-                    <a:ext uri="{9D8B030D-6E8A-4147-A177-3AD203B41FA5}">
-                      <a16:colId xmlns:a16="http://schemas.microsoft.com/office/drawing/2014/main" val="20001"/>
-                    </a:ext>
-                  </a:extLst>
-                </a:gridCol>
-              </a:tblGrid>
-              <a:tr h="640080">
-                <a:tc>
-                  <a:txBody>
-                    <a:bodyPr/>
-                    <a:lstStyle/>
-                    <a:p>
-                      <a:pPr marL="0" indent="0" algn="ctr">
-                        <a:buNone/>
-                      </a:pPr>
-                      <a:r>
-                        <a:rPr lang="en-US" sz="1500" b="1" dirty="0">
-                          <a:solidFill>
-                            <a:srgbClr val="FFFFFF"/>
-                          </a:solidFill>
-                          <a:latin typeface="Arial" pitchFamily="34" charset="0"/>
-                          <a:ea typeface="Arial" pitchFamily="34" charset="-122"/>
-                          <a:cs typeface="Arial" pitchFamily="34" charset="-120"/>
-                        </a:rPr>
-                        <a:t>Paso</a:t>
-                      </a:r>
-                      <a:endParaRPr lang="en-US" sz="1500" dirty="0">
-                        <a:latin typeface="Arial" charset="0"/>
-                        <a:ea typeface="Arial" charset="0"/>
-                        <a:cs typeface="Arial" charset="0"/>
-                      </a:endParaRPr>
-                    </a:p>
-                  </a:txBody>
-                  <a:tcPr anchor="ctr">
-                    <a:lnL w="12700" cap="flat" cmpd="sng" algn="ctr">
-                      <a:solidFill>
-                        <a:srgbClr val="EEEEEE"/>
-                      </a:solidFill>
-                      <a:prstDash val="solid"/>
-                      <a:round/>
-                      <a:headEnd type="none" w="med" len="med"/>
-                      <a:tailEnd type="none" w="med" len="med"/>
-                    </a:lnL>
-                    <a:lnR w="12700" cap="flat" cmpd="sng" algn="ctr">
-                      <a:solidFill>
-                        <a:srgbClr val="EEEEEE"/>
-                      </a:solidFill>
-                      <a:prstDash val="solid"/>
-                      <a:round/>
-                      <a:headEnd type="none" w="med" len="med"/>
-                      <a:tailEnd type="none" w="med" len="med"/>
-                    </a:lnR>
-                    <a:lnT w="12700" cap="flat" cmpd="sng" algn="ctr">
-                      <a:solidFill>
-                        <a:srgbClr val="EEEEEE"/>
-                      </a:solidFill>
-                      <a:prstDash val="solid"/>
-                      <a:round/>
-                      <a:headEnd type="none" w="med" len="med"/>
-                      <a:tailEnd type="none" w="med" len="med"/>
-                    </a:lnT>
-                    <a:lnB w="12700" cap="flat" cmpd="sng" algn="ctr">
-                      <a:solidFill>
-                        <a:srgbClr val="EEEEEE"/>
-                      </a:solidFill>
-                      <a:prstDash val="solid"/>
-                      <a:round/>
-                      <a:headEnd type="none" w="med" len="med"/>
-                      <a:tailEnd type="none" w="med" len="med"/>
-                    </a:lnB>
-                    <a:solidFill>
-                      <a:srgbClr val="3949AB"/>
-                    </a:solidFill>
-                  </a:tcPr>
-                </a:tc>
-                <a:tc>
-                  <a:txBody>
-                    <a:bodyPr/>
-                    <a:lstStyle/>
-                    <a:p>
-                      <a:pPr marL="0" indent="0" algn="ctr">
-                        <a:buNone/>
-                      </a:pPr>
-                      <a:r>
-                        <a:rPr lang="en-US" sz="1500" b="1" dirty="0">
-                          <a:solidFill>
-                            <a:srgbClr val="FFFFFF"/>
-                          </a:solidFill>
-                          <a:latin typeface="Arial" pitchFamily="34" charset="0"/>
-                          <a:ea typeface="Arial" pitchFamily="34" charset="-122"/>
-                          <a:cs typeface="Arial" pitchFamily="34" charset="-120"/>
-                        </a:rPr>
-                        <a:t>Con qué señal</a:t>
-                      </a:r>
-                      <a:endParaRPr lang="en-US" sz="1500" dirty="0">
-                        <a:latin typeface="Arial" charset="0"/>
-                        <a:ea typeface="Arial" charset="0"/>
-                        <a:cs typeface="Arial" charset="0"/>
-                      </a:endParaRPr>
-                    </a:p>
-                  </a:txBody>
-                  <a:tcPr anchor="ctr">
-                    <a:lnL w="12700" cap="flat" cmpd="sng" algn="ctr">
-                      <a:solidFill>
-                        <a:srgbClr val="EEEEEE"/>
-                      </a:solidFill>
-                      <a:prstDash val="solid"/>
-                      <a:round/>
-                      <a:headEnd type="none" w="med" len="med"/>
-                      <a:tailEnd type="none" w="med" len="med"/>
-                    </a:lnL>
-                    <a:lnR w="12700" cap="flat" cmpd="sng" algn="ctr">
-                      <a:solidFill>
-                        <a:srgbClr val="EEEEEE"/>
-                      </a:solidFill>
-                      <a:prstDash val="solid"/>
-                      <a:round/>
-                      <a:headEnd type="none" w="med" len="med"/>
-                      <a:tailEnd type="none" w="med" len="med"/>
-                    </a:lnR>
-                    <a:lnT w="12700" cap="flat" cmpd="sng" algn="ctr">
-                      <a:solidFill>
-                        <a:srgbClr val="EEEEEE"/>
-                      </a:solidFill>
-                      <a:prstDash val="solid"/>
-                      <a:round/>
-                      <a:headEnd type="none" w="med" len="med"/>
-                      <a:tailEnd type="none" w="med" len="med"/>
-                    </a:lnT>
-                    <a:lnB w="12700" cap="flat" cmpd="sng" algn="ctr">
-                      <a:solidFill>
-                        <a:srgbClr val="EEEEEE"/>
-                      </a:solidFill>
-                      <a:prstDash val="solid"/>
-                      <a:round/>
-                      <a:headEnd type="none" w="med" len="med"/>
-                      <a:tailEnd type="none" w="med" len="med"/>
-                    </a:lnB>
-                    <a:solidFill>
-                      <a:srgbClr val="3949AB"/>
-                    </a:solidFill>
-                  </a:tcPr>
-                </a:tc>
-                <a:extLst>
-                  <a:ext uri="{0D108BD9-81ED-4DB2-BD59-A6C34878D82A}">
-                    <a16:rowId xmlns:a16="http://schemas.microsoft.com/office/drawing/2014/main" val="10000"/>
-                  </a:ext>
-                </a:extLst>
-              </a:tr>
-              <a:tr h="640080">
-                <a:tc>
-                  <a:txBody>
-                    <a:bodyPr/>
-                    <a:lstStyle/>
-                    <a:p>
-                      <a:pPr marL="0" indent="0">
-                        <a:buNone/>
-                      </a:pPr>
-                      <a:r>
-                        <a:rPr lang="en-US" sz="1400" b="1" dirty="0">
-                          <a:solidFill>
-                            <a:srgbClr val="212121"/>
-                          </a:solidFill>
-                          <a:latin typeface="Arial" pitchFamily="34" charset="0"/>
-                          <a:ea typeface="Arial" pitchFamily="34" charset="-122"/>
-                          <a:cs typeface="Arial" pitchFamily="34" charset="-120"/>
-                        </a:rPr>
-                        <a:t>1. ¿Cuándo empezó?</a:t>
-                      </a:r>
-                      <a:endParaRPr lang="en-US" sz="1400" dirty="0">
-                        <a:latin typeface="Arial" charset="0"/>
-                        <a:ea typeface="Arial" charset="0"/>
-                        <a:cs typeface="Arial" charset="0"/>
-                      </a:endParaRPr>
-                    </a:p>
-                  </a:txBody>
-                  <a:tcPr anchor="ctr">
-                    <a:lnL w="12700" cap="flat" cmpd="sng" algn="ctr">
-                      <a:solidFill>
-                        <a:srgbClr val="EEEEEE"/>
-                      </a:solidFill>
-                      <a:prstDash val="solid"/>
-                      <a:round/>
-                      <a:headEnd type="none" w="med" len="med"/>
-                      <a:tailEnd type="none" w="med" len="med"/>
-                    </a:lnL>
-                    <a:lnR w="12700" cap="flat" cmpd="sng" algn="ctr">
-                      <a:solidFill>
-                        <a:srgbClr val="EEEEEE"/>
-                      </a:solidFill>
-                      <a:prstDash val="solid"/>
-                      <a:round/>
-                      <a:headEnd type="none" w="med" len="med"/>
-                      <a:tailEnd type="none" w="med" len="med"/>
-                    </a:lnR>
-                    <a:lnT w="12700" cap="flat" cmpd="sng" algn="ctr">
-                      <a:solidFill>
-                        <a:srgbClr val="EEEEEE"/>
-                      </a:solidFill>
-                      <a:prstDash val="solid"/>
-                      <a:round/>
-                      <a:headEnd type="none" w="med" len="med"/>
-                      <a:tailEnd type="none" w="med" len="med"/>
-                    </a:lnT>
-                    <a:lnB w="12700" cap="flat" cmpd="sng" algn="ctr">
-                      <a:solidFill>
-                        <a:srgbClr val="EEEEEE"/>
-                      </a:solidFill>
-                      <a:prstDash val="solid"/>
-                      <a:round/>
-                      <a:headEnd type="none" w="med" len="med"/>
-                      <a:tailEnd type="none" w="med" len="med"/>
-                    </a:lnB>
-                    <a:solidFill>
-                      <a:srgbClr val="FFFFFF"/>
-                    </a:solidFill>
-                  </a:tcPr>
-                </a:tc>
-                <a:tc>
-                  <a:txBody>
-                    <a:bodyPr/>
-                    <a:lstStyle/>
-                    <a:p>
-                      <a:pPr marL="0" indent="0">
-                        <a:buNone/>
-                      </a:pPr>
-                      <a:r>
-                        <a:rPr lang="en-US" sz="1400" dirty="0">
-                          <a:solidFill>
-                            <a:srgbClr val="212121"/>
-                          </a:solidFill>
-                          <a:latin typeface="Arial" pitchFamily="34" charset="0"/>
-                          <a:ea typeface="Arial" pitchFamily="34" charset="-122"/>
-                          <a:cs typeface="Arial" pitchFamily="34" charset="-120"/>
-                        </a:rPr>
-                        <a:t>Métricas — el momento exacto en que algo cruzó un umbral</a:t>
-                      </a:r>
-                      <a:endParaRPr lang="en-US" sz="1400" dirty="0">
-                        <a:latin typeface="Arial" charset="0"/>
-                        <a:ea typeface="Arial" charset="0"/>
-                        <a:cs typeface="Arial" charset="0"/>
-                      </a:endParaRPr>
-                    </a:p>
-                  </a:txBody>
-                  <a:tcPr anchor="ctr">
-                    <a:lnL w="12700" cap="flat" cmpd="sng" algn="ctr">
-                      <a:solidFill>
-                        <a:srgbClr val="EEEEEE"/>
-                      </a:solidFill>
-                      <a:prstDash val="solid"/>
-                      <a:round/>
-                      <a:headEnd type="none" w="med" len="med"/>
-                      <a:tailEnd type="none" w="med" len="med"/>
-                    </a:lnL>
-                    <a:lnR w="12700" cap="flat" cmpd="sng" algn="ctr">
-                      <a:solidFill>
-                        <a:srgbClr val="EEEEEE"/>
-                      </a:solidFill>
-                      <a:prstDash val="solid"/>
-                      <a:round/>
-                      <a:headEnd type="none" w="med" len="med"/>
-                      <a:tailEnd type="none" w="med" len="med"/>
-                    </a:lnR>
-                    <a:lnT w="12700" cap="flat" cmpd="sng" algn="ctr">
-                      <a:solidFill>
-                        <a:srgbClr val="EEEEEE"/>
-                      </a:solidFill>
-                      <a:prstDash val="solid"/>
-                      <a:round/>
-                      <a:headEnd type="none" w="med" len="med"/>
-                      <a:tailEnd type="none" w="med" len="med"/>
-                    </a:lnT>
-                    <a:lnB w="12700" cap="flat" cmpd="sng" algn="ctr">
-                      <a:solidFill>
-                        <a:srgbClr val="EEEEEE"/>
-                      </a:solidFill>
-                      <a:prstDash val="solid"/>
-                      <a:round/>
-                      <a:headEnd type="none" w="med" len="med"/>
-                      <a:tailEnd type="none" w="med" len="med"/>
-                    </a:lnB>
-                    <a:solidFill>
-                      <a:srgbClr val="FFFFFF"/>
-                    </a:solidFill>
-                  </a:tcPr>
-                </a:tc>
-                <a:extLst>
-                  <a:ext uri="{0D108BD9-81ED-4DB2-BD59-A6C34878D82A}">
-                    <a16:rowId xmlns:a16="http://schemas.microsoft.com/office/drawing/2014/main" val="10001"/>
-                  </a:ext>
-                </a:extLst>
-              </a:tr>
-              <a:tr h="640080">
-                <a:tc>
-                  <a:txBody>
-                    <a:bodyPr/>
-                    <a:lstStyle/>
-                    <a:p>
-                      <a:pPr marL="0" indent="0">
-                        <a:buNone/>
-                      </a:pPr>
-                      <a:r>
-                        <a:rPr lang="en-US" sz="1400" b="1" dirty="0">
-                          <a:solidFill>
-                            <a:srgbClr val="212121"/>
-                          </a:solidFill>
-                          <a:latin typeface="Arial" pitchFamily="34" charset="0"/>
-                          <a:ea typeface="Arial" pitchFamily="34" charset="-122"/>
-                          <a:cs typeface="Arial" pitchFamily="34" charset="-120"/>
-                        </a:rPr>
-                        <a:t>2. ¿Qué capa está implicada?</a:t>
-                      </a:r>
-                      <a:endParaRPr lang="en-US" sz="1400" dirty="0">
-                        <a:latin typeface="Arial" charset="0"/>
-                        <a:ea typeface="Arial" charset="0"/>
-                        <a:cs typeface="Arial" charset="0"/>
-                      </a:endParaRPr>
-                    </a:p>
-                  </a:txBody>
-                  <a:tcPr anchor="ctr">
-                    <a:lnL w="12700" cap="flat" cmpd="sng" algn="ctr">
-                      <a:solidFill>
-                        <a:srgbClr val="EEEEEE"/>
-                      </a:solidFill>
-                      <a:prstDash val="solid"/>
-                      <a:round/>
-                      <a:headEnd type="none" w="med" len="med"/>
-                      <a:tailEnd type="none" w="med" len="med"/>
-                    </a:lnL>
-                    <a:lnR w="12700" cap="flat" cmpd="sng" algn="ctr">
-                      <a:solidFill>
-                        <a:srgbClr val="EEEEEE"/>
-                      </a:solidFill>
-                      <a:prstDash val="solid"/>
-                      <a:round/>
-                      <a:headEnd type="none" w="med" len="med"/>
-                      <a:tailEnd type="none" w="med" len="med"/>
-                    </a:lnR>
-                    <a:lnT w="12700" cap="flat" cmpd="sng" algn="ctr">
-                      <a:solidFill>
-                        <a:srgbClr val="EEEEEE"/>
-                      </a:solidFill>
-                      <a:prstDash val="solid"/>
-                      <a:round/>
-                      <a:headEnd type="none" w="med" len="med"/>
-                      <a:tailEnd type="none" w="med" len="med"/>
-                    </a:lnT>
-                    <a:lnB w="12700" cap="flat" cmpd="sng" algn="ctr">
-                      <a:solidFill>
-                        <a:srgbClr val="EEEEEE"/>
-                      </a:solidFill>
-                      <a:prstDash val="solid"/>
-                      <a:round/>
-                      <a:headEnd type="none" w="med" len="med"/>
-                      <a:tailEnd type="none" w="med" len="med"/>
-                    </a:lnB>
-                    <a:solidFill>
-                      <a:srgbClr val="F5F5F5"/>
-                    </a:solidFill>
-                  </a:tcPr>
-                </a:tc>
-                <a:tc>
-                  <a:txBody>
-                    <a:bodyPr/>
-                    <a:lstStyle/>
-                    <a:p>
-                      <a:pPr marL="0" indent="0">
-                        <a:buNone/>
-                      </a:pPr>
-                      <a:r>
-                        <a:rPr lang="en-US" sz="1400" dirty="0">
-                          <a:solidFill>
-                            <a:srgbClr val="212121"/>
-                          </a:solidFill>
-                          <a:latin typeface="Arial" pitchFamily="34" charset="0"/>
-                          <a:ea typeface="Arial" pitchFamily="34" charset="-122"/>
-                          <a:cs typeface="Arial" pitchFamily="34" charset="-120"/>
-                        </a:rPr>
-                        <a:t>Métricas por capa — compara borde, aplicación y datos</a:t>
-                      </a:r>
-                      <a:endParaRPr lang="en-US" sz="1400" dirty="0">
-                        <a:latin typeface="Arial" charset="0"/>
-                        <a:ea typeface="Arial" charset="0"/>
-                        <a:cs typeface="Arial" charset="0"/>
-                      </a:endParaRPr>
-                    </a:p>
-                  </a:txBody>
-                  <a:tcPr anchor="ctr">
-                    <a:lnL w="12700" cap="flat" cmpd="sng" algn="ctr">
-                      <a:solidFill>
-                        <a:srgbClr val="EEEEEE"/>
-                      </a:solidFill>
-                      <a:prstDash val="solid"/>
-                      <a:round/>
-                      <a:headEnd type="none" w="med" len="med"/>
-                      <a:tailEnd type="none" w="med" len="med"/>
-                    </a:lnL>
-                    <a:lnR w="12700" cap="flat" cmpd="sng" algn="ctr">
-                      <a:solidFill>
-                        <a:srgbClr val="EEEEEE"/>
-                      </a:solidFill>
-                      <a:prstDash val="solid"/>
-                      <a:round/>
-                      <a:headEnd type="none" w="med" len="med"/>
-                      <a:tailEnd type="none" w="med" len="med"/>
-                    </a:lnR>
-                    <a:lnT w="12700" cap="flat" cmpd="sng" algn="ctr">
-                      <a:solidFill>
-                        <a:srgbClr val="EEEEEE"/>
-                      </a:solidFill>
-                      <a:prstDash val="solid"/>
-                      <a:round/>
-                      <a:headEnd type="none" w="med" len="med"/>
-                      <a:tailEnd type="none" w="med" len="med"/>
-                    </a:lnT>
-                    <a:lnB w="12700" cap="flat" cmpd="sng" algn="ctr">
-                      <a:solidFill>
-                        <a:srgbClr val="EEEEEE"/>
-                      </a:solidFill>
-                      <a:prstDash val="solid"/>
-                      <a:round/>
-                      <a:headEnd type="none" w="med" len="med"/>
-                      <a:tailEnd type="none" w="med" len="med"/>
-                    </a:lnB>
-                    <a:solidFill>
-                      <a:srgbClr val="F5F5F5"/>
-                    </a:solidFill>
-                  </a:tcPr>
-                </a:tc>
-                <a:extLst>
-                  <a:ext uri="{0D108BD9-81ED-4DB2-BD59-A6C34878D82A}">
-                    <a16:rowId xmlns:a16="http://schemas.microsoft.com/office/drawing/2014/main" val="10002"/>
-                  </a:ext>
-                </a:extLst>
-              </a:tr>
-              <a:tr h="640080">
-                <a:tc>
-                  <a:txBody>
-                    <a:bodyPr/>
-                    <a:lstStyle/>
-                    <a:p>
-                      <a:pPr marL="0" indent="0">
-                        <a:buNone/>
-                      </a:pPr>
-                      <a:r>
-                        <a:rPr lang="en-US" sz="1400" b="1" dirty="0">
-                          <a:solidFill>
-                            <a:srgbClr val="212121"/>
-                          </a:solidFill>
-                          <a:latin typeface="Arial" pitchFamily="34" charset="0"/>
-                          <a:ea typeface="Arial" pitchFamily="34" charset="-122"/>
-                          <a:cs typeface="Arial" pitchFamily="34" charset="-120"/>
-                        </a:rPr>
-                        <a:t>3. ¿Qué error concreto ha ocurrido?</a:t>
-                      </a:r>
-                      <a:endParaRPr lang="en-US" sz="1400" dirty="0">
-                        <a:latin typeface="Arial" charset="0"/>
-                        <a:ea typeface="Arial" charset="0"/>
-                        <a:cs typeface="Arial" charset="0"/>
-                      </a:endParaRPr>
-                    </a:p>
-                  </a:txBody>
-                  <a:tcPr anchor="ctr">
-                    <a:lnL w="12700" cap="flat" cmpd="sng" algn="ctr">
-                      <a:solidFill>
-                        <a:srgbClr val="EEEEEE"/>
-                      </a:solidFill>
-                      <a:prstDash val="solid"/>
-                      <a:round/>
-                      <a:headEnd type="none" w="med" len="med"/>
-                      <a:tailEnd type="none" w="med" len="med"/>
-                    </a:lnL>
-                    <a:lnR w="12700" cap="flat" cmpd="sng" algn="ctr">
-                      <a:solidFill>
-                        <a:srgbClr val="EEEEEE"/>
-                      </a:solidFill>
-                      <a:prstDash val="solid"/>
-                      <a:round/>
-                      <a:headEnd type="none" w="med" len="med"/>
-                      <a:tailEnd type="none" w="med" len="med"/>
-                    </a:lnR>
-                    <a:lnT w="12700" cap="flat" cmpd="sng" algn="ctr">
-                      <a:solidFill>
-                        <a:srgbClr val="EEEEEE"/>
-                      </a:solidFill>
-                      <a:prstDash val="solid"/>
-                      <a:round/>
-                      <a:headEnd type="none" w="med" len="med"/>
-                      <a:tailEnd type="none" w="med" len="med"/>
-                    </a:lnT>
-                    <a:lnB w="12700" cap="flat" cmpd="sng" algn="ctr">
-                      <a:solidFill>
-                        <a:srgbClr val="EEEEEE"/>
-                      </a:solidFill>
-                      <a:prstDash val="solid"/>
-                      <a:round/>
-                      <a:headEnd type="none" w="med" len="med"/>
-                      <a:tailEnd type="none" w="med" len="med"/>
-                    </a:lnB>
-                    <a:solidFill>
-                      <a:srgbClr val="FFFFFF"/>
-                    </a:solidFill>
-                  </a:tcPr>
-                </a:tc>
-                <a:tc>
-                  <a:txBody>
-                    <a:bodyPr/>
-                    <a:lstStyle/>
-                    <a:p>
-                      <a:pPr marL="0" indent="0">
-                        <a:buNone/>
-                      </a:pPr>
-                      <a:r>
-                        <a:rPr lang="en-US" sz="1400" dirty="0">
-                          <a:solidFill>
-                            <a:srgbClr val="212121"/>
-                          </a:solidFill>
-                          <a:latin typeface="Arial" pitchFamily="34" charset="0"/>
-                          <a:ea typeface="Arial" pitchFamily="34" charset="-122"/>
-                          <a:cs typeface="Arial" pitchFamily="34" charset="-120"/>
-                        </a:rPr>
-                        <a:t>Registros de esa capa, en esa ventana de tiempo</a:t>
-                      </a:r>
-                      <a:endParaRPr lang="en-US" sz="1400" dirty="0">
-                        <a:latin typeface="Arial" charset="0"/>
-                        <a:ea typeface="Arial" charset="0"/>
-                        <a:cs typeface="Arial" charset="0"/>
-                      </a:endParaRPr>
-                    </a:p>
-                  </a:txBody>
-                  <a:tcPr anchor="ctr">
-                    <a:lnL w="12700" cap="flat" cmpd="sng" algn="ctr">
-                      <a:solidFill>
-                        <a:srgbClr val="EEEEEE"/>
-                      </a:solidFill>
-                      <a:prstDash val="solid"/>
-                      <a:round/>
-                      <a:headEnd type="none" w="med" len="med"/>
-                      <a:tailEnd type="none" w="med" len="med"/>
-                    </a:lnL>
-                    <a:lnR w="12700" cap="flat" cmpd="sng" algn="ctr">
-                      <a:solidFill>
-                        <a:srgbClr val="EEEEEE"/>
-                      </a:solidFill>
-                      <a:prstDash val="solid"/>
-                      <a:round/>
-                      <a:headEnd type="none" w="med" len="med"/>
-                      <a:tailEnd type="none" w="med" len="med"/>
-                    </a:lnR>
-                    <a:lnT w="12700" cap="flat" cmpd="sng" algn="ctr">
-                      <a:solidFill>
-                        <a:srgbClr val="EEEEEE"/>
-                      </a:solidFill>
-                      <a:prstDash val="solid"/>
-                      <a:round/>
-                      <a:headEnd type="none" w="med" len="med"/>
-                      <a:tailEnd type="none" w="med" len="med"/>
-                    </a:lnT>
-                    <a:lnB w="12700" cap="flat" cmpd="sng" algn="ctr">
-                      <a:solidFill>
-                        <a:srgbClr val="EEEEEE"/>
-                      </a:solidFill>
-                      <a:prstDash val="solid"/>
-                      <a:round/>
-                      <a:headEnd type="none" w="med" len="med"/>
-                      <a:tailEnd type="none" w="med" len="med"/>
-                    </a:lnB>
-                    <a:solidFill>
-                      <a:srgbClr val="FFFFFF"/>
-                    </a:solidFill>
-                  </a:tcPr>
-                </a:tc>
-                <a:extLst>
-                  <a:ext uri="{0D108BD9-81ED-4DB2-BD59-A6C34878D82A}">
-                    <a16:rowId xmlns:a16="http://schemas.microsoft.com/office/drawing/2014/main" val="10003"/>
-                  </a:ext>
-                </a:extLst>
-              </a:tr>
-              <a:tr h="640080">
-                <a:tc>
-                  <a:txBody>
-                    <a:bodyPr/>
-                    <a:lstStyle/>
-                    <a:p>
-                      <a:pPr marL="0" indent="0">
-                        <a:buNone/>
-                      </a:pPr>
-                      <a:r>
-                        <a:rPr lang="en-US" sz="1400" b="1" dirty="0">
-                          <a:solidFill>
-                            <a:srgbClr val="212121"/>
-                          </a:solidFill>
-                          <a:latin typeface="Arial" pitchFamily="34" charset="0"/>
-                          <a:ea typeface="Arial" pitchFamily="34" charset="-122"/>
-                          <a:cs typeface="Arial" pitchFamily="34" charset="-120"/>
-                        </a:rPr>
-                        <a:t>4. ¿Alguien ha cambiado algo antes?</a:t>
-                      </a:r>
-                      <a:endParaRPr lang="en-US" sz="1400" dirty="0">
-                        <a:latin typeface="Arial" charset="0"/>
-                        <a:ea typeface="Arial" charset="0"/>
-                        <a:cs typeface="Arial" charset="0"/>
-                      </a:endParaRPr>
-                    </a:p>
-                  </a:txBody>
-                  <a:tcPr anchor="ctr">
-                    <a:lnL w="12700" cap="flat" cmpd="sng" algn="ctr">
-                      <a:solidFill>
-                        <a:srgbClr val="EEEEEE"/>
-                      </a:solidFill>
-                      <a:prstDash val="solid"/>
-                      <a:round/>
-                      <a:headEnd type="none" w="med" len="med"/>
-                      <a:tailEnd type="none" w="med" len="med"/>
-                    </a:lnL>
-                    <a:lnR w="12700" cap="flat" cmpd="sng" algn="ctr">
-                      <a:solidFill>
-                        <a:srgbClr val="EEEEEE"/>
-                      </a:solidFill>
-                      <a:prstDash val="solid"/>
-                      <a:round/>
-                      <a:headEnd type="none" w="med" len="med"/>
-                      <a:tailEnd type="none" w="med" len="med"/>
-                    </a:lnR>
-                    <a:lnT w="12700" cap="flat" cmpd="sng" algn="ctr">
-                      <a:solidFill>
-                        <a:srgbClr val="EEEEEE"/>
-                      </a:solidFill>
-                      <a:prstDash val="solid"/>
-                      <a:round/>
-                      <a:headEnd type="none" w="med" len="med"/>
-                      <a:tailEnd type="none" w="med" len="med"/>
-                    </a:lnT>
-                    <a:lnB w="12700" cap="flat" cmpd="sng" algn="ctr">
-                      <a:solidFill>
-                        <a:srgbClr val="EEEEEE"/>
-                      </a:solidFill>
-                      <a:prstDash val="solid"/>
-                      <a:round/>
-                      <a:headEnd type="none" w="med" len="med"/>
-                      <a:tailEnd type="none" w="med" len="med"/>
-                    </a:lnB>
-                    <a:solidFill>
-                      <a:srgbClr val="F5F5F5"/>
-                    </a:solidFill>
-                  </a:tcPr>
-                </a:tc>
-                <a:tc>
-                  <a:txBody>
-                    <a:bodyPr/>
-                    <a:lstStyle/>
-                    <a:p>
-                      <a:pPr marL="0" indent="0">
-                        <a:buNone/>
-                      </a:pPr>
-                      <a:r>
-                        <a:rPr lang="en-US" sz="1400" dirty="0">
-                          <a:solidFill>
-                            <a:srgbClr val="212121"/>
-                          </a:solidFill>
-                          <a:latin typeface="Arial" pitchFamily="34" charset="0"/>
-                          <a:ea typeface="Arial" pitchFamily="34" charset="-122"/>
-                          <a:cs typeface="Arial" pitchFamily="34" charset="-120"/>
-                        </a:rPr>
-                        <a:t>Auditoría — modificaciones cerca del momento del fallo</a:t>
-                      </a:r>
-                      <a:endParaRPr lang="en-US" sz="1400" dirty="0">
-                        <a:latin typeface="Arial" charset="0"/>
-                        <a:ea typeface="Arial" charset="0"/>
-                        <a:cs typeface="Arial" charset="0"/>
-                      </a:endParaRPr>
-                    </a:p>
-                  </a:txBody>
-                  <a:tcPr anchor="ctr">
-                    <a:lnL w="12700" cap="flat" cmpd="sng" algn="ctr">
-                      <a:solidFill>
-                        <a:srgbClr val="EEEEEE"/>
-                      </a:solidFill>
-                      <a:prstDash val="solid"/>
-                      <a:round/>
-                      <a:headEnd type="none" w="med" len="med"/>
-                      <a:tailEnd type="none" w="med" len="med"/>
-                    </a:lnL>
-                    <a:lnR w="12700" cap="flat" cmpd="sng" algn="ctr">
-                      <a:solidFill>
-                        <a:srgbClr val="EEEEEE"/>
-                      </a:solidFill>
-                      <a:prstDash val="solid"/>
-                      <a:round/>
-                      <a:headEnd type="none" w="med" len="med"/>
-                      <a:tailEnd type="none" w="med" len="med"/>
-                    </a:lnR>
-                    <a:lnT w="12700" cap="flat" cmpd="sng" algn="ctr">
-                      <a:solidFill>
-                        <a:srgbClr val="EEEEEE"/>
-                      </a:solidFill>
-                      <a:prstDash val="solid"/>
-                      <a:round/>
-                      <a:headEnd type="none" w="med" len="med"/>
-                      <a:tailEnd type="none" w="med" len="med"/>
-                    </a:lnT>
-                    <a:lnB w="12700" cap="flat" cmpd="sng" algn="ctr">
-                      <a:solidFill>
-                        <a:srgbClr val="EEEEEE"/>
-                      </a:solidFill>
-                      <a:prstDash val="solid"/>
-                      <a:round/>
-                      <a:headEnd type="none" w="med" len="med"/>
-                      <a:tailEnd type="none" w="med" len="med"/>
-                    </a:lnB>
-                    <a:solidFill>
-                      <a:srgbClr val="F5F5F5"/>
-                    </a:solidFill>
-                  </a:tcPr>
-                </a:tc>
-                <a:extLst>
-                  <a:ext uri="{0D108BD9-81ED-4DB2-BD59-A6C34878D82A}">
-                    <a16:rowId xmlns:a16="http://schemas.microsoft.com/office/drawing/2014/main" val="10004"/>
-                  </a:ext>
-                </a:extLst>
-              </a:tr>
-            </a:tbl>
-          </a:graphicData>
-        </a:graphic>
-      </p:graphicFrame>
+      <p:sp>
+        <p:nvSpPr>
+          <p:cNvPr id="12" name="Text 10"/>
+          <p:cNvSpPr/>
+          <p:nvPr/>
+        </p:nvSpPr>
+        <p:spPr>
+          <a:xfrm>
+            <a:off x="7077456" y="1280160"/>
+            <a:ext cx="4379976" cy="1325880"/>
+          </a:xfrm>
+          <a:prstGeom prst="rect">
+            <a:avLst/>
+          </a:prstGeom>
+          <a:noFill/>
+          <a:ln/>
+        </p:spPr>
+        <p:txBody>
+          <a:bodyPr wrap="square" rtlCol="0" anchor="ctr"/>
+          <a:lstStyle/>
+          <a:p>
+            <a:pPr marL="0" indent="0">
+              <a:buNone/>
+            </a:pPr>
+            <a:r>
+              <a:rPr lang="en-US" sz="1500" dirty="0">
+                <a:solidFill>
+                  <a:srgbClr val="212121"/>
+                </a:solidFill>
+                <a:latin typeface="Arial" pitchFamily="34" charset="0"/>
+                <a:ea typeface="Arial" pitchFamily="34" charset="-122"/>
+                <a:cs typeface="Arial" pitchFamily="34" charset="-120"/>
+              </a:rPr>
+              <a:t>Un dashboard de CloudWatch agrupa las métricas que consultas a menudo, en vez de ir saltando de una en una.</a:t>
+            </a:r>
+            <a:endParaRPr lang="en-US" sz="1500" dirty="0"/>
+          </a:p>
+        </p:txBody>
+      </p:sp>
+      <p:sp>
+        <p:nvSpPr>
+          <p:cNvPr id="13" name="Shape 11"/>
+          <p:cNvSpPr/>
+          <p:nvPr/>
+        </p:nvSpPr>
+        <p:spPr>
+          <a:xfrm>
+            <a:off x="548640" y="2834640"/>
+            <a:ext cx="5431536" cy="1325880"/>
+          </a:xfrm>
+          <a:prstGeom prst="roundRect">
+            <a:avLst/>
+          </a:prstGeom>
+          <a:solidFill>
+            <a:srgbClr val="E8EAF6"/>
+          </a:solidFill>
+          <a:ln w="15875">
+            <a:solidFill>
+              <a:srgbClr val="3949AB"/>
+            </a:solidFill>
+            <a:prstDash val="solid"/>
+          </a:ln>
+        </p:spPr>
+        <p:txBody>
+          <a:bodyPr/>
+          <a:lstStyle/>
+          <a:p>
+            <a:endParaRPr lang="es-ES"/>
+          </a:p>
+        </p:txBody>
+      </p:sp>
+      <p:sp>
+        <p:nvSpPr>
+          <p:cNvPr id="14" name="Shape 12"/>
+          <p:cNvSpPr/>
+          <p:nvPr/>
+        </p:nvSpPr>
+        <p:spPr>
+          <a:xfrm>
+            <a:off x="731520" y="3204972"/>
+            <a:ext cx="566928" cy="566928"/>
+          </a:xfrm>
+          <a:prstGeom prst="ellipse">
+            <a:avLst/>
+          </a:prstGeom>
+          <a:solidFill>
+            <a:srgbClr val="3949AB"/>
+          </a:solidFill>
+          <a:ln w="12700">
+            <a:solidFill>
+              <a:srgbClr val="3949AB"/>
+            </a:solidFill>
+            <a:prstDash val="solid"/>
+          </a:ln>
+        </p:spPr>
+        <p:txBody>
+          <a:bodyPr/>
+          <a:lstStyle/>
+          <a:p>
+            <a:endParaRPr lang="es-ES"/>
+          </a:p>
+        </p:txBody>
+      </p:sp>
+      <p:sp>
+        <p:nvSpPr>
+          <p:cNvPr id="15" name="Text 13"/>
+          <p:cNvSpPr/>
+          <p:nvPr/>
+        </p:nvSpPr>
+        <p:spPr>
+          <a:xfrm>
+            <a:off x="731520" y="3204972"/>
+            <a:ext cx="566928" cy="566928"/>
+          </a:xfrm>
+          <a:prstGeom prst="rect">
+            <a:avLst/>
+          </a:prstGeom>
+          <a:noFill/>
+          <a:ln/>
+        </p:spPr>
+        <p:txBody>
+          <a:bodyPr wrap="square" rtlCol="0" anchor="ctr"/>
+          <a:lstStyle/>
+          <a:p>
+            <a:pPr marL="0" indent="0" algn="ctr">
+              <a:buNone/>
+            </a:pPr>
+            <a:r>
+              <a:rPr lang="en-US" sz="1700" b="1" dirty="0">
+                <a:solidFill>
+                  <a:srgbClr val="FFFFFF"/>
+                </a:solidFill>
+                <a:latin typeface="Arial" pitchFamily="34" charset="0"/>
+                <a:ea typeface="Arial" pitchFamily="34" charset="-122"/>
+                <a:cs typeface="Arial" pitchFamily="34" charset="-120"/>
+              </a:rPr>
+              <a:t>3</a:t>
+            </a:r>
+            <a:endParaRPr lang="en-US" sz="1700" dirty="0"/>
+          </a:p>
+        </p:txBody>
+      </p:sp>
+      <p:sp>
+        <p:nvSpPr>
+          <p:cNvPr id="16" name="Text 14"/>
+          <p:cNvSpPr/>
+          <p:nvPr/>
+        </p:nvSpPr>
+        <p:spPr>
+          <a:xfrm>
+            <a:off x="1417320" y="2834640"/>
+            <a:ext cx="4379976" cy="1325880"/>
+          </a:xfrm>
+          <a:prstGeom prst="rect">
+            <a:avLst/>
+          </a:prstGeom>
+          <a:noFill/>
+          <a:ln/>
+        </p:spPr>
+        <p:txBody>
+          <a:bodyPr wrap="square" rtlCol="0" anchor="ctr"/>
+          <a:lstStyle/>
+          <a:p>
+            <a:pPr marL="0" indent="0">
+              <a:buNone/>
+            </a:pPr>
+            <a:r>
+              <a:rPr lang="en-US" sz="1500" dirty="0">
+                <a:solidFill>
+                  <a:srgbClr val="212121"/>
+                </a:solidFill>
+                <a:latin typeface="Arial" pitchFamily="34" charset="0"/>
+                <a:ea typeface="Arial" pitchFamily="34" charset="-122"/>
+                <a:cs typeface="Arial" pitchFamily="34" charset="-120"/>
+              </a:rPr>
+              <a:t>Monitorizar todo sin criterio genera ruido y hace que dejes de prestar atención a las alarmas que sí importan.</a:t>
+            </a:r>
+            <a:endParaRPr lang="en-US" sz="1500" dirty="0"/>
+          </a:p>
+        </p:txBody>
+      </p:sp>
+      <p:sp>
+        <p:nvSpPr>
+          <p:cNvPr id="17" name="Shape 15"/>
+          <p:cNvSpPr/>
+          <p:nvPr/>
+        </p:nvSpPr>
+        <p:spPr>
+          <a:xfrm>
+            <a:off x="6208776" y="2834640"/>
+            <a:ext cx="5431536" cy="1325880"/>
+          </a:xfrm>
+          <a:prstGeom prst="roundRect">
+            <a:avLst/>
+          </a:prstGeom>
+          <a:solidFill>
+            <a:srgbClr val="E8EAF6"/>
+          </a:solidFill>
+          <a:ln w="15875">
+            <a:solidFill>
+              <a:srgbClr val="3949AB"/>
+            </a:solidFill>
+            <a:prstDash val="solid"/>
+          </a:ln>
+        </p:spPr>
+        <p:txBody>
+          <a:bodyPr/>
+          <a:lstStyle/>
+          <a:p>
+            <a:endParaRPr lang="es-ES"/>
+          </a:p>
+        </p:txBody>
+      </p:sp>
+      <p:sp>
+        <p:nvSpPr>
+          <p:cNvPr id="18" name="Shape 16"/>
+          <p:cNvSpPr/>
+          <p:nvPr/>
+        </p:nvSpPr>
+        <p:spPr>
+          <a:xfrm>
+            <a:off x="6391656" y="3204972"/>
+            <a:ext cx="566928" cy="566928"/>
+          </a:xfrm>
+          <a:prstGeom prst="ellipse">
+            <a:avLst/>
+          </a:prstGeom>
+          <a:solidFill>
+            <a:srgbClr val="3949AB"/>
+          </a:solidFill>
+          <a:ln w="12700">
+            <a:solidFill>
+              <a:srgbClr val="3949AB"/>
+            </a:solidFill>
+            <a:prstDash val="solid"/>
+          </a:ln>
+        </p:spPr>
+        <p:txBody>
+          <a:bodyPr/>
+          <a:lstStyle/>
+          <a:p>
+            <a:endParaRPr lang="es-ES"/>
+          </a:p>
+        </p:txBody>
+      </p:sp>
+      <p:sp>
+        <p:nvSpPr>
+          <p:cNvPr id="19" name="Text 17"/>
+          <p:cNvSpPr/>
+          <p:nvPr/>
+        </p:nvSpPr>
+        <p:spPr>
+          <a:xfrm>
+            <a:off x="6391656" y="3204972"/>
+            <a:ext cx="566928" cy="566928"/>
+          </a:xfrm>
+          <a:prstGeom prst="rect">
+            <a:avLst/>
+          </a:prstGeom>
+          <a:noFill/>
+          <a:ln/>
+        </p:spPr>
+        <p:txBody>
+          <a:bodyPr wrap="square" rtlCol="0" anchor="ctr"/>
+          <a:lstStyle/>
+          <a:p>
+            <a:pPr marL="0" indent="0" algn="ctr">
+              <a:buNone/>
+            </a:pPr>
+            <a:r>
+              <a:rPr lang="en-US" sz="1700" b="1" dirty="0">
+                <a:solidFill>
+                  <a:srgbClr val="FFFFFF"/>
+                </a:solidFill>
+                <a:latin typeface="Arial" pitchFamily="34" charset="0"/>
+                <a:ea typeface="Arial" pitchFamily="34" charset="-122"/>
+                <a:cs typeface="Arial" pitchFamily="34" charset="-120"/>
+              </a:rPr>
+              <a:t>4</a:t>
+            </a:r>
+            <a:endParaRPr lang="en-US" sz="1700" dirty="0"/>
+          </a:p>
+        </p:txBody>
+      </p:sp>
+      <p:sp>
+        <p:nvSpPr>
+          <p:cNvPr id="20" name="Text 18"/>
+          <p:cNvSpPr/>
+          <p:nvPr/>
+        </p:nvSpPr>
+        <p:spPr>
+          <a:xfrm>
+            <a:off x="7077456" y="2834640"/>
+            <a:ext cx="4379976" cy="1325880"/>
+          </a:xfrm>
+          <a:prstGeom prst="rect">
+            <a:avLst/>
+          </a:prstGeom>
+          <a:noFill/>
+          <a:ln/>
+        </p:spPr>
+        <p:txBody>
+          <a:bodyPr wrap="square" rtlCol="0" anchor="ctr"/>
+          <a:lstStyle/>
+          <a:p>
+            <a:pPr marL="0" indent="0">
+              <a:buNone/>
+            </a:pPr>
+            <a:r>
+              <a:rPr lang="en-US" sz="1500" dirty="0">
+                <a:solidFill>
+                  <a:srgbClr val="212121"/>
+                </a:solidFill>
+                <a:latin typeface="Arial" pitchFamily="34" charset="0"/>
+                <a:ea typeface="Arial" pitchFamily="34" charset="-122"/>
+                <a:cs typeface="Arial" pitchFamily="34" charset="-120"/>
+              </a:rPr>
+              <a:t>Cada capa falla de forma distinta y necesita su propia señal: borde (errores, latencia), aplicación (CPU, memoria), datos (conexiones, espacio).</a:t>
+            </a:r>
+            <a:endParaRPr lang="en-US" sz="1500" dirty="0"/>
+          </a:p>
+        </p:txBody>
+      </p:sp>
+      <p:sp>
+        <p:nvSpPr>
+          <p:cNvPr id="21" name="Shape 19"/>
+          <p:cNvSpPr/>
+          <p:nvPr/>
+        </p:nvSpPr>
+        <p:spPr>
+          <a:xfrm>
+            <a:off x="548640" y="4389120"/>
+            <a:ext cx="5431536" cy="1325880"/>
+          </a:xfrm>
+          <a:prstGeom prst="roundRect">
+            <a:avLst/>
+          </a:prstGeom>
+          <a:solidFill>
+            <a:srgbClr val="E8EAF6"/>
+          </a:solidFill>
+          <a:ln w="15875">
+            <a:solidFill>
+              <a:srgbClr val="3949AB"/>
+            </a:solidFill>
+            <a:prstDash val="solid"/>
+          </a:ln>
+        </p:spPr>
+        <p:txBody>
+          <a:bodyPr/>
+          <a:lstStyle/>
+          <a:p>
+            <a:endParaRPr lang="es-ES"/>
+          </a:p>
+        </p:txBody>
+      </p:sp>
+      <p:sp>
+        <p:nvSpPr>
+          <p:cNvPr id="22" name="Shape 20"/>
+          <p:cNvSpPr/>
+          <p:nvPr/>
+        </p:nvSpPr>
+        <p:spPr>
+          <a:xfrm>
+            <a:off x="731520" y="4759452"/>
+            <a:ext cx="566928" cy="566928"/>
+          </a:xfrm>
+          <a:prstGeom prst="ellipse">
+            <a:avLst/>
+          </a:prstGeom>
+          <a:solidFill>
+            <a:srgbClr val="3949AB"/>
+          </a:solidFill>
+          <a:ln w="12700">
+            <a:solidFill>
+              <a:srgbClr val="3949AB"/>
+            </a:solidFill>
+            <a:prstDash val="solid"/>
+          </a:ln>
+        </p:spPr>
+        <p:txBody>
+          <a:bodyPr/>
+          <a:lstStyle/>
+          <a:p>
+            <a:endParaRPr lang="es-ES"/>
+          </a:p>
+        </p:txBody>
+      </p:sp>
+      <p:sp>
+        <p:nvSpPr>
+          <p:cNvPr id="23" name="Text 21"/>
+          <p:cNvSpPr/>
+          <p:nvPr/>
+        </p:nvSpPr>
+        <p:spPr>
+          <a:xfrm>
+            <a:off x="731520" y="4759452"/>
+            <a:ext cx="566928" cy="566928"/>
+          </a:xfrm>
+          <a:prstGeom prst="rect">
+            <a:avLst/>
+          </a:prstGeom>
+          <a:noFill/>
+          <a:ln/>
+        </p:spPr>
+        <p:txBody>
+          <a:bodyPr wrap="square" rtlCol="0" anchor="ctr"/>
+          <a:lstStyle/>
+          <a:p>
+            <a:pPr marL="0" indent="0" algn="ctr">
+              <a:buNone/>
+            </a:pPr>
+            <a:r>
+              <a:rPr lang="en-US" sz="1700" b="1" dirty="0">
+                <a:solidFill>
+                  <a:srgbClr val="FFFFFF"/>
+                </a:solidFill>
+                <a:latin typeface="Arial" pitchFamily="34" charset="0"/>
+                <a:ea typeface="Arial" pitchFamily="34" charset="-122"/>
+                <a:cs typeface="Arial" pitchFamily="34" charset="-120"/>
+              </a:rPr>
+              <a:t>5</a:t>
+            </a:r>
+            <a:endParaRPr lang="en-US" sz="1700" dirty="0"/>
+          </a:p>
+        </p:txBody>
+      </p:sp>
+      <p:sp>
+        <p:nvSpPr>
+          <p:cNvPr id="24" name="Text 22"/>
+          <p:cNvSpPr/>
+          <p:nvPr/>
+        </p:nvSpPr>
+        <p:spPr>
+          <a:xfrm>
+            <a:off x="1417320" y="4389120"/>
+            <a:ext cx="4379976" cy="1325880"/>
+          </a:xfrm>
+          <a:prstGeom prst="rect">
+            <a:avLst/>
+          </a:prstGeom>
+          <a:noFill/>
+          <a:ln/>
+        </p:spPr>
+        <p:txBody>
+          <a:bodyPr wrap="square" rtlCol="0" anchor="ctr"/>
+          <a:lstStyle/>
+          <a:p>
+            <a:pPr marL="0" indent="0">
+              <a:buNone/>
+            </a:pPr>
+            <a:r>
+              <a:rPr lang="en-US" sz="1500" dirty="0">
+                <a:solidFill>
+                  <a:srgbClr val="212121"/>
+                </a:solidFill>
+                <a:latin typeface="Arial" pitchFamily="34" charset="0"/>
+                <a:ea typeface="Arial" pitchFamily="34" charset="-122"/>
+                <a:cs typeface="Arial" pitchFamily="34" charset="-120"/>
+              </a:rPr>
+              <a:t>Sin acceso al servidor, el diagnóstico se apoya en lo registrado: primero cuándo con las métricas, luego qué con los registros, y confirma con la auditoría.</a:t>
+            </a:r>
+            <a:endParaRPr lang="en-US" sz="1500" dirty="0"/>
+          </a:p>
+        </p:txBody>
+      </p:sp>
+      <p:sp>
+        <p:nvSpPr>
+          <p:cNvPr id="25" name="Shape 23"/>
+          <p:cNvSpPr/>
+          <p:nvPr/>
+        </p:nvSpPr>
+        <p:spPr>
+          <a:xfrm>
+            <a:off x="6208776" y="4389120"/>
+            <a:ext cx="5431536" cy="1325880"/>
+          </a:xfrm>
+          <a:prstGeom prst="roundRect">
+            <a:avLst/>
+          </a:prstGeom>
+          <a:solidFill>
+            <a:srgbClr val="E8EAF6"/>
+          </a:solidFill>
+          <a:ln w="15875">
+            <a:solidFill>
+              <a:srgbClr val="3949AB"/>
+            </a:solidFill>
+            <a:prstDash val="solid"/>
+          </a:ln>
+        </p:spPr>
+        <p:txBody>
+          <a:bodyPr/>
+          <a:lstStyle/>
+          <a:p>
+            <a:endParaRPr lang="es-ES"/>
+          </a:p>
+        </p:txBody>
+      </p:sp>
+      <p:sp>
+        <p:nvSpPr>
+          <p:cNvPr id="26" name="Shape 24"/>
+          <p:cNvSpPr/>
+          <p:nvPr/>
+        </p:nvSpPr>
+        <p:spPr>
+          <a:xfrm>
+            <a:off x="6391656" y="4759452"/>
+            <a:ext cx="566928" cy="566928"/>
+          </a:xfrm>
+          <a:prstGeom prst="ellipse">
+            <a:avLst/>
+          </a:prstGeom>
+          <a:solidFill>
+            <a:srgbClr val="3949AB"/>
+          </a:solidFill>
+          <a:ln w="12700">
+            <a:solidFill>
+              <a:srgbClr val="3949AB"/>
+            </a:solidFill>
+            <a:prstDash val="solid"/>
+          </a:ln>
+        </p:spPr>
+        <p:txBody>
+          <a:bodyPr/>
+          <a:lstStyle/>
+          <a:p>
+            <a:endParaRPr lang="es-ES"/>
+          </a:p>
+        </p:txBody>
+      </p:sp>
+      <p:sp>
+        <p:nvSpPr>
+          <p:cNvPr id="27" name="Text 25"/>
+          <p:cNvSpPr/>
+          <p:nvPr/>
+        </p:nvSpPr>
+        <p:spPr>
+          <a:xfrm>
+            <a:off x="6391656" y="4759452"/>
+            <a:ext cx="566928" cy="566928"/>
+          </a:xfrm>
+          <a:prstGeom prst="rect">
+            <a:avLst/>
+          </a:prstGeom>
+          <a:noFill/>
+          <a:ln/>
+        </p:spPr>
+        <p:txBody>
+          <a:bodyPr wrap="square" rtlCol="0" anchor="ctr"/>
+          <a:lstStyle/>
+          <a:p>
+            <a:pPr marL="0" indent="0" algn="ctr">
+              <a:buNone/>
+            </a:pPr>
+            <a:r>
+              <a:rPr lang="en-US" sz="1700" b="1" dirty="0">
+                <a:solidFill>
+                  <a:srgbClr val="FFFFFF"/>
+                </a:solidFill>
+                <a:latin typeface="Arial" pitchFamily="34" charset="0"/>
+                <a:ea typeface="Arial" pitchFamily="34" charset="-122"/>
+                <a:cs typeface="Arial" pitchFamily="34" charset="-120"/>
+              </a:rPr>
+              <a:t>6</a:t>
+            </a:r>
+            <a:endParaRPr lang="en-US" sz="1700" dirty="0"/>
+          </a:p>
+        </p:txBody>
+      </p:sp>
+      <p:sp>
+        <p:nvSpPr>
+          <p:cNvPr id="28" name="Text 26"/>
+          <p:cNvSpPr/>
+          <p:nvPr/>
+        </p:nvSpPr>
+        <p:spPr>
+          <a:xfrm>
+            <a:off x="7077456" y="4389120"/>
+            <a:ext cx="4379976" cy="1325880"/>
+          </a:xfrm>
+          <a:prstGeom prst="rect">
+            <a:avLst/>
+          </a:prstGeom>
+          <a:noFill/>
+          <a:ln/>
+        </p:spPr>
+        <p:txBody>
+          <a:bodyPr wrap="square" rtlCol="0" anchor="ctr"/>
+          <a:lstStyle/>
+          <a:p>
+            <a:pPr marL="0" indent="0">
+              <a:buNone/>
+            </a:pPr>
+            <a:r>
+              <a:rPr lang="en-US" sz="1500" dirty="0">
+                <a:solidFill>
+                  <a:srgbClr val="212121"/>
+                </a:solidFill>
+                <a:latin typeface="Arial" pitchFamily="34" charset="0"/>
+                <a:ea typeface="Arial" pitchFamily="34" charset="-122"/>
+                <a:cs typeface="Arial" pitchFamily="34" charset="-120"/>
+              </a:rPr>
+              <a:t>Los registros tienen coste mientras se conservan — fijar una retención razonable evita un gasto silencioso.</a:t>
+            </a:r>
+            <a:endParaRPr lang="en-US" sz="1500" dirty="0"/>
+          </a:p>
+        </p:txBody>
+      </p:sp>
     </p:spTree>
   </p:cSld>
   <p:clrMapOvr>
